--- a/S1-CL1-Cloud-Design-Build/delivery/topic_13/Topic_13_Slides.pptx
+++ b/S1-CL1-Cloud-Design-Build/delivery/topic_13/Topic_13_Slides.pptx
@@ -5,30 +5,31 @@
     <p:sldMasterId id="2147483648" r:id="rId1"/>
   </p:sldMasterIdLst>
   <p:sldIdLst>
-    <p:sldId id="256" r:id="rId2"/>
-    <p:sldId id="257" r:id="rId3"/>
-    <p:sldId id="258" r:id="rId4"/>
-    <p:sldId id="259" r:id="rId5"/>
-    <p:sldId id="260" r:id="rId6"/>
-    <p:sldId id="261" r:id="rId7"/>
-    <p:sldId id="262" r:id="rId8"/>
-    <p:sldId id="263" r:id="rId9"/>
-    <p:sldId id="264" r:id="rId10"/>
-    <p:sldId id="265" r:id="rId11"/>
-    <p:sldId id="266" r:id="rId12"/>
-    <p:sldId id="269" r:id="rId13"/>
-    <p:sldId id="267" r:id="rId14"/>
-    <p:sldId id="270" r:id="rId15"/>
-    <p:sldId id="271" r:id="rId16"/>
-    <p:sldId id="272" r:id="rId17"/>
-    <p:sldId id="273" r:id="rId18"/>
-    <p:sldId id="274" r:id="rId19"/>
-    <p:sldId id="275" r:id="rId20"/>
-    <p:sldId id="276" r:id="rId21"/>
-    <p:sldId id="277" r:id="rId22"/>
-    <p:sldId id="278" r:id="rId23"/>
+    <p:sldId id="256" r:id="rId7"/>
+    <p:sldId id="257" r:id="rId8"/>
+    <p:sldId id="258" r:id="rId9"/>
+    <p:sldId id="259" r:id="rId10"/>
+    <p:sldId id="260" r:id="rId11"/>
+    <p:sldId id="261" r:id="rId12"/>
+    <p:sldId id="262" r:id="rId13"/>
+    <p:sldId id="263" r:id="rId14"/>
+    <p:sldId id="264" r:id="rId15"/>
+    <p:sldId id="265" r:id="rId16"/>
+    <p:sldId id="266" r:id="rId17"/>
+    <p:sldId id="267" r:id="rId18"/>
+    <p:sldId id="268" r:id="rId19"/>
+    <p:sldId id="269" r:id="rId20"/>
+    <p:sldId id="270" r:id="rId21"/>
+    <p:sldId id="271" r:id="rId22"/>
+    <p:sldId id="272" r:id="rId23"/>
+    <p:sldId id="273" r:id="rId24"/>
+    <p:sldId id="274" r:id="rId25"/>
+    <p:sldId id="275" r:id="rId26"/>
+    <p:sldId id="276" r:id="rId27"/>
+    <p:sldId id="277" r:id="rId28"/>
+    <p:sldId id="278" r:id="rId29"/>
   </p:sldIdLst>
-  <p:sldSz cx="12192000" cy="6858000"/>
+  <p:sldSz cx="12191695" cy="6858000" type="screen4x3"/>
   <p:notesSz cx="6858000" cy="9144000"/>
   <p:defaultTextStyle>
     <a:defPPr>
@@ -125,22 +126,6 @@
       </a:defRPr>
     </a:lvl9pPr>
   </p:defaultTextStyle>
-  <p:extLst>
-    <p:ext uri="{EFAFB233-063F-42B5-8137-9DF3F51BA10A}">
-      <p15:sldGuideLst xmlns:p15="http://schemas.microsoft.com/office/powerpoint/2012/main">
-        <p15:guide id="1" orient="horz" pos="2160">
-          <p15:clr>
-            <a:srgbClr val="A4A3A4"/>
-          </p15:clr>
-        </p15:guide>
-        <p15:guide id="2" pos="2880">
-          <p15:clr>
-            <a:srgbClr val="A4A3A4"/>
-          </p15:clr>
-        </p15:guide>
-      </p15:sldGuideLst>
-    </p:ext>
-  </p:extLst>
 </p:presentation>
 </file>
 
@@ -182,9 +167,10 @@
           <a:lstStyle/>
           <a:p>
             <a:r>
-              <a:rPr lang="en-US"/>
+              <a:rPr lang="en-US" smtClean="0"/>
               <a:t>Click to edit Master title style</a:t>
             </a:r>
+            <a:endParaRPr lang="en-US"/>
           </a:p>
         </p:txBody>
       </p:sp>
@@ -300,9 +286,10 @@
           </a:lstStyle>
           <a:p>
             <a:r>
-              <a:rPr lang="en-US"/>
+              <a:rPr lang="en-US" smtClean="0"/>
               <a:t>Click to edit Master subtitle style</a:t>
             </a:r>
+            <a:endParaRPr lang="en-US"/>
           </a:p>
         </p:txBody>
       </p:sp>
@@ -323,7 +310,7 @@
           <a:p>
             <a:fld id="{5BCAD085-E8A6-8845-BD4E-CB4CCA059FC4}" type="datetimeFigureOut">
               <a:rPr lang="en-US" smtClean="0"/>
-              <a:t>6/4/2026</a:t>
+              <a:t>1/27/13</a:t>
             </a:fld>
             <a:endParaRPr lang="en-US"/>
           </a:p>
@@ -417,9 +404,10 @@
           <a:lstStyle/>
           <a:p>
             <a:r>
-              <a:rPr lang="en-US"/>
+              <a:rPr lang="en-US" smtClean="0"/>
               <a:t>Click to edit Master title style</a:t>
             </a:r>
+            <a:endParaRPr lang="en-US"/>
           </a:p>
         </p:txBody>
       </p:sp>
@@ -440,37 +428,38 @@
           <a:p>
             <a:pPr lvl="0"/>
             <a:r>
-              <a:rPr lang="en-US"/>
+              <a:rPr lang="en-US" smtClean="0"/>
               <a:t>Click to edit Master text styles</a:t>
             </a:r>
           </a:p>
           <a:p>
             <a:pPr lvl="1"/>
             <a:r>
-              <a:rPr lang="en-US"/>
+              <a:rPr lang="en-US" smtClean="0"/>
               <a:t>Second level</a:t>
             </a:r>
           </a:p>
           <a:p>
             <a:pPr lvl="2"/>
             <a:r>
-              <a:rPr lang="en-US"/>
+              <a:rPr lang="en-US" smtClean="0"/>
               <a:t>Third level</a:t>
             </a:r>
           </a:p>
           <a:p>
             <a:pPr lvl="3"/>
             <a:r>
-              <a:rPr lang="en-US"/>
+              <a:rPr lang="en-US" smtClean="0"/>
               <a:t>Fourth level</a:t>
             </a:r>
           </a:p>
           <a:p>
             <a:pPr lvl="4"/>
             <a:r>
-              <a:rPr lang="en-US"/>
+              <a:rPr lang="en-US" smtClean="0"/>
               <a:t>Fifth level</a:t>
             </a:r>
+            <a:endParaRPr lang="en-US"/>
           </a:p>
         </p:txBody>
       </p:sp>
@@ -491,7 +480,7 @@
           <a:p>
             <a:fld id="{5BCAD085-E8A6-8845-BD4E-CB4CCA059FC4}" type="datetimeFigureOut">
               <a:rPr lang="en-US" smtClean="0"/>
-              <a:t>6/4/2026</a:t>
+              <a:t>1/27/13</a:t>
             </a:fld>
             <a:endParaRPr lang="en-US"/>
           </a:p>
@@ -590,9 +579,10 @@
           <a:lstStyle/>
           <a:p>
             <a:r>
-              <a:rPr lang="en-US"/>
+              <a:rPr lang="en-US" smtClean="0"/>
               <a:t>Click to edit Master title style</a:t>
             </a:r>
+            <a:endParaRPr lang="en-US"/>
           </a:p>
         </p:txBody>
       </p:sp>
@@ -618,37 +608,38 @@
           <a:p>
             <a:pPr lvl="0"/>
             <a:r>
-              <a:rPr lang="en-US"/>
+              <a:rPr lang="en-US" smtClean="0"/>
               <a:t>Click to edit Master text styles</a:t>
             </a:r>
           </a:p>
           <a:p>
             <a:pPr lvl="1"/>
             <a:r>
-              <a:rPr lang="en-US"/>
+              <a:rPr lang="en-US" smtClean="0"/>
               <a:t>Second level</a:t>
             </a:r>
           </a:p>
           <a:p>
             <a:pPr lvl="2"/>
             <a:r>
-              <a:rPr lang="en-US"/>
+              <a:rPr lang="en-US" smtClean="0"/>
               <a:t>Third level</a:t>
             </a:r>
           </a:p>
           <a:p>
             <a:pPr lvl="3"/>
             <a:r>
-              <a:rPr lang="en-US"/>
+              <a:rPr lang="en-US" smtClean="0"/>
               <a:t>Fourth level</a:t>
             </a:r>
           </a:p>
           <a:p>
             <a:pPr lvl="4"/>
             <a:r>
-              <a:rPr lang="en-US"/>
+              <a:rPr lang="en-US" smtClean="0"/>
               <a:t>Fifth level</a:t>
             </a:r>
+            <a:endParaRPr lang="en-US"/>
           </a:p>
         </p:txBody>
       </p:sp>
@@ -669,7 +660,7 @@
           <a:p>
             <a:fld id="{5BCAD085-E8A6-8845-BD4E-CB4CCA059FC4}" type="datetimeFigureOut">
               <a:rPr lang="en-US" smtClean="0"/>
-              <a:t>6/4/2026</a:t>
+              <a:t>1/27/13</a:t>
             </a:fld>
             <a:endParaRPr lang="en-US"/>
           </a:p>
@@ -763,9 +754,10 @@
           <a:lstStyle/>
           <a:p>
             <a:r>
-              <a:rPr lang="en-US"/>
+              <a:rPr lang="en-US" smtClean="0"/>
               <a:t>Click to edit Master title style</a:t>
             </a:r>
+            <a:endParaRPr lang="en-US"/>
           </a:p>
         </p:txBody>
       </p:sp>
@@ -786,37 +778,38 @@
           <a:p>
             <a:pPr lvl="0"/>
             <a:r>
-              <a:rPr lang="en-US"/>
+              <a:rPr lang="en-US" smtClean="0"/>
               <a:t>Click to edit Master text styles</a:t>
             </a:r>
           </a:p>
           <a:p>
             <a:pPr lvl="1"/>
             <a:r>
-              <a:rPr lang="en-US"/>
+              <a:rPr lang="en-US" smtClean="0"/>
               <a:t>Second level</a:t>
             </a:r>
           </a:p>
           <a:p>
             <a:pPr lvl="2"/>
             <a:r>
-              <a:rPr lang="en-US"/>
+              <a:rPr lang="en-US" smtClean="0"/>
               <a:t>Third level</a:t>
             </a:r>
           </a:p>
           <a:p>
             <a:pPr lvl="3"/>
             <a:r>
-              <a:rPr lang="en-US"/>
+              <a:rPr lang="en-US" smtClean="0"/>
               <a:t>Fourth level</a:t>
             </a:r>
           </a:p>
           <a:p>
             <a:pPr lvl="4"/>
             <a:r>
-              <a:rPr lang="en-US"/>
+              <a:rPr lang="en-US" smtClean="0"/>
               <a:t>Fifth level</a:t>
             </a:r>
+            <a:endParaRPr lang="en-US"/>
           </a:p>
         </p:txBody>
       </p:sp>
@@ -837,7 +830,7 @@
           <a:p>
             <a:fld id="{5BCAD085-E8A6-8845-BD4E-CB4CCA059FC4}" type="datetimeFigureOut">
               <a:rPr lang="en-US" smtClean="0"/>
-              <a:t>6/4/2026</a:t>
+              <a:t>1/27/13</a:t>
             </a:fld>
             <a:endParaRPr lang="en-US"/>
           </a:p>
@@ -940,9 +933,10 @@
           </a:lstStyle>
           <a:p>
             <a:r>
-              <a:rPr lang="en-US"/>
+              <a:rPr lang="en-US" smtClean="0"/>
               <a:t>Click to edit Master title style</a:t>
             </a:r>
+            <a:endParaRPr lang="en-US"/>
           </a:p>
         </p:txBody>
       </p:sp>
@@ -1059,7 +1053,7 @@
           <a:p>
             <a:pPr lvl="0"/>
             <a:r>
-              <a:rPr lang="en-US"/>
+              <a:rPr lang="en-US" smtClean="0"/>
               <a:t>Click to edit Master text styles</a:t>
             </a:r>
           </a:p>
@@ -1082,7 +1076,7 @@
           <a:p>
             <a:fld id="{5BCAD085-E8A6-8845-BD4E-CB4CCA059FC4}" type="datetimeFigureOut">
               <a:rPr lang="en-US" smtClean="0"/>
-              <a:t>6/4/2026</a:t>
+              <a:t>1/27/13</a:t>
             </a:fld>
             <a:endParaRPr lang="en-US"/>
           </a:p>
@@ -1176,9 +1170,10 @@
           <a:lstStyle/>
           <a:p>
             <a:r>
-              <a:rPr lang="en-US"/>
+              <a:rPr lang="en-US" smtClean="0"/>
               <a:t>Click to edit Master title style</a:t>
             </a:r>
+            <a:endParaRPr lang="en-US"/>
           </a:p>
         </p:txBody>
       </p:sp>
@@ -1232,37 +1227,38 @@
           <a:p>
             <a:pPr lvl="0"/>
             <a:r>
-              <a:rPr lang="en-US"/>
+              <a:rPr lang="en-US" smtClean="0"/>
               <a:t>Click to edit Master text styles</a:t>
             </a:r>
           </a:p>
           <a:p>
             <a:pPr lvl="1"/>
             <a:r>
-              <a:rPr lang="en-US"/>
+              <a:rPr lang="en-US" smtClean="0"/>
               <a:t>Second level</a:t>
             </a:r>
           </a:p>
           <a:p>
             <a:pPr lvl="2"/>
             <a:r>
-              <a:rPr lang="en-US"/>
+              <a:rPr lang="en-US" smtClean="0"/>
               <a:t>Third level</a:t>
             </a:r>
           </a:p>
           <a:p>
             <a:pPr lvl="3"/>
             <a:r>
-              <a:rPr lang="en-US"/>
+              <a:rPr lang="en-US" smtClean="0"/>
               <a:t>Fourth level</a:t>
             </a:r>
           </a:p>
           <a:p>
             <a:pPr lvl="4"/>
             <a:r>
-              <a:rPr lang="en-US"/>
+              <a:rPr lang="en-US" smtClean="0"/>
               <a:t>Fifth level</a:t>
             </a:r>
+            <a:endParaRPr lang="en-US"/>
           </a:p>
         </p:txBody>
       </p:sp>
@@ -1316,37 +1312,38 @@
           <a:p>
             <a:pPr lvl="0"/>
             <a:r>
-              <a:rPr lang="en-US"/>
+              <a:rPr lang="en-US" smtClean="0"/>
               <a:t>Click to edit Master text styles</a:t>
             </a:r>
           </a:p>
           <a:p>
             <a:pPr lvl="1"/>
             <a:r>
-              <a:rPr lang="en-US"/>
+              <a:rPr lang="en-US" smtClean="0"/>
               <a:t>Second level</a:t>
             </a:r>
           </a:p>
           <a:p>
             <a:pPr lvl="2"/>
             <a:r>
-              <a:rPr lang="en-US"/>
+              <a:rPr lang="en-US" smtClean="0"/>
               <a:t>Third level</a:t>
             </a:r>
           </a:p>
           <a:p>
             <a:pPr lvl="3"/>
             <a:r>
-              <a:rPr lang="en-US"/>
+              <a:rPr lang="en-US" smtClean="0"/>
               <a:t>Fourth level</a:t>
             </a:r>
           </a:p>
           <a:p>
             <a:pPr lvl="4"/>
             <a:r>
-              <a:rPr lang="en-US"/>
+              <a:rPr lang="en-US" smtClean="0"/>
               <a:t>Fifth level</a:t>
             </a:r>
+            <a:endParaRPr lang="en-US"/>
           </a:p>
         </p:txBody>
       </p:sp>
@@ -1367,7 +1364,7 @@
           <a:p>
             <a:fld id="{5BCAD085-E8A6-8845-BD4E-CB4CCA059FC4}" type="datetimeFigureOut">
               <a:rPr lang="en-US" smtClean="0"/>
-              <a:t>6/4/2026</a:t>
+              <a:t>1/27/13</a:t>
             </a:fld>
             <a:endParaRPr lang="en-US"/>
           </a:p>
@@ -1465,9 +1462,10 @@
           </a:lstStyle>
           <a:p>
             <a:r>
-              <a:rPr lang="en-US"/>
+              <a:rPr lang="en-US" smtClean="0"/>
               <a:t>Click to edit Master title style</a:t>
             </a:r>
+            <a:endParaRPr lang="en-US"/>
           </a:p>
         </p:txBody>
       </p:sp>
@@ -1530,7 +1528,7 @@
           <a:p>
             <a:pPr lvl="0"/>
             <a:r>
-              <a:rPr lang="en-US"/>
+              <a:rPr lang="en-US" smtClean="0"/>
               <a:t>Click to edit Master text styles</a:t>
             </a:r>
           </a:p>
@@ -1586,37 +1584,38 @@
           <a:p>
             <a:pPr lvl="0"/>
             <a:r>
-              <a:rPr lang="en-US"/>
+              <a:rPr lang="en-US" smtClean="0"/>
               <a:t>Click to edit Master text styles</a:t>
             </a:r>
           </a:p>
           <a:p>
             <a:pPr lvl="1"/>
             <a:r>
-              <a:rPr lang="en-US"/>
+              <a:rPr lang="en-US" smtClean="0"/>
               <a:t>Second level</a:t>
             </a:r>
           </a:p>
           <a:p>
             <a:pPr lvl="2"/>
             <a:r>
-              <a:rPr lang="en-US"/>
+              <a:rPr lang="en-US" smtClean="0"/>
               <a:t>Third level</a:t>
             </a:r>
           </a:p>
           <a:p>
             <a:pPr lvl="3"/>
             <a:r>
-              <a:rPr lang="en-US"/>
+              <a:rPr lang="en-US" smtClean="0"/>
               <a:t>Fourth level</a:t>
             </a:r>
           </a:p>
           <a:p>
             <a:pPr lvl="4"/>
             <a:r>
-              <a:rPr lang="en-US"/>
+              <a:rPr lang="en-US" smtClean="0"/>
               <a:t>Fifth level</a:t>
             </a:r>
+            <a:endParaRPr lang="en-US"/>
           </a:p>
         </p:txBody>
       </p:sp>
@@ -1679,7 +1678,7 @@
           <a:p>
             <a:pPr lvl="0"/>
             <a:r>
-              <a:rPr lang="en-US"/>
+              <a:rPr lang="en-US" smtClean="0"/>
               <a:t>Click to edit Master text styles</a:t>
             </a:r>
           </a:p>
@@ -1735,37 +1734,38 @@
           <a:p>
             <a:pPr lvl="0"/>
             <a:r>
-              <a:rPr lang="en-US"/>
+              <a:rPr lang="en-US" smtClean="0"/>
               <a:t>Click to edit Master text styles</a:t>
             </a:r>
           </a:p>
           <a:p>
             <a:pPr lvl="1"/>
             <a:r>
-              <a:rPr lang="en-US"/>
+              <a:rPr lang="en-US" smtClean="0"/>
               <a:t>Second level</a:t>
             </a:r>
           </a:p>
           <a:p>
             <a:pPr lvl="2"/>
             <a:r>
-              <a:rPr lang="en-US"/>
+              <a:rPr lang="en-US" smtClean="0"/>
               <a:t>Third level</a:t>
             </a:r>
           </a:p>
           <a:p>
             <a:pPr lvl="3"/>
             <a:r>
-              <a:rPr lang="en-US"/>
+              <a:rPr lang="en-US" smtClean="0"/>
               <a:t>Fourth level</a:t>
             </a:r>
           </a:p>
           <a:p>
             <a:pPr lvl="4"/>
             <a:r>
-              <a:rPr lang="en-US"/>
+              <a:rPr lang="en-US" smtClean="0"/>
               <a:t>Fifth level</a:t>
             </a:r>
+            <a:endParaRPr lang="en-US"/>
           </a:p>
         </p:txBody>
       </p:sp>
@@ -1786,7 +1786,7 @@
           <a:p>
             <a:fld id="{5BCAD085-E8A6-8845-BD4E-CB4CCA059FC4}" type="datetimeFigureOut">
               <a:rPr lang="en-US" smtClean="0"/>
-              <a:t>6/4/2026</a:t>
+              <a:t>1/27/13</a:t>
             </a:fld>
             <a:endParaRPr lang="en-US"/>
           </a:p>
@@ -1880,9 +1880,10 @@
           <a:lstStyle/>
           <a:p>
             <a:r>
-              <a:rPr lang="en-US"/>
+              <a:rPr lang="en-US" smtClean="0"/>
               <a:t>Click to edit Master title style</a:t>
             </a:r>
+            <a:endParaRPr lang="en-US"/>
           </a:p>
         </p:txBody>
       </p:sp>
@@ -1903,7 +1904,7 @@
           <a:p>
             <a:fld id="{5BCAD085-E8A6-8845-BD4E-CB4CCA059FC4}" type="datetimeFigureOut">
               <a:rPr lang="en-US" smtClean="0"/>
-              <a:t>6/4/2026</a:t>
+              <a:t>1/27/13</a:t>
             </a:fld>
             <a:endParaRPr lang="en-US"/>
           </a:p>
@@ -1998,7 +1999,7 @@
           <a:p>
             <a:fld id="{5BCAD085-E8A6-8845-BD4E-CB4CCA059FC4}" type="datetimeFigureOut">
               <a:rPr lang="en-US" smtClean="0"/>
-              <a:t>6/4/2026</a:t>
+              <a:t>1/27/13</a:t>
             </a:fld>
             <a:endParaRPr lang="en-US"/>
           </a:p>
@@ -2101,9 +2102,10 @@
           </a:lstStyle>
           <a:p>
             <a:r>
-              <a:rPr lang="en-US"/>
+              <a:rPr lang="en-US" smtClean="0"/>
               <a:t>Click to edit Master title style</a:t>
             </a:r>
+            <a:endParaRPr lang="en-US"/>
           </a:p>
         </p:txBody>
       </p:sp>
@@ -2157,37 +2159,38 @@
           <a:p>
             <a:pPr lvl="0"/>
             <a:r>
-              <a:rPr lang="en-US"/>
+              <a:rPr lang="en-US" smtClean="0"/>
               <a:t>Click to edit Master text styles</a:t>
             </a:r>
           </a:p>
           <a:p>
             <a:pPr lvl="1"/>
             <a:r>
-              <a:rPr lang="en-US"/>
+              <a:rPr lang="en-US" smtClean="0"/>
               <a:t>Second level</a:t>
             </a:r>
           </a:p>
           <a:p>
             <a:pPr lvl="2"/>
             <a:r>
-              <a:rPr lang="en-US"/>
+              <a:rPr lang="en-US" smtClean="0"/>
               <a:t>Third level</a:t>
             </a:r>
           </a:p>
           <a:p>
             <a:pPr lvl="3"/>
             <a:r>
-              <a:rPr lang="en-US"/>
+              <a:rPr lang="en-US" smtClean="0"/>
               <a:t>Fourth level</a:t>
             </a:r>
           </a:p>
           <a:p>
             <a:pPr lvl="4"/>
             <a:r>
-              <a:rPr lang="en-US"/>
+              <a:rPr lang="en-US" smtClean="0"/>
               <a:t>Fifth level</a:t>
             </a:r>
+            <a:endParaRPr lang="en-US"/>
           </a:p>
         </p:txBody>
       </p:sp>
@@ -2250,7 +2253,7 @@
           <a:p>
             <a:pPr lvl="0"/>
             <a:r>
-              <a:rPr lang="en-US"/>
+              <a:rPr lang="en-US" smtClean="0"/>
               <a:t>Click to edit Master text styles</a:t>
             </a:r>
           </a:p>
@@ -2273,7 +2276,7 @@
           <a:p>
             <a:fld id="{5BCAD085-E8A6-8845-BD4E-CB4CCA059FC4}" type="datetimeFigureOut">
               <a:rPr lang="en-US" smtClean="0"/>
-              <a:t>6/4/2026</a:t>
+              <a:t>1/27/13</a:t>
             </a:fld>
             <a:endParaRPr lang="en-US"/>
           </a:p>
@@ -2376,9 +2379,10 @@
           </a:lstStyle>
           <a:p>
             <a:r>
-              <a:rPr lang="en-US"/>
+              <a:rPr lang="en-US" smtClean="0"/>
               <a:t>Click to edit Master title style</a:t>
             </a:r>
+            <a:endParaRPr lang="en-US"/>
           </a:p>
         </p:txBody>
       </p:sp>
@@ -2502,7 +2506,7 @@
           <a:p>
             <a:pPr lvl="0"/>
             <a:r>
-              <a:rPr lang="en-US"/>
+              <a:rPr lang="en-US" smtClean="0"/>
               <a:t>Click to edit Master text styles</a:t>
             </a:r>
           </a:p>
@@ -2525,7 +2529,7 @@
           <a:p>
             <a:fld id="{5BCAD085-E8A6-8845-BD4E-CB4CCA059FC4}" type="datetimeFigureOut">
               <a:rPr lang="en-US" smtClean="0"/>
-              <a:t>6/4/2026</a:t>
+              <a:t>1/27/13</a:t>
             </a:fld>
             <a:endParaRPr lang="en-US"/>
           </a:p>
@@ -2634,9 +2638,10 @@
           <a:lstStyle/>
           <a:p>
             <a:r>
-              <a:rPr lang="en-US"/>
+              <a:rPr lang="en-US" smtClean="0"/>
               <a:t>Click to edit Master title style</a:t>
             </a:r>
+            <a:endParaRPr lang="en-US"/>
           </a:p>
         </p:txBody>
       </p:sp>
@@ -2667,37 +2672,38 @@
           <a:p>
             <a:pPr lvl="0"/>
             <a:r>
-              <a:rPr lang="en-US"/>
+              <a:rPr lang="en-US" smtClean="0"/>
               <a:t>Click to edit Master text styles</a:t>
             </a:r>
           </a:p>
           <a:p>
             <a:pPr lvl="1"/>
             <a:r>
-              <a:rPr lang="en-US"/>
+              <a:rPr lang="en-US" smtClean="0"/>
               <a:t>Second level</a:t>
             </a:r>
           </a:p>
           <a:p>
             <a:pPr lvl="2"/>
             <a:r>
-              <a:rPr lang="en-US"/>
+              <a:rPr lang="en-US" smtClean="0"/>
               <a:t>Third level</a:t>
             </a:r>
           </a:p>
           <a:p>
             <a:pPr lvl="3"/>
             <a:r>
-              <a:rPr lang="en-US"/>
+              <a:rPr lang="en-US" smtClean="0"/>
               <a:t>Fourth level</a:t>
             </a:r>
           </a:p>
           <a:p>
             <a:pPr lvl="4"/>
             <a:r>
-              <a:rPr lang="en-US"/>
+              <a:rPr lang="en-US" smtClean="0"/>
               <a:t>Fifth level</a:t>
             </a:r>
+            <a:endParaRPr lang="en-US"/>
           </a:p>
         </p:txBody>
       </p:sp>
@@ -2736,7 +2742,7 @@
           <a:p>
             <a:fld id="{5BCAD085-E8A6-8845-BD4E-CB4CCA059FC4}" type="datetimeFigureOut">
               <a:rPr lang="en-US" smtClean="0"/>
-              <a:t>6/4/2026</a:t>
+              <a:t>1/27/13</a:t>
             </a:fld>
             <a:endParaRPr lang="en-US"/>
           </a:p>
@@ -3095,7 +3101,7 @@
 </file>
 
 <file path=ppt/slides/slide1.xml><?xml version="1.0" encoding="utf-8"?>
-<p:sld xmlns:a="http://schemas.openxmlformats.org/drawingml/2006/main" xmlns:r="http://schemas.openxmlformats.org/officeDocument/2006/relationships" xmlns:p="http://schemas.openxmlformats.org/presentationml/2006/main">
+<p:sld xmlns:a="http://schemas.openxmlformats.org/drawingml/2006/main" xmlns:p="http://schemas.openxmlformats.org/presentationml/2006/main" xmlns:r="http://schemas.openxmlformats.org/officeDocument/2006/relationships">
   <p:cSld>
     <p:bg>
       <p:bgPr>
@@ -3111,14 +3117,7 @@
         <p:cNvGrpSpPr/>
         <p:nvPr/>
       </p:nvGrpSpPr>
-      <p:grpSpPr>
-        <a:xfrm>
-          <a:off x="0" y="0"/>
-          <a:ext cx="0" cy="0"/>
-          <a:chOff x="0" y="0"/>
-          <a:chExt cx="0" cy="0"/>
-        </a:xfrm>
-      </p:grpSpPr>
+      <p:grpSpPr/>
       <p:sp>
         <p:nvSpPr>
           <p:cNvPr id="2" name="Rectangle 1"/>
@@ -3160,7 +3159,6 @@
           <a:lstStyle/>
           <a:p>
             <a:pPr algn="ctr"/>
-            <a:endParaRPr/>
           </a:p>
         </p:txBody>
       </p:sp>
@@ -3181,7 +3179,7 @@
           <a:noFill/>
         </p:spPr>
         <p:txBody>
-          <a:bodyPr wrap="square" lIns="0" tIns="0" rIns="0" bIns="0" anchor="t">
+          <a:bodyPr wrap="square" anchor="t" lIns="0" rIns="0" tIns="0" bIns="0">
             <a:spAutoFit/>
           </a:bodyPr>
           <a:lstStyle/>
@@ -3247,7 +3245,7 @@
           <a:noFill/>
         </p:spPr>
         <p:txBody>
-          <a:bodyPr wrap="square" lIns="0" tIns="0" rIns="0" bIns="0" anchor="t">
+          <a:bodyPr wrap="square" anchor="t" lIns="0" rIns="0" tIns="0" bIns="0">
             <a:spAutoFit/>
           </a:bodyPr>
           <a:lstStyle/>
@@ -3282,7 +3280,7 @@
 </file>
 
 <file path=ppt/slides/slide10.xml><?xml version="1.0" encoding="utf-8"?>
-<p:sld xmlns:a="http://schemas.openxmlformats.org/drawingml/2006/main" xmlns:r="http://schemas.openxmlformats.org/officeDocument/2006/relationships" xmlns:p="http://schemas.openxmlformats.org/presentationml/2006/main">
+<p:sld xmlns:a="http://schemas.openxmlformats.org/drawingml/2006/main" xmlns:p="http://schemas.openxmlformats.org/presentationml/2006/main" xmlns:r="http://schemas.openxmlformats.org/officeDocument/2006/relationships">
   <p:cSld>
     <p:bg>
       <p:bgPr>
@@ -3298,14 +3296,7 @@
         <p:cNvGrpSpPr/>
         <p:nvPr/>
       </p:nvGrpSpPr>
-      <p:grpSpPr>
-        <a:xfrm>
-          <a:off x="0" y="0"/>
-          <a:ext cx="0" cy="0"/>
-          <a:chOff x="0" y="0"/>
-          <a:chExt cx="0" cy="0"/>
-        </a:xfrm>
-      </p:grpSpPr>
+      <p:grpSpPr/>
       <p:sp>
         <p:nvSpPr>
           <p:cNvPr id="2" name="Rectangle 1"/>
@@ -3347,7 +3338,6 @@
           <a:lstStyle/>
           <a:p>
             <a:pPr algn="ctr"/>
-            <a:endParaRPr/>
           </a:p>
         </p:txBody>
       </p:sp>
@@ -3368,7 +3358,7 @@
           <a:noFill/>
         </p:spPr>
         <p:txBody>
-          <a:bodyPr wrap="square" lIns="0" tIns="0" rIns="0" bIns="0" anchor="t">
+          <a:bodyPr wrap="square" anchor="t" lIns="0" rIns="0" tIns="0" bIns="0">
             <a:spAutoFit/>
           </a:bodyPr>
           <a:lstStyle/>
@@ -3402,7 +3392,7 @@
           <a:noFill/>
         </p:spPr>
         <p:txBody>
-          <a:bodyPr wrap="square" lIns="0" tIns="0" rIns="0" bIns="0" anchor="t">
+          <a:bodyPr wrap="square" anchor="t" lIns="0" rIns="0" tIns="0" bIns="0">
             <a:spAutoFit/>
           </a:bodyPr>
           <a:lstStyle/>
@@ -3492,7 +3482,6 @@
           <a:lstStyle/>
           <a:p>
             <a:pPr algn="ctr"/>
-            <a:endParaRPr/>
           </a:p>
         </p:txBody>
       </p:sp>
@@ -3513,7 +3502,7 @@
           <a:noFill/>
         </p:spPr>
         <p:txBody>
-          <a:bodyPr wrap="square" lIns="0" tIns="0" rIns="0" bIns="0" anchor="t">
+          <a:bodyPr wrap="square" anchor="t" lIns="0" rIns="0" tIns="0" bIns="0">
             <a:spAutoFit/>
           </a:bodyPr>
           <a:lstStyle/>
@@ -3556,13 +3545,21 @@
           <a:noFill/>
         </p:spPr>
         <p:txBody>
-          <a:bodyPr wrap="square" lIns="0" tIns="0" rIns="0" bIns="0" anchor="t">
+          <a:bodyPr wrap="square" anchor="t" lIns="0" rIns="0" tIns="0" bIns="0">
             <a:spAutoFit/>
           </a:bodyPr>
           <a:lstStyle/>
           <a:p>
             <a:pPr algn="r"/>
-            <a:endParaRPr/>
+            <a:r>
+              <a:rPr sz="1100" b="0" i="0">
+                <a:solidFill>
+                  <a:srgbClr val="7A7A7A"/>
+                </a:solidFill>
+                <a:latin typeface="Roboto"/>
+              </a:rPr>
+              <a:t/>
+            </a:r>
           </a:p>
         </p:txBody>
       </p:sp>
@@ -3575,7 +3572,7 @@
 </file>
 
 <file path=ppt/slides/slide11.xml><?xml version="1.0" encoding="utf-8"?>
-<p:sld xmlns:a="http://schemas.openxmlformats.org/drawingml/2006/main" xmlns:r="http://schemas.openxmlformats.org/officeDocument/2006/relationships" xmlns:p="http://schemas.openxmlformats.org/presentationml/2006/main">
+<p:sld xmlns:a="http://schemas.openxmlformats.org/drawingml/2006/main" xmlns:p="http://schemas.openxmlformats.org/presentationml/2006/main" xmlns:r="http://schemas.openxmlformats.org/officeDocument/2006/relationships">
   <p:cSld>
     <p:bg>
       <p:bgPr>
@@ -3591,14 +3588,7 @@
         <p:cNvGrpSpPr/>
         <p:nvPr/>
       </p:nvGrpSpPr>
-      <p:grpSpPr>
-        <a:xfrm>
-          <a:off x="0" y="0"/>
-          <a:ext cx="0" cy="0"/>
-          <a:chOff x="0" y="0"/>
-          <a:chExt cx="0" cy="0"/>
-        </a:xfrm>
-      </p:grpSpPr>
+      <p:grpSpPr/>
       <p:sp>
         <p:nvSpPr>
           <p:cNvPr id="2" name="TextBox 1"/>
@@ -3608,7 +3598,7 @@
         <p:spPr>
           <a:xfrm>
             <a:off x="640080" y="457200"/>
-            <a:ext cx="10881360" cy="430887"/>
+            <a:ext cx="10881360" cy="960120"/>
           </a:xfrm>
           <a:prstGeom prst="rect">
             <a:avLst/>
@@ -3616,19 +3606,35 @@
           <a:noFill/>
         </p:spPr>
         <p:txBody>
-          <a:bodyPr wrap="square" lIns="0" tIns="0" rIns="0" bIns="0" anchor="t">
+          <a:bodyPr wrap="square" anchor="t" lIns="0" rIns="0" tIns="0" bIns="0">
             <a:spAutoFit/>
           </a:bodyPr>
           <a:lstStyle/>
           <a:p>
             <a:r>
-              <a:rPr sz="2800" b="1" i="0" dirty="0">
+              <a:rPr sz="2800" b="1" i="0">
                 <a:solidFill>
                   <a:srgbClr val="2A2929"/>
                 </a:solidFill>
                 <a:latin typeface="Roboto"/>
               </a:rPr>
               <a:t>Why simulate?</a:t>
+            </a:r>
+          </a:p>
+          <a:p>
+            <a:pPr>
+              <a:spcBef>
+                <a:spcPts val="200"/>
+              </a:spcBef>
+            </a:pPr>
+            <a:r>
+              <a:rPr sz="1800" b="0" i="1">
+                <a:solidFill>
+                  <a:srgbClr val="D68E10"/>
+                </a:solidFill>
+                <a:latin typeface="Roboto Light"/>
+              </a:rPr>
+              <a:t>ICTCLD502 · Implement &amp; finalise</a:t>
             </a:r>
           </a:p>
         </p:txBody>
@@ -3641,7 +3647,7 @@
         </p:nvSpPr>
         <p:spPr>
           <a:xfrm>
-            <a:off x="658368" y="1001879"/>
+            <a:off x="658368" y="1371600"/>
             <a:ext cx="1463040" cy="50800"/>
           </a:xfrm>
           <a:prstGeom prst="rect">
@@ -3674,7 +3680,6 @@
           <a:lstStyle/>
           <a:p>
             <a:pPr algn="ctr"/>
-            <a:endParaRPr/>
           </a:p>
         </p:txBody>
       </p:sp>
@@ -3687,7 +3692,7 @@
         <p:spPr>
           <a:xfrm>
             <a:off x="658368" y="1691640"/>
-            <a:ext cx="10881360" cy="3239733"/>
+            <a:ext cx="10881360" cy="4480560"/>
           </a:xfrm>
           <a:prstGeom prst="rect">
             <a:avLst/>
@@ -3695,7 +3700,7 @@
           <a:noFill/>
         </p:spPr>
         <p:txBody>
-          <a:bodyPr wrap="square" lIns="0" tIns="0" rIns="0" bIns="0" anchor="t">
+          <a:bodyPr wrap="square" anchor="ctr" lIns="0" rIns="0" tIns="0" bIns="0">
             <a:spAutoFit/>
           </a:bodyPr>
           <a:lstStyle/>
@@ -3712,7 +3717,7 @@
               </a:spcAft>
             </a:pPr>
             <a:r>
-              <a:rPr sz="1800" b="1" i="0" dirty="0">
+              <a:rPr sz="2400" b="1" i="0">
                 <a:solidFill>
                   <a:srgbClr val="EDAB0C"/>
                 </a:solidFill>
@@ -3721,7 +3726,7 @@
               <a:t>■  </a:t>
             </a:r>
             <a:r>
-              <a:rPr sz="1800" b="0" i="0" dirty="0">
+              <a:rPr sz="2400" b="0" i="0">
                 <a:solidFill>
                   <a:srgbClr val="2A2929"/>
                 </a:solidFill>
@@ -3743,13 +3748,22 @@
               </a:spcAft>
             </a:pPr>
             <a:r>
-              <a:rPr sz="1800" b="1" i="0" dirty="0">
+              <a:rPr sz="2400" b="1" i="0">
                 <a:solidFill>
                   <a:srgbClr val="27B5CE"/>
                 </a:solidFill>
                 <a:latin typeface="Roboto"/>
               </a:rPr>
-              <a:t>■  In 2016 Delta Air Lines had an outage when failed equipment exposed a backup that had never been tested — about US$100 million.</a:t>
+              <a:t>■  </a:t>
+            </a:r>
+            <a:r>
+              <a:rPr sz="2400" b="1" i="0">
+                <a:solidFill>
+                  <a:srgbClr val="27B5CE"/>
+                </a:solidFill>
+                <a:latin typeface="Roboto"/>
+              </a:rPr>
+              <a:t>In 2016 Delta Air Lines had an outage when failed equipment exposed a backup that had never been tested — about US$100 million.</a:t>
             </a:r>
           </a:p>
           <a:p>
@@ -3765,7 +3779,7 @@
               </a:spcAft>
             </a:pPr>
             <a:r>
-              <a:rPr sz="1800" b="1" i="0" dirty="0">
+              <a:rPr sz="2400" b="1" i="0">
                 <a:solidFill>
                   <a:srgbClr val="EDAB0C"/>
                 </a:solidFill>
@@ -3774,7 +3788,7 @@
               <a:t>■  </a:t>
             </a:r>
             <a:r>
-              <a:rPr sz="1800" b="0" i="0" dirty="0">
+              <a:rPr sz="2400" b="0" i="0">
                 <a:solidFill>
                   <a:srgbClr val="2A2929"/>
                 </a:solidFill>
@@ -3782,79 +3796,6 @@
               </a:rPr>
               <a:t>You simulate failures to confirm every part of the HA design actually works.</a:t>
             </a:r>
-            <a:endParaRPr lang="en-US" sz="1800" b="0" i="0" dirty="0">
-              <a:solidFill>
-                <a:srgbClr val="2A2929"/>
-              </a:solidFill>
-              <a:latin typeface="Roboto"/>
-            </a:endParaRPr>
-          </a:p>
-          <a:p>
-            <a:r>
-              <a:rPr lang="en-AU" sz="2000" b="1" dirty="0">
-                <a:solidFill>
-                  <a:srgbClr val="EDAB0C"/>
-                </a:solidFill>
-                <a:latin typeface="Roboto"/>
-              </a:rPr>
-              <a:t>■ </a:t>
-            </a:r>
-            <a:r>
-              <a:rPr lang="en-AU" sz="2000" dirty="0"/>
-              <a:t>Many ways to simulate a failure to confirm all elements of an HA design are working:</a:t>
-            </a:r>
-          </a:p>
-          <a:p>
-            <a:pPr lvl="1"/>
-            <a:r>
-              <a:rPr lang="en-AU" b="1" dirty="0"/>
-              <a:t>Disabling assets</a:t>
-            </a:r>
-            <a:r>
-              <a:rPr lang="en-AU" dirty="0"/>
-              <a:t>: turn off a server, simulating an outage.  Does the system respond correctly?</a:t>
-            </a:r>
-          </a:p>
-          <a:p>
-            <a:pPr lvl="1"/>
-            <a:r>
-              <a:rPr lang="en-AU" b="1" dirty="0"/>
-              <a:t>Network disruption</a:t>
-            </a:r>
-            <a:r>
-              <a:rPr lang="en-AU" dirty="0"/>
-              <a:t>: Block all traffic into subnet/from one connection. Does system fail over to secondary assets?</a:t>
-            </a:r>
-          </a:p>
-          <a:p>
-            <a:pPr lvl="1"/>
-            <a:r>
-              <a:rPr lang="en-AU" b="1" dirty="0"/>
-              <a:t>Scaling</a:t>
-            </a:r>
-            <a:r>
-              <a:rPr lang="en-AU" dirty="0"/>
-              <a:t>: perform load testing and confirm scaling up/down works</a:t>
-            </a:r>
-          </a:p>
-          <a:p>
-            <a:pPr marL="0" indent="0">
-              <a:lnSpc>
-                <a:spcPct val="105000"/>
-              </a:lnSpc>
-              <a:spcBef>
-                <a:spcPts val="0"/>
-              </a:spcBef>
-              <a:spcAft>
-                <a:spcPts val="1000"/>
-              </a:spcAft>
-            </a:pPr>
-            <a:endParaRPr sz="1800" b="0" i="0" dirty="0">
-              <a:solidFill>
-                <a:srgbClr val="2A2929"/>
-              </a:solidFill>
-              <a:latin typeface="Roboto"/>
-            </a:endParaRPr>
           </a:p>
         </p:txBody>
       </p:sp>
@@ -3899,7 +3840,6 @@
           <a:lstStyle/>
           <a:p>
             <a:pPr algn="ctr"/>
-            <a:endParaRPr/>
           </a:p>
         </p:txBody>
       </p:sp>
@@ -3920,7 +3860,7 @@
           <a:noFill/>
         </p:spPr>
         <p:txBody>
-          <a:bodyPr wrap="square" lIns="0" tIns="0" rIns="0" bIns="0" anchor="t">
+          <a:bodyPr wrap="square" anchor="t" lIns="0" rIns="0" tIns="0" bIns="0">
             <a:spAutoFit/>
           </a:bodyPr>
           <a:lstStyle/>
@@ -3963,7 +3903,7 @@
           <a:noFill/>
         </p:spPr>
         <p:txBody>
-          <a:bodyPr wrap="square" lIns="0" tIns="0" rIns="0" bIns="0" anchor="t">
+          <a:bodyPr wrap="square" anchor="t" lIns="0" rIns="0" tIns="0" bIns="0">
             <a:spAutoFit/>
           </a:bodyPr>
           <a:lstStyle/>
@@ -3990,7 +3930,7 @@
 </file>
 
 <file path=ppt/slides/slide12.xml><?xml version="1.0" encoding="utf-8"?>
-<p:sld xmlns:a="http://schemas.openxmlformats.org/drawingml/2006/main" xmlns:r="http://schemas.openxmlformats.org/officeDocument/2006/relationships" xmlns:p="http://schemas.openxmlformats.org/presentationml/2006/main">
+<p:sld xmlns:a="http://schemas.openxmlformats.org/drawingml/2006/main" xmlns:p="http://schemas.openxmlformats.org/presentationml/2006/main" xmlns:r="http://schemas.openxmlformats.org/officeDocument/2006/relationships">
   <p:cSld>
     <p:bg>
       <p:bgPr>
@@ -4006,14 +3946,7 @@
         <p:cNvGrpSpPr/>
         <p:nvPr/>
       </p:nvGrpSpPr>
-      <p:grpSpPr>
-        <a:xfrm>
-          <a:off x="0" y="0"/>
-          <a:ext cx="0" cy="0"/>
-          <a:chOff x="0" y="0"/>
-          <a:chExt cx="0" cy="0"/>
-        </a:xfrm>
-      </p:grpSpPr>
+      <p:grpSpPr/>
       <p:sp>
         <p:nvSpPr>
           <p:cNvPr id="2" name="TextBox 1"/>
@@ -4023,7 +3956,7 @@
         <p:spPr>
           <a:xfrm>
             <a:off x="640080" y="457200"/>
-            <a:ext cx="10881360" cy="430887"/>
+            <a:ext cx="10881360" cy="960120"/>
           </a:xfrm>
           <a:prstGeom prst="rect">
             <a:avLst/>
@@ -4031,19 +3964,35 @@
           <a:noFill/>
         </p:spPr>
         <p:txBody>
-          <a:bodyPr wrap="square" lIns="0" tIns="0" rIns="0" bIns="0" anchor="t">
+          <a:bodyPr wrap="square" anchor="t" lIns="0" rIns="0" tIns="0" bIns="0">
             <a:spAutoFit/>
           </a:bodyPr>
           <a:lstStyle/>
           <a:p>
             <a:r>
-              <a:rPr sz="2800" b="1" i="0" dirty="0">
+              <a:rPr sz="2800" b="1" i="0">
                 <a:solidFill>
                   <a:srgbClr val="2A2929"/>
                 </a:solidFill>
                 <a:latin typeface="Roboto"/>
               </a:rPr>
-              <a:t>Simulate resizes &amp; load</a:t>
+              <a:t>Monitor &amp; measure availability</a:t>
+            </a:r>
+          </a:p>
+          <a:p>
+            <a:pPr>
+              <a:spcBef>
+                <a:spcPts val="200"/>
+              </a:spcBef>
+            </a:pPr>
+            <a:r>
+              <a:rPr sz="1800" b="0" i="1">
+                <a:solidFill>
+                  <a:srgbClr val="D68E10"/>
+                </a:solidFill>
+                <a:latin typeface="Roboto Light"/>
+              </a:rPr>
+              <a:t>ICTCLD502 · Implement &amp; finalise</a:t>
             </a:r>
           </a:p>
         </p:txBody>
@@ -4056,7 +4005,7 @@
         </p:nvSpPr>
         <p:spPr>
           <a:xfrm>
-            <a:off x="658368" y="976987"/>
+            <a:off x="658368" y="1371600"/>
             <a:ext cx="1463040" cy="50800"/>
           </a:xfrm>
           <a:prstGeom prst="rect">
@@ -4089,7 +4038,6 @@
           <a:lstStyle/>
           <a:p>
             <a:pPr algn="ctr"/>
-            <a:endParaRPr/>
           </a:p>
         </p:txBody>
       </p:sp>
@@ -4110,7 +4058,7 @@
           <a:noFill/>
         </p:spPr>
         <p:txBody>
-          <a:bodyPr wrap="square" lIns="0" tIns="0" rIns="0" bIns="0" anchor="t">
+          <a:bodyPr wrap="square" anchor="ctr" lIns="0" rIns="0" tIns="0" bIns="0">
             <a:spAutoFit/>
           </a:bodyPr>
           <a:lstStyle/>
@@ -4127,7 +4075,7 @@
               </a:spcAft>
             </a:pPr>
             <a:r>
-              <a:rPr sz="1800" b="1" i="0">
+              <a:rPr sz="2400" b="1" i="0">
                 <a:solidFill>
                   <a:srgbClr val="EDAB0C"/>
                 </a:solidFill>
@@ -4136,13 +4084,13 @@
               <a:t>■  </a:t>
             </a:r>
             <a:r>
-              <a:rPr sz="1800" b="0" i="0">
+              <a:rPr sz="2400" b="0" i="0">
                 <a:solidFill>
                   <a:srgbClr val="2A2929"/>
                 </a:solidFill>
                 <a:latin typeface="Roboto"/>
               </a:rPr>
-              <a:t>Load testing — does it work under the expected workload (e.g. month-end peak)?</a:t>
+              <a:t>Watch uptime, errors and latency throughout the simulation — you can't prove availability you didn't measure.</a:t>
             </a:r>
           </a:p>
           <a:p>
@@ -4158,7 +4106,7 @@
               </a:spcAft>
             </a:pPr>
             <a:r>
-              <a:rPr sz="1800" b="1" i="0">
+              <a:rPr sz="2400" b="1" i="0">
                 <a:solidFill>
                   <a:srgbClr val="EDAB0C"/>
                 </a:solidFill>
@@ -4167,13 +4115,13 @@
               <a:t>■  </a:t>
             </a:r>
             <a:r>
-              <a:rPr sz="1800" b="0" i="0">
+              <a:rPr sz="2400" b="0" i="0">
                 <a:solidFill>
                   <a:srgbClr val="2A2929"/>
                 </a:solidFill>
                 <a:latin typeface="Roboto"/>
               </a:rPr>
-              <a:t>Stress testing — where's the breaking point, and does it fail gracefully (queued / busy messages, data safe)?</a:t>
+              <a:t>Use CloudWatch metrics + alarms and the AWS Health Dashboard.</a:t>
             </a:r>
           </a:p>
           <a:p>
@@ -4189,13 +4137,22 @@
               </a:spcAft>
             </a:pPr>
             <a:r>
-              <a:rPr sz="1800" b="1" i="0">
+              <a:rPr sz="2400" b="1" i="0">
                 <a:solidFill>
                   <a:srgbClr val="27B5CE"/>
                 </a:solidFill>
                 <a:latin typeface="Roboto"/>
               </a:rPr>
-              <a:t>■  Resize a component and measure the availability impact — vertical resizes often take a brief outage.</a:t>
+              <a:t>■  </a:t>
+            </a:r>
+            <a:r>
+              <a:rPr sz="2400" b="1" i="0">
+                <a:solidFill>
+                  <a:srgbClr val="27B5CE"/>
+                </a:solidFill>
+                <a:latin typeface="Roboto"/>
+              </a:rPr>
+              <a:t>Record the numbers before, during and after each simulated failure.</a:t>
             </a:r>
           </a:p>
         </p:txBody>
@@ -4241,7 +4198,6 @@
           <a:lstStyle/>
           <a:p>
             <a:pPr algn="ctr"/>
-            <a:endParaRPr/>
           </a:p>
         </p:txBody>
       </p:sp>
@@ -4262,7 +4218,7 @@
           <a:noFill/>
         </p:spPr>
         <p:txBody>
-          <a:bodyPr wrap="square" lIns="0" tIns="0" rIns="0" bIns="0" anchor="t">
+          <a:bodyPr wrap="square" anchor="t" lIns="0" rIns="0" tIns="0" bIns="0">
             <a:spAutoFit/>
           </a:bodyPr>
           <a:lstStyle/>
@@ -4305,7 +4261,7 @@
           <a:noFill/>
         </p:spPr>
         <p:txBody>
-          <a:bodyPr wrap="square" lIns="0" tIns="0" rIns="0" bIns="0" anchor="t">
+          <a:bodyPr wrap="square" anchor="t" lIns="0" rIns="0" tIns="0" bIns="0">
             <a:spAutoFit/>
           </a:bodyPr>
           <a:lstStyle/>
@@ -4318,58 +4274,11 @@
                 </a:solidFill>
                 <a:latin typeface="Roboto"/>
               </a:rPr>
-              <a:t>11</a:t>
-            </a:r>
-          </a:p>
-        </p:txBody>
-      </p:sp>
-      <p:pic>
-        <p:nvPicPr>
-          <p:cNvPr id="8" name="Picture 4" descr="Image for changelog">
-            <a:extLst>
-              <a:ext uri="{FF2B5EF4-FFF2-40B4-BE49-F238E27FC236}">
-                <a16:creationId xmlns:a16="http://schemas.microsoft.com/office/drawing/2014/main" id="{FF6CE51B-E77B-B22A-5477-7707F9B1C120}"/>
-              </a:ext>
-            </a:extLst>
-          </p:cNvPr>
-          <p:cNvPicPr>
-            <a:picLocks noChangeAspect="1" noChangeArrowheads="1"/>
-          </p:cNvPicPr>
-          <p:nvPr/>
-        </p:nvPicPr>
-        <p:blipFill rotWithShape="1">
-          <a:blip r:embed="rId2">
-            <a:extLst>
-              <a:ext uri="{28A0092B-C50C-407E-A947-70E740481C1C}">
-                <a14:useLocalDpi xmlns:a14="http://schemas.microsoft.com/office/drawing/2010/main" val="0"/>
-              </a:ext>
-            </a:extLst>
-          </a:blip>
-          <a:srcRect l="8750" t="7634" r="6000" b="39352"/>
-          <a:stretch>
-            <a:fillRect/>
-          </a:stretch>
-        </p:blipFill>
-        <p:spPr bwMode="auto">
-          <a:xfrm>
-            <a:off x="2716218" y="3713602"/>
-            <a:ext cx="6232125" cy="2138295"/>
-          </a:xfrm>
-          <a:prstGeom prst="rect">
-            <a:avLst/>
-          </a:prstGeom>
-          <a:noFill/>
-          <a:extLst>
-            <a:ext uri="{909E8E84-426E-40DD-AFC4-6F175D3DCCD1}">
-              <a14:hiddenFill xmlns:a14="http://schemas.microsoft.com/office/drawing/2010/main">
-                <a:solidFill>
-                  <a:srgbClr val="FFFFFF"/>
-                </a:solidFill>
-              </a14:hiddenFill>
-            </a:ext>
-          </a:extLst>
-        </p:spPr>
-      </p:pic>
+              <a:t>9</a:t>
+            </a:r>
+          </a:p>
+        </p:txBody>
+      </p:sp>
     </p:spTree>
   </p:cSld>
   <p:clrMapOvr>
@@ -4379,7 +4288,7 @@
 </file>
 
 <file path=ppt/slides/slide13.xml><?xml version="1.0" encoding="utf-8"?>
-<p:sld xmlns:a="http://schemas.openxmlformats.org/drawingml/2006/main" xmlns:r="http://schemas.openxmlformats.org/officeDocument/2006/relationships" xmlns:p="http://schemas.openxmlformats.org/presentationml/2006/main">
+<p:sld xmlns:a="http://schemas.openxmlformats.org/drawingml/2006/main" xmlns:p="http://schemas.openxmlformats.org/presentationml/2006/main" xmlns:r="http://schemas.openxmlformats.org/officeDocument/2006/relationships">
   <p:cSld>
     <p:bg>
       <p:bgPr>
@@ -4395,14 +4304,7 @@
         <p:cNvGrpSpPr/>
         <p:nvPr/>
       </p:nvGrpSpPr>
-      <p:grpSpPr>
-        <a:xfrm>
-          <a:off x="0" y="0"/>
-          <a:ext cx="0" cy="0"/>
-          <a:chOff x="0" y="0"/>
-          <a:chExt cx="0" cy="0"/>
-        </a:xfrm>
-      </p:grpSpPr>
+      <p:grpSpPr/>
       <p:sp>
         <p:nvSpPr>
           <p:cNvPr id="2" name="TextBox 1"/>
@@ -4412,7 +4314,7 @@
         <p:spPr>
           <a:xfrm>
             <a:off x="640080" y="457200"/>
-            <a:ext cx="10881360" cy="430887"/>
+            <a:ext cx="10881360" cy="960120"/>
           </a:xfrm>
           <a:prstGeom prst="rect">
             <a:avLst/>
@@ -4420,19 +4322,35 @@
           <a:noFill/>
         </p:spPr>
         <p:txBody>
-          <a:bodyPr wrap="square" lIns="0" tIns="0" rIns="0" bIns="0" anchor="t">
+          <a:bodyPr wrap="square" anchor="t" lIns="0" rIns="0" tIns="0" bIns="0">
             <a:spAutoFit/>
           </a:bodyPr>
           <a:lstStyle/>
           <a:p>
             <a:r>
-              <a:rPr sz="2800" b="1" i="0" dirty="0">
+              <a:rPr sz="2800" b="1" i="0">
                 <a:solidFill>
                   <a:srgbClr val="2A2929"/>
                 </a:solidFill>
                 <a:latin typeface="Roboto"/>
               </a:rPr>
-              <a:t>Monitor &amp; measure availability</a:t>
+              <a:t>Simulate failures</a:t>
+            </a:r>
+          </a:p>
+          <a:p>
+            <a:pPr>
+              <a:spcBef>
+                <a:spcPts val="200"/>
+              </a:spcBef>
+            </a:pPr>
+            <a:r>
+              <a:rPr sz="1800" b="0" i="1">
+                <a:solidFill>
+                  <a:srgbClr val="D68E10"/>
+                </a:solidFill>
+                <a:latin typeface="Roboto Light"/>
+              </a:rPr>
+              <a:t>ICTCLD502 · Implement &amp; finalise</a:t>
             </a:r>
           </a:p>
         </p:txBody>
@@ -4445,7 +4363,7 @@
         </p:nvSpPr>
         <p:spPr>
           <a:xfrm>
-            <a:off x="658368" y="1027279"/>
+            <a:off x="658368" y="1371600"/>
             <a:ext cx="1463040" cy="50800"/>
           </a:xfrm>
           <a:prstGeom prst="rect">
@@ -4478,7 +4396,6 @@
           <a:lstStyle/>
           <a:p>
             <a:pPr algn="ctr"/>
-            <a:endParaRPr/>
           </a:p>
         </p:txBody>
       </p:sp>
@@ -4490,8 +4407,8 @@
         </p:nvSpPr>
         <p:spPr>
           <a:xfrm>
-            <a:off x="658368" y="1581912"/>
-            <a:ext cx="10881360" cy="1823961"/>
+            <a:off x="658368" y="1691640"/>
+            <a:ext cx="10881360" cy="4480560"/>
           </a:xfrm>
           <a:prstGeom prst="rect">
             <a:avLst/>
@@ -4499,7 +4416,7 @@
           <a:noFill/>
         </p:spPr>
         <p:txBody>
-          <a:bodyPr wrap="square" lIns="0" tIns="0" rIns="0" bIns="0" anchor="t">
+          <a:bodyPr wrap="square" anchor="ctr" lIns="0" rIns="0" tIns="0" bIns="0">
             <a:spAutoFit/>
           </a:bodyPr>
           <a:lstStyle/>
@@ -4516,7 +4433,7 @@
               </a:spcAft>
             </a:pPr>
             <a:r>
-              <a:rPr sz="1800" b="1" i="0" dirty="0">
+              <a:rPr sz="2400" b="1" i="0">
                 <a:solidFill>
                   <a:srgbClr val="EDAB0C"/>
                 </a:solidFill>
@@ -4525,13 +4442,13 @@
               <a:t>■  </a:t>
             </a:r>
             <a:r>
-              <a:rPr sz="1800" b="0" i="0" dirty="0">
+              <a:rPr sz="2400" b="0" i="0">
                 <a:solidFill>
                   <a:srgbClr val="2A2929"/>
                 </a:solidFill>
                 <a:latin typeface="Roboto"/>
               </a:rPr>
-              <a:t>Watch uptime, errors and latency throughout the simulation — you can't prove availability you didn't measure.</a:t>
+              <a:t>Disable assets — terminate an instance, or take down an Availability Zone's resources.</a:t>
             </a:r>
           </a:p>
           <a:p>
@@ -4547,7 +4464,7 @@
               </a:spcAft>
             </a:pPr>
             <a:r>
-              <a:rPr sz="1800" b="1" i="0" dirty="0">
+              <a:rPr sz="2400" b="1" i="0">
                 <a:solidFill>
                   <a:srgbClr val="EDAB0C"/>
                 </a:solidFill>
@@ -4556,13 +4473,13 @@
               <a:t>■  </a:t>
             </a:r>
             <a:r>
-              <a:rPr sz="1800" b="0" i="0" dirty="0">
+              <a:rPr sz="2400" b="0" i="0">
                 <a:solidFill>
                   <a:srgbClr val="2A2929"/>
                 </a:solidFill>
                 <a:latin typeface="Roboto"/>
               </a:rPr>
-              <a:t>Use CloudWatch metrics + alarms and the AWS Health Dashboard.</a:t>
+              <a:t>Network disruption — block traffic to a subnet.</a:t>
             </a:r>
           </a:p>
           <a:p>
@@ -4578,39 +4495,23 @@
               </a:spcAft>
             </a:pPr>
             <a:r>
-              <a:rPr sz="1800" b="1" i="0" dirty="0">
+              <a:rPr sz="2400" b="1" i="0">
                 <a:solidFill>
                   <a:srgbClr val="27B5CE"/>
                 </a:solidFill>
                 <a:latin typeface="Roboto"/>
               </a:rPr>
-              <a:t>■  Record the numbers before, during and after each simulated failure.</a:t>
-            </a:r>
-            <a:endParaRPr lang="en-US" sz="1800" b="1" i="0" dirty="0">
-              <a:solidFill>
-                <a:srgbClr val="27B5CE"/>
-              </a:solidFill>
-              <a:latin typeface="Roboto"/>
-            </a:endParaRPr>
-          </a:p>
-          <a:p>
-            <a:pPr marL="0" indent="0">
-              <a:lnSpc>
-                <a:spcPct val="105000"/>
-              </a:lnSpc>
-              <a:spcBef>
-                <a:spcPts val="0"/>
-              </a:spcBef>
-              <a:spcAft>
-                <a:spcPts val="1000"/>
-              </a:spcAft>
-            </a:pPr>
-            <a:endParaRPr sz="1800" b="1" i="0" dirty="0">
-              <a:solidFill>
-                <a:srgbClr val="27B5CE"/>
-              </a:solidFill>
-              <a:latin typeface="Roboto"/>
-            </a:endParaRPr>
+              <a:t>■  </a:t>
+            </a:r>
+            <a:r>
+              <a:rPr sz="2400" b="1" i="0">
+                <a:solidFill>
+                  <a:srgbClr val="27B5CE"/>
+                </a:solidFill>
+                <a:latin typeface="Roboto"/>
+              </a:rPr>
+              <a:t>Confirm the system fails over to the redundant assets and keeps serving — that's fault tolerance proven.</a:t>
+            </a:r>
           </a:p>
         </p:txBody>
       </p:sp>
@@ -4655,7 +4556,6 @@
           <a:lstStyle/>
           <a:p>
             <a:pPr algn="ctr"/>
-            <a:endParaRPr/>
           </a:p>
         </p:txBody>
       </p:sp>
@@ -4676,7 +4576,7 @@
           <a:noFill/>
         </p:spPr>
         <p:txBody>
-          <a:bodyPr wrap="square" lIns="0" tIns="0" rIns="0" bIns="0" anchor="t">
+          <a:bodyPr wrap="square" anchor="t" lIns="0" rIns="0" tIns="0" bIns="0">
             <a:spAutoFit/>
           </a:bodyPr>
           <a:lstStyle/>
@@ -4719,7 +4619,7 @@
           <a:noFill/>
         </p:spPr>
         <p:txBody>
-          <a:bodyPr wrap="square" lIns="0" tIns="0" rIns="0" bIns="0" anchor="t">
+          <a:bodyPr wrap="square" anchor="t" lIns="0" rIns="0" tIns="0" bIns="0">
             <a:spAutoFit/>
           </a:bodyPr>
           <a:lstStyle/>
@@ -4732,7 +4632,7 @@
                 </a:solidFill>
                 <a:latin typeface="Roboto"/>
               </a:rPr>
-              <a:t>9</a:t>
+              <a:t>10</a:t>
             </a:r>
           </a:p>
         </p:txBody>
@@ -4746,7 +4646,7 @@
 </file>
 
 <file path=ppt/slides/slide14.xml><?xml version="1.0" encoding="utf-8"?>
-<p:sld xmlns:a="http://schemas.openxmlformats.org/drawingml/2006/main" xmlns:r="http://schemas.openxmlformats.org/officeDocument/2006/relationships" xmlns:p="http://schemas.openxmlformats.org/presentationml/2006/main">
+<p:sld xmlns:a="http://schemas.openxmlformats.org/drawingml/2006/main" xmlns:p="http://schemas.openxmlformats.org/presentationml/2006/main" xmlns:r="http://schemas.openxmlformats.org/officeDocument/2006/relationships">
   <p:cSld>
     <p:bg>
       <p:bgPr>
@@ -4762,24 +4662,67 @@
         <p:cNvGrpSpPr/>
         <p:nvPr/>
       </p:nvGrpSpPr>
-      <p:grpSpPr>
-        <a:xfrm>
-          <a:off x="0" y="0"/>
-          <a:ext cx="0" cy="0"/>
-          <a:chOff x="0" y="0"/>
-          <a:chExt cx="0" cy="0"/>
-        </a:xfrm>
-      </p:grpSpPr>
-      <p:sp>
-        <p:nvSpPr>
-          <p:cNvPr id="2" name="Rectangle 1"/>
+      <p:grpSpPr/>
+      <p:sp>
+        <p:nvSpPr>
+          <p:cNvPr id="2" name="TextBox 1"/>
+          <p:cNvSpPr txBox="1"/>
+          <p:nvPr/>
+        </p:nvSpPr>
+        <p:spPr>
+          <a:xfrm>
+            <a:off x="640080" y="457200"/>
+            <a:ext cx="10881360" cy="960120"/>
+          </a:xfrm>
+          <a:prstGeom prst="rect">
+            <a:avLst/>
+          </a:prstGeom>
+          <a:noFill/>
+        </p:spPr>
+        <p:txBody>
+          <a:bodyPr wrap="square" anchor="t" lIns="0" rIns="0" tIns="0" bIns="0">
+            <a:spAutoFit/>
+          </a:bodyPr>
+          <a:lstStyle/>
+          <a:p>
+            <a:r>
+              <a:rPr sz="2800" b="1" i="0">
+                <a:solidFill>
+                  <a:srgbClr val="2A2929"/>
+                </a:solidFill>
+                <a:latin typeface="Roboto"/>
+              </a:rPr>
+              <a:t>Simulate resizes &amp; load</a:t>
+            </a:r>
+          </a:p>
+          <a:p>
+            <a:pPr>
+              <a:spcBef>
+                <a:spcPts val="200"/>
+              </a:spcBef>
+            </a:pPr>
+            <a:r>
+              <a:rPr sz="1800" b="0" i="1">
+                <a:solidFill>
+                  <a:srgbClr val="D68E10"/>
+                </a:solidFill>
+                <a:latin typeface="Roboto Light"/>
+              </a:rPr>
+              <a:t>ICTCLD502 · Implement &amp; finalise</a:t>
+            </a:r>
+          </a:p>
+        </p:txBody>
+      </p:sp>
+      <p:sp>
+        <p:nvSpPr>
+          <p:cNvPr id="3" name="Rectangle 2"/>
           <p:cNvSpPr/>
           <p:nvPr/>
         </p:nvSpPr>
         <p:spPr>
           <a:xfrm>
-            <a:off x="0" y="0"/>
-            <a:ext cx="12191695" cy="1234440"/>
+            <a:off x="658368" y="1371600"/>
+            <a:ext cx="1463040" cy="50800"/>
           </a:xfrm>
           <a:prstGeom prst="rect">
             <a:avLst/>
@@ -4811,60 +4754,6 @@
           <a:lstStyle/>
           <a:p>
             <a:pPr algn="ctr"/>
-            <a:endParaRPr/>
-          </a:p>
-        </p:txBody>
-      </p:sp>
-      <p:sp>
-        <p:nvSpPr>
-          <p:cNvPr id="3" name="Rounded Rectangle 2"/>
-          <p:cNvSpPr/>
-          <p:nvPr/>
-        </p:nvSpPr>
-        <p:spPr>
-          <a:xfrm>
-            <a:off x="640080" y="384048"/>
-            <a:ext cx="1691640" cy="457200"/>
-          </a:xfrm>
-          <a:prstGeom prst="roundRect">
-            <a:avLst/>
-          </a:prstGeom>
-          <a:solidFill>
-            <a:srgbClr val="2A2929"/>
-          </a:solidFill>
-          <a:ln>
-            <a:noFill/>
-          </a:ln>
-          <a:effectLst/>
-        </p:spPr>
-        <p:style>
-          <a:lnRef idx="1">
-            <a:schemeClr val="accent1"/>
-          </a:lnRef>
-          <a:fillRef idx="3">
-            <a:schemeClr val="accent1"/>
-          </a:fillRef>
-          <a:effectRef idx="2">
-            <a:schemeClr val="accent1"/>
-          </a:effectRef>
-          <a:fontRef idx="minor">
-            <a:schemeClr val="lt1"/>
-          </a:fontRef>
-        </p:style>
-        <p:txBody>
-          <a:bodyPr rtlCol="0" anchor="ctr"/>
-          <a:lstStyle/>
-          <a:p>
-            <a:pPr algn="ctr"/>
-            <a:r>
-              <a:rPr sz="1400" b="1" i="0">
-                <a:solidFill>
-                  <a:srgbClr val="FBB900"/>
-                </a:solidFill>
-                <a:latin typeface="Roboto"/>
-              </a:rPr>
-              <a:t>ACTIVITY</a:t>
-            </a:r>
           </a:p>
         </p:txBody>
       </p:sp>
@@ -4876,8 +4765,8 @@
         </p:nvSpPr>
         <p:spPr>
           <a:xfrm>
-            <a:off x="2560320" y="310896"/>
-            <a:ext cx="8961120" cy="685800"/>
+            <a:off x="658368" y="1691640"/>
+            <a:ext cx="10881360" cy="4480560"/>
           </a:xfrm>
           <a:prstGeom prst="rect">
             <a:avLst/>
@@ -4885,41 +4774,7 @@
           <a:noFill/>
         </p:spPr>
         <p:txBody>
-          <a:bodyPr wrap="square" lIns="0" tIns="0" rIns="0" bIns="0" anchor="ctr">
-            <a:spAutoFit/>
-          </a:bodyPr>
-          <a:lstStyle/>
-          <a:p>
-            <a:r>
-              <a:rPr sz="2600" b="1" i="0">
-                <a:solidFill>
-                  <a:srgbClr val="FFFFFF"/>
-                </a:solidFill>
-                <a:latin typeface="Roboto"/>
-              </a:rPr>
-              <a:t>Run the simulations</a:t>
-            </a:r>
-          </a:p>
-        </p:txBody>
-      </p:sp>
-      <p:sp>
-        <p:nvSpPr>
-          <p:cNvPr id="5" name="TextBox 4"/>
-          <p:cNvSpPr txBox="1"/>
-          <p:nvPr/>
-        </p:nvSpPr>
-        <p:spPr>
-          <a:xfrm>
-            <a:off x="658368" y="1554480"/>
-            <a:ext cx="10881360" cy="4297680"/>
-          </a:xfrm>
-          <a:prstGeom prst="rect">
-            <a:avLst/>
-          </a:prstGeom>
-          <a:noFill/>
-        </p:spPr>
-        <p:txBody>
-          <a:bodyPr wrap="square" lIns="0" tIns="0" rIns="0" bIns="0" anchor="t">
+          <a:bodyPr wrap="square" anchor="ctr" lIns="0" rIns="0" tIns="0" bIns="0">
             <a:spAutoFit/>
           </a:bodyPr>
           <a:lstStyle/>
@@ -4936,6 +4791,401 @@
               </a:spcAft>
             </a:pPr>
             <a:r>
+              <a:rPr sz="2400" b="1" i="0">
+                <a:solidFill>
+                  <a:srgbClr val="EDAB0C"/>
+                </a:solidFill>
+                <a:latin typeface="Roboto"/>
+              </a:rPr>
+              <a:t>■  </a:t>
+            </a:r>
+            <a:r>
+              <a:rPr sz="2400" b="0" i="0">
+                <a:solidFill>
+                  <a:srgbClr val="2A2929"/>
+                </a:solidFill>
+                <a:latin typeface="Roboto"/>
+              </a:rPr>
+              <a:t>Load testing — does it work under the expected workload (e.g. month-end peak)?</a:t>
+            </a:r>
+          </a:p>
+          <a:p>
+            <a:pPr marL="0" indent="0">
+              <a:lnSpc>
+                <a:spcPct val="105000"/>
+              </a:lnSpc>
+              <a:spcBef>
+                <a:spcPts val="0"/>
+              </a:spcBef>
+              <a:spcAft>
+                <a:spcPts val="1000"/>
+              </a:spcAft>
+            </a:pPr>
+            <a:r>
+              <a:rPr sz="2400" b="1" i="0">
+                <a:solidFill>
+                  <a:srgbClr val="EDAB0C"/>
+                </a:solidFill>
+                <a:latin typeface="Roboto"/>
+              </a:rPr>
+              <a:t>■  </a:t>
+            </a:r>
+            <a:r>
+              <a:rPr sz="2400" b="0" i="0">
+                <a:solidFill>
+                  <a:srgbClr val="2A2929"/>
+                </a:solidFill>
+                <a:latin typeface="Roboto"/>
+              </a:rPr>
+              <a:t>Stress testing — where's the breaking point, and does it fail gracefully (queued / busy messages, data safe)?</a:t>
+            </a:r>
+          </a:p>
+          <a:p>
+            <a:pPr marL="0" indent="0">
+              <a:lnSpc>
+                <a:spcPct val="105000"/>
+              </a:lnSpc>
+              <a:spcBef>
+                <a:spcPts val="0"/>
+              </a:spcBef>
+              <a:spcAft>
+                <a:spcPts val="1000"/>
+              </a:spcAft>
+            </a:pPr>
+            <a:r>
+              <a:rPr sz="2400" b="1" i="0">
+                <a:solidFill>
+                  <a:srgbClr val="27B5CE"/>
+                </a:solidFill>
+                <a:latin typeface="Roboto"/>
+              </a:rPr>
+              <a:t>■  </a:t>
+            </a:r>
+            <a:r>
+              <a:rPr sz="2400" b="1" i="0">
+                <a:solidFill>
+                  <a:srgbClr val="27B5CE"/>
+                </a:solidFill>
+                <a:latin typeface="Roboto"/>
+              </a:rPr>
+              <a:t>Resize a component and measure the availability impact — vertical resizes often take a brief outage.</a:t>
+            </a:r>
+          </a:p>
+        </p:txBody>
+      </p:sp>
+      <p:sp>
+        <p:nvSpPr>
+          <p:cNvPr id="5" name="Rectangle 4"/>
+          <p:cNvSpPr/>
+          <p:nvPr/>
+        </p:nvSpPr>
+        <p:spPr>
+          <a:xfrm>
+            <a:off x="0" y="6565392"/>
+            <a:ext cx="12191695" cy="38100"/>
+          </a:xfrm>
+          <a:prstGeom prst="rect">
+            <a:avLst/>
+          </a:prstGeom>
+          <a:solidFill>
+            <a:srgbClr val="27B5CE"/>
+          </a:solidFill>
+          <a:ln>
+            <a:noFill/>
+          </a:ln>
+          <a:effectLst/>
+        </p:spPr>
+        <p:style>
+          <a:lnRef idx="1">
+            <a:schemeClr val="accent1"/>
+          </a:lnRef>
+          <a:fillRef idx="3">
+            <a:schemeClr val="accent1"/>
+          </a:fillRef>
+          <a:effectRef idx="2">
+            <a:schemeClr val="accent1"/>
+          </a:effectRef>
+          <a:fontRef idx="minor">
+            <a:schemeClr val="lt1"/>
+          </a:fontRef>
+        </p:style>
+        <p:txBody>
+          <a:bodyPr rtlCol="0" anchor="ctr"/>
+          <a:lstStyle/>
+          <a:p>
+            <a:pPr algn="ctr"/>
+          </a:p>
+        </p:txBody>
+      </p:sp>
+      <p:sp>
+        <p:nvSpPr>
+          <p:cNvPr id="6" name="TextBox 5"/>
+          <p:cNvSpPr txBox="1"/>
+          <p:nvPr/>
+        </p:nvSpPr>
+        <p:spPr>
+          <a:xfrm>
+            <a:off x="502920" y="6400800"/>
+            <a:ext cx="5486400" cy="320040"/>
+          </a:xfrm>
+          <a:prstGeom prst="rect">
+            <a:avLst/>
+          </a:prstGeom>
+          <a:noFill/>
+        </p:spPr>
+        <p:txBody>
+          <a:bodyPr wrap="square" anchor="t" lIns="0" rIns="0" tIns="0" bIns="0">
+            <a:spAutoFit/>
+          </a:bodyPr>
+          <a:lstStyle/>
+          <a:p>
+            <a:r>
+              <a:rPr sz="1100" b="1" i="0">
+                <a:solidFill>
+                  <a:srgbClr val="2A2929"/>
+                </a:solidFill>
+                <a:latin typeface="Roboto"/>
+              </a:rPr>
+              <a:t>Kangan </a:t>
+            </a:r>
+            <a:r>
+              <a:rPr sz="1100" b="1" i="0">
+                <a:solidFill>
+                  <a:srgbClr val="D68E10"/>
+                </a:solidFill>
+                <a:latin typeface="Roboto"/>
+              </a:rPr>
+              <a:t>Institute</a:t>
+            </a:r>
+          </a:p>
+        </p:txBody>
+      </p:sp>
+      <p:sp>
+        <p:nvSpPr>
+          <p:cNvPr id="7" name="TextBox 6"/>
+          <p:cNvSpPr txBox="1"/>
+          <p:nvPr/>
+        </p:nvSpPr>
+        <p:spPr>
+          <a:xfrm>
+            <a:off x="10515600" y="6400800"/>
+            <a:ext cx="1188720" cy="320040"/>
+          </a:xfrm>
+          <a:prstGeom prst="rect">
+            <a:avLst/>
+          </a:prstGeom>
+          <a:noFill/>
+        </p:spPr>
+        <p:txBody>
+          <a:bodyPr wrap="square" anchor="t" lIns="0" rIns="0" tIns="0" bIns="0">
+            <a:spAutoFit/>
+          </a:bodyPr>
+          <a:lstStyle/>
+          <a:p>
+            <a:pPr algn="r"/>
+            <a:r>
+              <a:rPr sz="1100" b="0" i="0">
+                <a:solidFill>
+                  <a:srgbClr val="7A7A7A"/>
+                </a:solidFill>
+                <a:latin typeface="Roboto"/>
+              </a:rPr>
+              <a:t>11</a:t>
+            </a:r>
+          </a:p>
+        </p:txBody>
+      </p:sp>
+    </p:spTree>
+  </p:cSld>
+  <p:clrMapOvr>
+    <a:masterClrMapping/>
+  </p:clrMapOvr>
+</p:sld>
+</file>
+
+<file path=ppt/slides/slide15.xml><?xml version="1.0" encoding="utf-8"?>
+<p:sld xmlns:a="http://schemas.openxmlformats.org/drawingml/2006/main" xmlns:p="http://schemas.openxmlformats.org/presentationml/2006/main" xmlns:r="http://schemas.openxmlformats.org/officeDocument/2006/relationships">
+  <p:cSld>
+    <p:bg>
+      <p:bgPr>
+        <a:solidFill>
+          <a:srgbClr val="FFFFFF"/>
+        </a:solidFill>
+        <a:effectLst/>
+      </p:bgPr>
+    </p:bg>
+    <p:spTree>
+      <p:nvGrpSpPr>
+        <p:cNvPr id="1" name=""/>
+        <p:cNvGrpSpPr/>
+        <p:nvPr/>
+      </p:nvGrpSpPr>
+      <p:grpSpPr/>
+      <p:sp>
+        <p:nvSpPr>
+          <p:cNvPr id="2" name="Rectangle 1"/>
+          <p:cNvSpPr/>
+          <p:nvPr/>
+        </p:nvSpPr>
+        <p:spPr>
+          <a:xfrm>
+            <a:off x="0" y="0"/>
+            <a:ext cx="12191695" cy="1234440"/>
+          </a:xfrm>
+          <a:prstGeom prst="rect">
+            <a:avLst/>
+          </a:prstGeom>
+          <a:solidFill>
+            <a:srgbClr val="27B5CE"/>
+          </a:solidFill>
+          <a:ln>
+            <a:noFill/>
+          </a:ln>
+          <a:effectLst/>
+        </p:spPr>
+        <p:style>
+          <a:lnRef idx="1">
+            <a:schemeClr val="accent1"/>
+          </a:lnRef>
+          <a:fillRef idx="3">
+            <a:schemeClr val="accent1"/>
+          </a:fillRef>
+          <a:effectRef idx="2">
+            <a:schemeClr val="accent1"/>
+          </a:effectRef>
+          <a:fontRef idx="minor">
+            <a:schemeClr val="lt1"/>
+          </a:fontRef>
+        </p:style>
+        <p:txBody>
+          <a:bodyPr rtlCol="0" anchor="ctr"/>
+          <a:lstStyle/>
+          <a:p>
+            <a:pPr algn="ctr"/>
+          </a:p>
+        </p:txBody>
+      </p:sp>
+      <p:sp>
+        <p:nvSpPr>
+          <p:cNvPr id="3" name="Rounded Rectangle 2"/>
+          <p:cNvSpPr/>
+          <p:nvPr/>
+        </p:nvSpPr>
+        <p:spPr>
+          <a:xfrm>
+            <a:off x="640080" y="384048"/>
+            <a:ext cx="1691640" cy="457200"/>
+          </a:xfrm>
+          <a:prstGeom prst="roundRect">
+            <a:avLst/>
+          </a:prstGeom>
+          <a:solidFill>
+            <a:srgbClr val="2A2929"/>
+          </a:solidFill>
+          <a:ln>
+            <a:noFill/>
+          </a:ln>
+          <a:effectLst/>
+        </p:spPr>
+        <p:style>
+          <a:lnRef idx="1">
+            <a:schemeClr val="accent1"/>
+          </a:lnRef>
+          <a:fillRef idx="3">
+            <a:schemeClr val="accent1"/>
+          </a:fillRef>
+          <a:effectRef idx="2">
+            <a:schemeClr val="accent1"/>
+          </a:effectRef>
+          <a:fontRef idx="minor">
+            <a:schemeClr val="lt1"/>
+          </a:fontRef>
+        </p:style>
+        <p:txBody>
+          <a:bodyPr rtlCol="0" anchor="ctr"/>
+          <a:lstStyle/>
+          <a:p>
+            <a:pPr algn="ctr"/>
+            <a:r>
+              <a:rPr sz="1400" b="1" i="0">
+                <a:solidFill>
+                  <a:srgbClr val="FBB900"/>
+                </a:solidFill>
+                <a:latin typeface="Roboto"/>
+              </a:rPr>
+              <a:t>ACTIVITY</a:t>
+            </a:r>
+          </a:p>
+        </p:txBody>
+      </p:sp>
+      <p:sp>
+        <p:nvSpPr>
+          <p:cNvPr id="4" name="TextBox 3"/>
+          <p:cNvSpPr txBox="1"/>
+          <p:nvPr/>
+        </p:nvSpPr>
+        <p:spPr>
+          <a:xfrm>
+            <a:off x="2560320" y="310896"/>
+            <a:ext cx="8961120" cy="685800"/>
+          </a:xfrm>
+          <a:prstGeom prst="rect">
+            <a:avLst/>
+          </a:prstGeom>
+          <a:noFill/>
+        </p:spPr>
+        <p:txBody>
+          <a:bodyPr wrap="square" anchor="ctr" lIns="0" rIns="0" tIns="0" bIns="0">
+            <a:spAutoFit/>
+          </a:bodyPr>
+          <a:lstStyle/>
+          <a:p>
+            <a:r>
+              <a:rPr sz="2600" b="1" i="0">
+                <a:solidFill>
+                  <a:srgbClr val="FFFFFF"/>
+                </a:solidFill>
+                <a:latin typeface="Roboto"/>
+              </a:rPr>
+              <a:t>Run the simulations</a:t>
+            </a:r>
+          </a:p>
+        </p:txBody>
+      </p:sp>
+      <p:sp>
+        <p:nvSpPr>
+          <p:cNvPr id="5" name="TextBox 4"/>
+          <p:cNvSpPr txBox="1"/>
+          <p:nvPr/>
+        </p:nvSpPr>
+        <p:spPr>
+          <a:xfrm>
+            <a:off x="658368" y="1554480"/>
+            <a:ext cx="10881360" cy="4297680"/>
+          </a:xfrm>
+          <a:prstGeom prst="rect">
+            <a:avLst/>
+          </a:prstGeom>
+          <a:noFill/>
+        </p:spPr>
+        <p:txBody>
+          <a:bodyPr wrap="square" anchor="t" lIns="0" rIns="0" tIns="0" bIns="0">
+            <a:spAutoFit/>
+          </a:bodyPr>
+          <a:lstStyle/>
+          <a:p>
+            <a:pPr marL="0" indent="0">
+              <a:lnSpc>
+                <a:spcPct val="105000"/>
+              </a:lnSpc>
+              <a:spcBef>
+                <a:spcPts val="0"/>
+              </a:spcBef>
+              <a:spcAft>
+                <a:spcPts val="1000"/>
+              </a:spcAft>
+            </a:pPr>
+            <a:r>
               <a:rPr sz="1700" b="1" i="0">
                 <a:solidFill>
                   <a:srgbClr val="EDAB0C"/>
@@ -5066,7 +5316,16 @@
                 </a:solidFill>
                 <a:latin typeface="Roboto"/>
               </a:rPr>
-              <a:t>■  Record the availability impact of each, with evidence.</a:t>
+              <a:t>■  </a:t>
+            </a:r>
+            <a:r>
+              <a:rPr sz="1700" b="1" i="0">
+                <a:solidFill>
+                  <a:srgbClr val="27B5CE"/>
+                </a:solidFill>
+                <a:latin typeface="Roboto"/>
+              </a:rPr>
+              <a:t>Record the availability impact of each, with evidence.</a:t>
             </a:r>
           </a:p>
         </p:txBody>
@@ -5114,7 +5373,6 @@
           <a:lstStyle/>
           <a:p>
             <a:pPr algn="ctr"/>
-            <a:endParaRPr/>
           </a:p>
         </p:txBody>
       </p:sp>
@@ -5135,7 +5393,7 @@
           <a:noFill/>
         </p:spPr>
         <p:txBody>
-          <a:bodyPr wrap="square" lIns="0" tIns="0" rIns="0" bIns="0" anchor="ctr">
+          <a:bodyPr wrap="square" anchor="ctr" lIns="0" rIns="0" tIns="0" bIns="0">
             <a:spAutoFit/>
           </a:bodyPr>
           <a:lstStyle/>
@@ -5193,7 +5451,6 @@
           <a:lstStyle/>
           <a:p>
             <a:pPr algn="ctr"/>
-            <a:endParaRPr/>
           </a:p>
         </p:txBody>
       </p:sp>
@@ -5214,7 +5471,7 @@
           <a:noFill/>
         </p:spPr>
         <p:txBody>
-          <a:bodyPr wrap="square" lIns="0" tIns="0" rIns="0" bIns="0" anchor="t">
+          <a:bodyPr wrap="square" anchor="t" lIns="0" rIns="0" tIns="0" bIns="0">
             <a:spAutoFit/>
           </a:bodyPr>
           <a:lstStyle/>
@@ -5257,7 +5514,7 @@
           <a:noFill/>
         </p:spPr>
         <p:txBody>
-          <a:bodyPr wrap="square" lIns="0" tIns="0" rIns="0" bIns="0" anchor="t">
+          <a:bodyPr wrap="square" anchor="t" lIns="0" rIns="0" tIns="0" bIns="0">
             <a:spAutoFit/>
           </a:bodyPr>
           <a:lstStyle/>
@@ -5283,8 +5540,8 @@
 </p:sld>
 </file>
 
-<file path=ppt/slides/slide15.xml><?xml version="1.0" encoding="utf-8"?>
-<p:sld xmlns:a="http://schemas.openxmlformats.org/drawingml/2006/main" xmlns:r="http://schemas.openxmlformats.org/officeDocument/2006/relationships" xmlns:p="http://schemas.openxmlformats.org/presentationml/2006/main">
+<file path=ppt/slides/slide16.xml><?xml version="1.0" encoding="utf-8"?>
+<p:sld xmlns:a="http://schemas.openxmlformats.org/drawingml/2006/main" xmlns:p="http://schemas.openxmlformats.org/presentationml/2006/main" xmlns:r="http://schemas.openxmlformats.org/officeDocument/2006/relationships">
   <p:cSld>
     <p:bg>
       <p:bgPr>
@@ -5300,14 +5557,7 @@
         <p:cNvGrpSpPr/>
         <p:nvPr/>
       </p:nvGrpSpPr>
-      <p:grpSpPr>
-        <a:xfrm>
-          <a:off x="0" y="0"/>
-          <a:ext cx="0" cy="0"/>
-          <a:chOff x="0" y="0"/>
-          <a:chExt cx="0" cy="0"/>
-        </a:xfrm>
-      </p:grpSpPr>
+      <p:grpSpPr/>
       <p:sp>
         <p:nvSpPr>
           <p:cNvPr id="2" name="TextBox 1"/>
@@ -5325,7 +5575,7 @@
           <a:noFill/>
         </p:spPr>
         <p:txBody>
-          <a:bodyPr wrap="square" lIns="0" tIns="0" rIns="0" bIns="0" anchor="t">
+          <a:bodyPr wrap="square" anchor="t" lIns="0" rIns="0" tIns="0" bIns="0">
             <a:spAutoFit/>
           </a:bodyPr>
           <a:lstStyle/>
@@ -5399,7 +5649,6 @@
           <a:lstStyle/>
           <a:p>
             <a:pPr algn="ctr"/>
-            <a:endParaRPr/>
           </a:p>
         </p:txBody>
       </p:sp>
@@ -5446,7 +5695,6 @@
           <a:lstStyle/>
           <a:p>
             <a:pPr algn="ctr"/>
-            <a:endParaRPr/>
           </a:p>
         </p:txBody>
       </p:sp>
@@ -5491,7 +5739,6 @@
           <a:lstStyle/>
           <a:p>
             <a:pPr algn="ctr"/>
-            <a:endParaRPr/>
           </a:p>
         </p:txBody>
       </p:sp>
@@ -5512,7 +5759,7 @@
           <a:noFill/>
         </p:spPr>
         <p:txBody>
-          <a:bodyPr wrap="square" lIns="0" tIns="0" rIns="0" bIns="0" anchor="ctr">
+          <a:bodyPr wrap="square" anchor="ctr" lIns="0" rIns="0" tIns="0" bIns="0">
             <a:spAutoFit/>
           </a:bodyPr>
           <a:lstStyle/>
@@ -5577,7 +5824,6 @@
           <a:lstStyle/>
           <a:p>
             <a:pPr algn="ctr"/>
-            <a:endParaRPr/>
           </a:p>
         </p:txBody>
       </p:sp>
@@ -5622,7 +5868,6 @@
           <a:lstStyle/>
           <a:p>
             <a:pPr algn="ctr"/>
-            <a:endParaRPr/>
           </a:p>
         </p:txBody>
       </p:sp>
@@ -5643,7 +5888,7 @@
           <a:noFill/>
         </p:spPr>
         <p:txBody>
-          <a:bodyPr wrap="square" lIns="0" tIns="0" rIns="0" bIns="0" anchor="ctr">
+          <a:bodyPr wrap="square" anchor="ctr" lIns="0" rIns="0" tIns="0" bIns="0">
             <a:spAutoFit/>
           </a:bodyPr>
           <a:lstStyle/>
@@ -5708,7 +5953,6 @@
           <a:lstStyle/>
           <a:p>
             <a:pPr algn="ctr"/>
-            <a:endParaRPr/>
           </a:p>
         </p:txBody>
       </p:sp>
@@ -5753,7 +5997,6 @@
           <a:lstStyle/>
           <a:p>
             <a:pPr algn="ctr"/>
-            <a:endParaRPr/>
           </a:p>
         </p:txBody>
       </p:sp>
@@ -5774,7 +6017,7 @@
           <a:noFill/>
         </p:spPr>
         <p:txBody>
-          <a:bodyPr wrap="square" lIns="0" tIns="0" rIns="0" bIns="0" anchor="ctr">
+          <a:bodyPr wrap="square" anchor="ctr" lIns="0" rIns="0" tIns="0" bIns="0">
             <a:spAutoFit/>
           </a:bodyPr>
           <a:lstStyle/>
@@ -5839,7 +6082,6 @@
           <a:lstStyle/>
           <a:p>
             <a:pPr algn="ctr"/>
-            <a:endParaRPr/>
           </a:p>
         </p:txBody>
       </p:sp>
@@ -5884,7 +6126,6 @@
           <a:lstStyle/>
           <a:p>
             <a:pPr algn="ctr"/>
-            <a:endParaRPr/>
           </a:p>
         </p:txBody>
       </p:sp>
@@ -5905,7 +6146,7 @@
           <a:noFill/>
         </p:spPr>
         <p:txBody>
-          <a:bodyPr wrap="square" lIns="0" tIns="0" rIns="0" bIns="0" anchor="ctr">
+          <a:bodyPr wrap="square" anchor="ctr" lIns="0" rIns="0" tIns="0" bIns="0">
             <a:spAutoFit/>
           </a:bodyPr>
           <a:lstStyle/>
@@ -5968,7 +6209,6 @@
           <a:lstStyle/>
           <a:p>
             <a:pPr algn="ctr"/>
-            <a:endParaRPr/>
           </a:p>
         </p:txBody>
       </p:sp>
@@ -5989,7 +6229,7 @@
           <a:noFill/>
         </p:spPr>
         <p:txBody>
-          <a:bodyPr wrap="square" lIns="0" tIns="0" rIns="0" bIns="0" anchor="t">
+          <a:bodyPr wrap="square" anchor="t" lIns="0" rIns="0" tIns="0" bIns="0">
             <a:spAutoFit/>
           </a:bodyPr>
           <a:lstStyle/>
@@ -6032,7 +6272,7 @@
           <a:noFill/>
         </p:spPr>
         <p:txBody>
-          <a:bodyPr wrap="square" lIns="0" tIns="0" rIns="0" bIns="0" anchor="t">
+          <a:bodyPr wrap="square" anchor="t" lIns="0" rIns="0" tIns="0" bIns="0">
             <a:spAutoFit/>
           </a:bodyPr>
           <a:lstStyle/>
@@ -6058,8 +6298,8 @@
 </p:sld>
 </file>
 
-<file path=ppt/slides/slide16.xml><?xml version="1.0" encoding="utf-8"?>
-<p:sld xmlns:a="http://schemas.openxmlformats.org/drawingml/2006/main" xmlns:r="http://schemas.openxmlformats.org/officeDocument/2006/relationships" xmlns:p="http://schemas.openxmlformats.org/presentationml/2006/main">
+<file path=ppt/slides/slide17.xml><?xml version="1.0" encoding="utf-8"?>
+<p:sld xmlns:a="http://schemas.openxmlformats.org/drawingml/2006/main" xmlns:p="http://schemas.openxmlformats.org/presentationml/2006/main" xmlns:r="http://schemas.openxmlformats.org/officeDocument/2006/relationships">
   <p:cSld>
     <p:bg>
       <p:bgPr>
@@ -6075,14 +6315,7 @@
         <p:cNvGrpSpPr/>
         <p:nvPr/>
       </p:nvGrpSpPr>
-      <p:grpSpPr>
-        <a:xfrm>
-          <a:off x="0" y="0"/>
-          <a:ext cx="0" cy="0"/>
-          <a:chOff x="0" y="0"/>
-          <a:chExt cx="0" cy="0"/>
-        </a:xfrm>
-      </p:grpSpPr>
+      <p:grpSpPr/>
       <p:sp>
         <p:nvSpPr>
           <p:cNvPr id="2" name="Rectangle 1"/>
@@ -6124,7 +6357,6 @@
           <a:lstStyle/>
           <a:p>
             <a:pPr algn="ctr"/>
-            <a:endParaRPr/>
           </a:p>
         </p:txBody>
       </p:sp>
@@ -6145,7 +6377,7 @@
           <a:noFill/>
         </p:spPr>
         <p:txBody>
-          <a:bodyPr wrap="square" lIns="0" tIns="0" rIns="0" bIns="0" anchor="t">
+          <a:bodyPr wrap="square" anchor="t" lIns="0" rIns="0" tIns="0" bIns="0">
             <a:spAutoFit/>
           </a:bodyPr>
           <a:lstStyle/>
@@ -6179,7 +6411,7 @@
           <a:noFill/>
         </p:spPr>
         <p:txBody>
-          <a:bodyPr wrap="square" lIns="0" tIns="0" rIns="0" bIns="0" anchor="t">
+          <a:bodyPr wrap="square" anchor="t" lIns="0" rIns="0" tIns="0" bIns="0">
             <a:spAutoFit/>
           </a:bodyPr>
           <a:lstStyle/>
@@ -6269,7 +6501,6 @@
           <a:lstStyle/>
           <a:p>
             <a:pPr algn="ctr"/>
-            <a:endParaRPr/>
           </a:p>
         </p:txBody>
       </p:sp>
@@ -6290,7 +6521,7 @@
           <a:noFill/>
         </p:spPr>
         <p:txBody>
-          <a:bodyPr wrap="square" lIns="0" tIns="0" rIns="0" bIns="0" anchor="t">
+          <a:bodyPr wrap="square" anchor="t" lIns="0" rIns="0" tIns="0" bIns="0">
             <a:spAutoFit/>
           </a:bodyPr>
           <a:lstStyle/>
@@ -6333,13 +6564,21 @@
           <a:noFill/>
         </p:spPr>
         <p:txBody>
-          <a:bodyPr wrap="square" lIns="0" tIns="0" rIns="0" bIns="0" anchor="t">
+          <a:bodyPr wrap="square" anchor="t" lIns="0" rIns="0" tIns="0" bIns="0">
             <a:spAutoFit/>
           </a:bodyPr>
           <a:lstStyle/>
           <a:p>
             <a:pPr algn="r"/>
-            <a:endParaRPr/>
+            <a:r>
+              <a:rPr sz="1100" b="0" i="0">
+                <a:solidFill>
+                  <a:srgbClr val="7A7A7A"/>
+                </a:solidFill>
+                <a:latin typeface="Roboto"/>
+              </a:rPr>
+              <a:t/>
+            </a:r>
           </a:p>
         </p:txBody>
       </p:sp>
@@ -6351,8 +6590,8 @@
 </p:sld>
 </file>
 
-<file path=ppt/slides/slide17.xml><?xml version="1.0" encoding="utf-8"?>
-<p:sld xmlns:a="http://schemas.openxmlformats.org/drawingml/2006/main" xmlns:r="http://schemas.openxmlformats.org/officeDocument/2006/relationships" xmlns:p="http://schemas.openxmlformats.org/presentationml/2006/main">
+<file path=ppt/slides/slide18.xml><?xml version="1.0" encoding="utf-8"?>
+<p:sld xmlns:a="http://schemas.openxmlformats.org/drawingml/2006/main" xmlns:p="http://schemas.openxmlformats.org/presentationml/2006/main" xmlns:r="http://schemas.openxmlformats.org/officeDocument/2006/relationships">
   <p:cSld>
     <p:bg>
       <p:bgPr>
@@ -6368,14 +6607,7 @@
         <p:cNvGrpSpPr/>
         <p:nvPr/>
       </p:nvGrpSpPr>
-      <p:grpSpPr>
-        <a:xfrm>
-          <a:off x="0" y="0"/>
-          <a:ext cx="0" cy="0"/>
-          <a:chOff x="0" y="0"/>
-          <a:chExt cx="0" cy="0"/>
-        </a:xfrm>
-      </p:grpSpPr>
+      <p:grpSpPr/>
       <p:sp>
         <p:nvSpPr>
           <p:cNvPr id="2" name="TextBox 1"/>
@@ -6393,7 +6625,7 @@
           <a:noFill/>
         </p:spPr>
         <p:txBody>
-          <a:bodyPr wrap="square" lIns="0" tIns="0" rIns="0" bIns="0" anchor="t">
+          <a:bodyPr wrap="square" anchor="t" lIns="0" rIns="0" tIns="0" bIns="0">
             <a:spAutoFit/>
           </a:bodyPr>
           <a:lstStyle/>
@@ -6467,7 +6699,6 @@
           <a:lstStyle/>
           <a:p>
             <a:pPr algn="ctr"/>
-            <a:endParaRPr/>
           </a:p>
         </p:txBody>
       </p:sp>
@@ -6488,7 +6719,7 @@
           <a:noFill/>
         </p:spPr>
         <p:txBody>
-          <a:bodyPr wrap="square" lIns="0" tIns="0" rIns="0" bIns="0" anchor="t">
+          <a:bodyPr wrap="square" anchor="ctr" lIns="0" rIns="0" tIns="0" bIns="0">
             <a:spAutoFit/>
           </a:bodyPr>
           <a:lstStyle/>
@@ -6505,7 +6736,7 @@
               </a:spcAft>
             </a:pPr>
             <a:r>
-              <a:rPr sz="1800" b="1" i="0">
+              <a:rPr sz="2400" b="1" i="0">
                 <a:solidFill>
                   <a:srgbClr val="EDAB0C"/>
                 </a:solidFill>
@@ -6514,7 +6745,7 @@
               <a:t>■  </a:t>
             </a:r>
             <a:r>
-              <a:rPr sz="1800" b="0" i="0">
+              <a:rPr sz="2400" b="0" i="0">
                 <a:solidFill>
                   <a:srgbClr val="2A2929"/>
                 </a:solidFill>
@@ -6536,13 +6767,22 @@
               </a:spcAft>
             </a:pPr>
             <a:r>
-              <a:rPr sz="1800" b="1" i="0">
+              <a:rPr sz="2400" b="1" i="0">
                 <a:solidFill>
                   <a:srgbClr val="205F61"/>
                 </a:solidFill>
                 <a:latin typeface="Roboto"/>
               </a:rPr>
-              <a:t>■  Did the build meet its RPO/RTO? Did each SPOF's fix actually hold under failure?</a:t>
+              <a:t>■  </a:t>
+            </a:r>
+            <a:r>
+              <a:rPr sz="2400" b="1" i="0">
+                <a:solidFill>
+                  <a:srgbClr val="205F61"/>
+                </a:solidFill>
+                <a:latin typeface="Roboto"/>
+              </a:rPr>
+              <a:t>Did the build meet its RPO/RTO? Did each SPOF's fix actually hold under failure?</a:t>
             </a:r>
           </a:p>
           <a:p>
@@ -6558,7 +6798,7 @@
               </a:spcAft>
             </a:pPr>
             <a:r>
-              <a:rPr sz="1800" b="1" i="0">
+              <a:rPr sz="2400" b="1" i="0">
                 <a:solidFill>
                   <a:srgbClr val="EDAB0C"/>
                 </a:solidFill>
@@ -6567,7 +6807,7 @@
               <a:t>■  </a:t>
             </a:r>
             <a:r>
-              <a:rPr sz="1800" b="0" i="0">
+              <a:rPr sz="2400" b="0" i="0">
                 <a:solidFill>
                   <a:srgbClr val="2A2929"/>
                 </a:solidFill>
@@ -6619,7 +6859,6 @@
           <a:lstStyle/>
           <a:p>
             <a:pPr algn="ctr"/>
-            <a:endParaRPr/>
           </a:p>
         </p:txBody>
       </p:sp>
@@ -6640,7 +6879,7 @@
           <a:noFill/>
         </p:spPr>
         <p:txBody>
-          <a:bodyPr wrap="square" lIns="0" tIns="0" rIns="0" bIns="0" anchor="t">
+          <a:bodyPr wrap="square" anchor="t" lIns="0" rIns="0" tIns="0" bIns="0">
             <a:spAutoFit/>
           </a:bodyPr>
           <a:lstStyle/>
@@ -6683,7 +6922,7 @@
           <a:noFill/>
         </p:spPr>
         <p:txBody>
-          <a:bodyPr wrap="square" lIns="0" tIns="0" rIns="0" bIns="0" anchor="t">
+          <a:bodyPr wrap="square" anchor="t" lIns="0" rIns="0" tIns="0" bIns="0">
             <a:spAutoFit/>
           </a:bodyPr>
           <a:lstStyle/>
@@ -6709,8 +6948,8 @@
 </p:sld>
 </file>
 
-<file path=ppt/slides/slide18.xml><?xml version="1.0" encoding="utf-8"?>
-<p:sld xmlns:a="http://schemas.openxmlformats.org/drawingml/2006/main" xmlns:r="http://schemas.openxmlformats.org/officeDocument/2006/relationships" xmlns:p="http://schemas.openxmlformats.org/presentationml/2006/main">
+<file path=ppt/slides/slide19.xml><?xml version="1.0" encoding="utf-8"?>
+<p:sld xmlns:a="http://schemas.openxmlformats.org/drawingml/2006/main" xmlns:p="http://schemas.openxmlformats.org/presentationml/2006/main" xmlns:r="http://schemas.openxmlformats.org/officeDocument/2006/relationships">
   <p:cSld>
     <p:bg>
       <p:bgPr>
@@ -6726,14 +6965,7 @@
         <p:cNvGrpSpPr/>
         <p:nvPr/>
       </p:nvGrpSpPr>
-      <p:grpSpPr>
-        <a:xfrm>
-          <a:off x="0" y="0"/>
-          <a:ext cx="0" cy="0"/>
-          <a:chOff x="0" y="0"/>
-          <a:chExt cx="0" cy="0"/>
-        </a:xfrm>
-      </p:grpSpPr>
+      <p:grpSpPr/>
       <p:sp>
         <p:nvSpPr>
           <p:cNvPr id="2" name="TextBox 1"/>
@@ -6743,7 +6975,7 @@
         <p:spPr>
           <a:xfrm>
             <a:off x="640080" y="457200"/>
-            <a:ext cx="10881360" cy="430887"/>
+            <a:ext cx="10881360" cy="960120"/>
           </a:xfrm>
           <a:prstGeom prst="rect">
             <a:avLst/>
@@ -6751,19 +6983,35 @@
           <a:noFill/>
         </p:spPr>
         <p:txBody>
-          <a:bodyPr wrap="square" lIns="0" tIns="0" rIns="0" bIns="0" anchor="t">
+          <a:bodyPr wrap="square" anchor="t" lIns="0" rIns="0" tIns="0" bIns="0">
             <a:spAutoFit/>
           </a:bodyPr>
           <a:lstStyle/>
           <a:p>
             <a:r>
-              <a:rPr sz="2800" b="1" i="0" dirty="0">
+              <a:rPr sz="2800" b="1" i="0">
                 <a:solidFill>
                   <a:srgbClr val="2A2929"/>
                 </a:solidFill>
                 <a:latin typeface="Roboto"/>
               </a:rPr>
               <a:t>Improve availability if needed</a:t>
+            </a:r>
+          </a:p>
+          <a:p>
+            <a:pPr>
+              <a:spcBef>
+                <a:spcPts val="200"/>
+              </a:spcBef>
+            </a:pPr>
+            <a:r>
+              <a:rPr sz="1800" b="0" i="1">
+                <a:solidFill>
+                  <a:srgbClr val="D68E10"/>
+                </a:solidFill>
+                <a:latin typeface="Roboto Light"/>
+              </a:rPr>
+              <a:t>ICTCLD502 · Implement &amp; finalise</a:t>
             </a:r>
           </a:p>
         </p:txBody>
@@ -6776,7 +7024,7 @@
         </p:nvSpPr>
         <p:spPr>
           <a:xfrm>
-            <a:off x="658368" y="1001879"/>
+            <a:off x="658368" y="1371600"/>
             <a:ext cx="1463040" cy="50800"/>
           </a:xfrm>
           <a:prstGeom prst="rect">
@@ -6809,7 +7057,6 @@
           <a:lstStyle/>
           <a:p>
             <a:pPr algn="ctr"/>
-            <a:endParaRPr/>
           </a:p>
         </p:txBody>
       </p:sp>
@@ -6822,7 +7069,7 @@
         <p:spPr>
           <a:xfrm>
             <a:off x="658368" y="1691640"/>
-            <a:ext cx="10881360" cy="3772571"/>
+            <a:ext cx="10881360" cy="4480560"/>
           </a:xfrm>
           <a:prstGeom prst="rect">
             <a:avLst/>
@@ -6830,7 +7077,7 @@
           <a:noFill/>
         </p:spPr>
         <p:txBody>
-          <a:bodyPr wrap="square" lIns="0" tIns="0" rIns="0" bIns="0" anchor="t">
+          <a:bodyPr wrap="square" anchor="ctr" lIns="0" rIns="0" tIns="0" bIns="0">
             <a:spAutoFit/>
           </a:bodyPr>
           <a:lstStyle/>
@@ -6847,7 +7094,7 @@
               </a:spcAft>
             </a:pPr>
             <a:r>
-              <a:rPr sz="1800" b="1" i="0" dirty="0">
+              <a:rPr sz="2400" b="1" i="0">
                 <a:solidFill>
                   <a:srgbClr val="EDAB0C"/>
                 </a:solidFill>
@@ -6856,7 +7103,7 @@
               <a:t>■  </a:t>
             </a:r>
             <a:r>
-              <a:rPr sz="1800" b="0" i="0" dirty="0">
+              <a:rPr sz="2400" b="0" i="0">
                 <a:solidFill>
                   <a:srgbClr val="2A2929"/>
                 </a:solidFill>
@@ -6878,7 +7125,7 @@
               </a:spcAft>
             </a:pPr>
             <a:r>
-              <a:rPr sz="1500" b="0" i="0" dirty="0">
+              <a:rPr sz="2100" b="0" i="0">
                 <a:solidFill>
                   <a:srgbClr val="7A7A7A"/>
                 </a:solidFill>
@@ -6887,7 +7134,7 @@
               <a:t>–  </a:t>
             </a:r>
             <a:r>
-              <a:rPr sz="1500" b="0" i="0" dirty="0">
+              <a:rPr sz="2100" b="0" i="0">
                 <a:solidFill>
                   <a:srgbClr val="2A2929"/>
                 </a:solidFill>
@@ -6897,95 +7144,35 @@
             </a:r>
           </a:p>
           <a:p>
-            <a:r>
-              <a:rPr lang="en-AU" b="1" dirty="0">
-                <a:solidFill>
-                  <a:srgbClr val="EDAB0C"/>
-                </a:solidFill>
-                <a:latin typeface="Roboto"/>
-              </a:rPr>
-              <a:t>■ </a:t>
-            </a:r>
-            <a:r>
-              <a:rPr lang="en-AU" dirty="0"/>
-              <a:t>Consider making changes to your design:</a:t>
-            </a:r>
-          </a:p>
-          <a:p>
-            <a:pPr lvl="1"/>
-            <a:r>
-              <a:rPr lang="en-AU" b="1" dirty="0"/>
-              <a:t>Multi-AZ and Multi-Region Deployment</a:t>
-            </a:r>
-            <a:r>
-              <a:rPr lang="en-AU" dirty="0"/>
-              <a:t>: If workload fails due to outage, services elsewhere take over. e.g. Amazon RDS Multi-AZ.</a:t>
-            </a:r>
-          </a:p>
-          <a:p>
-            <a:pPr lvl="1"/>
-            <a:r>
-              <a:rPr lang="en-AU" b="1" dirty="0"/>
-              <a:t>Load Balancing</a:t>
-            </a:r>
-            <a:r>
-              <a:rPr lang="en-AU" dirty="0"/>
-              <a:t>: Distribute workload across resources. E.g. ALB Balancer for web traffic, or third-party LBs (e.g. F5 BIG-IP)</a:t>
-            </a:r>
-          </a:p>
-          <a:p>
-            <a:pPr lvl="1"/>
-            <a:r>
-              <a:rPr lang="en-AU" b="1" dirty="0"/>
-              <a:t>Extra Redundancy</a:t>
-            </a:r>
-            <a:r>
-              <a:rPr lang="en-AU" dirty="0"/>
-              <a:t>: key resources (servers, databases, network links) replicated so failure of one doesn’t cause downtime.</a:t>
-            </a:r>
-          </a:p>
-          <a:p>
-            <a:pPr lvl="1"/>
-            <a:r>
-              <a:rPr lang="en-AU" b="1" dirty="0"/>
-              <a:t>Managed Services with Built-In HA</a:t>
-            </a:r>
-            <a:r>
-              <a:rPr lang="en-AU" dirty="0"/>
-              <a:t>: Use services with built-in HA features. e.g. Amazon S3, DynamoDB.</a:t>
-            </a:r>
-          </a:p>
-          <a:p>
-            <a:pPr lvl="1"/>
-            <a:r>
-              <a:rPr lang="en-AU" b="1" dirty="0"/>
-              <a:t>Monitoring with auto-triggered actions</a:t>
-            </a:r>
-            <a:r>
-              <a:rPr lang="en-AU" dirty="0"/>
-              <a:t>: Utilise monitoring alarms that trigger automated recovery actions</a:t>
-            </a:r>
-          </a:p>
-          <a:p>
-            <a:pPr lvl="1"/>
-            <a:endParaRPr lang="en-AU" b="1" dirty="0">
-              <a:solidFill>
-                <a:srgbClr val="205F61"/>
-              </a:solidFill>
-              <a:latin typeface="Roboto"/>
-            </a:endParaRPr>
-          </a:p>
-          <a:p>
-            <a:r>
-              <a:rPr lang="en-US" b="1" dirty="0">
+            <a:pPr marL="0" indent="0">
+              <a:lnSpc>
+                <a:spcPct val="105000"/>
+              </a:lnSpc>
+              <a:spcBef>
+                <a:spcPts val="0"/>
+              </a:spcBef>
+              <a:spcAft>
+                <a:spcPts val="1000"/>
+              </a:spcAft>
+            </a:pPr>
+            <a:r>
+              <a:rPr sz="2400" b="1" i="0">
                 <a:solidFill>
                   <a:srgbClr val="205F61"/>
                 </a:solidFill>
                 <a:latin typeface="Roboto"/>
               </a:rPr>
-              <a:t>■ Make the change, then re-test to confirm the improvement.</a:t>
-            </a:r>
-            <a:endParaRPr lang="en-US" dirty="0"/>
+              <a:t>■  </a:t>
+            </a:r>
+            <a:r>
+              <a:rPr sz="2400" b="1" i="0">
+                <a:solidFill>
+                  <a:srgbClr val="205F61"/>
+                </a:solidFill>
+                <a:latin typeface="Roboto"/>
+              </a:rPr>
+              <a:t>Make the change, then re-test to confirm the improvement.</a:t>
+            </a:r>
           </a:p>
         </p:txBody>
       </p:sp>
@@ -7030,7 +7217,6 @@
           <a:lstStyle/>
           <a:p>
             <a:pPr algn="ctr"/>
-            <a:endParaRPr/>
           </a:p>
         </p:txBody>
       </p:sp>
@@ -7051,7 +7237,7 @@
           <a:noFill/>
         </p:spPr>
         <p:txBody>
-          <a:bodyPr wrap="square" lIns="0" tIns="0" rIns="0" bIns="0" anchor="t">
+          <a:bodyPr wrap="square" anchor="t" lIns="0" rIns="0" tIns="0" bIns="0">
             <a:spAutoFit/>
           </a:bodyPr>
           <a:lstStyle/>
@@ -7094,7 +7280,7 @@
           <a:noFill/>
         </p:spPr>
         <p:txBody>
-          <a:bodyPr wrap="square" lIns="0" tIns="0" rIns="0" bIns="0" anchor="t">
+          <a:bodyPr wrap="square" anchor="t" lIns="0" rIns="0" tIns="0" bIns="0">
             <a:spAutoFit/>
           </a:bodyPr>
           <a:lstStyle/>
@@ -7120,8 +7306,8 @@
 </p:sld>
 </file>
 
-<file path=ppt/slides/slide19.xml><?xml version="1.0" encoding="utf-8"?>
-<p:sld xmlns:a="http://schemas.openxmlformats.org/drawingml/2006/main" xmlns:r="http://schemas.openxmlformats.org/officeDocument/2006/relationships" xmlns:p="http://schemas.openxmlformats.org/presentationml/2006/main">
+<file path=ppt/slides/slide2.xml><?xml version="1.0" encoding="utf-8"?>
+<p:sld xmlns:a="http://schemas.openxmlformats.org/drawingml/2006/main" xmlns:p="http://schemas.openxmlformats.org/presentationml/2006/main" xmlns:r="http://schemas.openxmlformats.org/officeDocument/2006/relationships">
   <p:cSld>
     <p:bg>
       <p:bgPr>
@@ -7137,30 +7323,73 @@
         <p:cNvGrpSpPr/>
         <p:nvPr/>
       </p:nvGrpSpPr>
-      <p:grpSpPr>
-        <a:xfrm>
-          <a:off x="0" y="0"/>
-          <a:ext cx="0" cy="0"/>
-          <a:chOff x="0" y="0"/>
-          <a:chExt cx="0" cy="0"/>
-        </a:xfrm>
-      </p:grpSpPr>
-      <p:sp>
-        <p:nvSpPr>
-          <p:cNvPr id="2" name="Rectangle 1"/>
+      <p:grpSpPr/>
+      <p:sp>
+        <p:nvSpPr>
+          <p:cNvPr id="2" name="TextBox 1"/>
+          <p:cNvSpPr txBox="1"/>
+          <p:nvPr/>
+        </p:nvSpPr>
+        <p:spPr>
+          <a:xfrm>
+            <a:off x="640080" y="457200"/>
+            <a:ext cx="10881360" cy="960120"/>
+          </a:xfrm>
+          <a:prstGeom prst="rect">
+            <a:avLst/>
+          </a:prstGeom>
+          <a:noFill/>
+        </p:spPr>
+        <p:txBody>
+          <a:bodyPr wrap="square" anchor="t" lIns="0" rIns="0" tIns="0" bIns="0">
+            <a:spAutoFit/>
+          </a:bodyPr>
+          <a:lstStyle/>
+          <a:p>
+            <a:r>
+              <a:rPr sz="2800" b="1" i="0">
+                <a:solidFill>
+                  <a:srgbClr val="2A2929"/>
+                </a:solidFill>
+                <a:latin typeface="Roboto"/>
+              </a:rPr>
+              <a:t>Build it, then break it</a:t>
+            </a:r>
+          </a:p>
+          <a:p>
+            <a:pPr>
+              <a:spcBef>
+                <a:spcPts val="200"/>
+              </a:spcBef>
+            </a:pPr>
+            <a:r>
+              <a:rPr sz="1800" b="0" i="1">
+                <a:solidFill>
+                  <a:srgbClr val="D68E10"/>
+                </a:solidFill>
+                <a:latin typeface="Roboto Light"/>
+              </a:rPr>
+              <a:t>AT3 Part B skills</a:t>
+            </a:r>
+          </a:p>
+        </p:txBody>
+      </p:sp>
+      <p:sp>
+        <p:nvSpPr>
+          <p:cNvPr id="3" name="Rectangle 2"/>
           <p:cNvSpPr/>
           <p:nvPr/>
         </p:nvSpPr>
         <p:spPr>
           <a:xfrm>
-            <a:off x="0" y="0"/>
-            <a:ext cx="12191695" cy="1234440"/>
+            <a:off x="658368" y="1371600"/>
+            <a:ext cx="1463040" cy="50800"/>
           </a:xfrm>
           <a:prstGeom prst="rect">
             <a:avLst/>
           </a:prstGeom>
           <a:solidFill>
-            <a:srgbClr val="205F61"/>
+            <a:srgbClr val="EDAB0C"/>
           </a:solidFill>
           <a:ln>
             <a:noFill/>
@@ -7186,60 +7415,6 @@
           <a:lstStyle/>
           <a:p>
             <a:pPr algn="ctr"/>
-            <a:endParaRPr/>
-          </a:p>
-        </p:txBody>
-      </p:sp>
-      <p:sp>
-        <p:nvSpPr>
-          <p:cNvPr id="3" name="Rounded Rectangle 2"/>
-          <p:cNvSpPr/>
-          <p:nvPr/>
-        </p:nvSpPr>
-        <p:spPr>
-          <a:xfrm>
-            <a:off x="640080" y="384048"/>
-            <a:ext cx="1691640" cy="457200"/>
-          </a:xfrm>
-          <a:prstGeom prst="roundRect">
-            <a:avLst/>
-          </a:prstGeom>
-          <a:solidFill>
-            <a:srgbClr val="2A2929"/>
-          </a:solidFill>
-          <a:ln>
-            <a:noFill/>
-          </a:ln>
-          <a:effectLst/>
-        </p:spPr>
-        <p:style>
-          <a:lnRef idx="1">
-            <a:schemeClr val="accent1"/>
-          </a:lnRef>
-          <a:fillRef idx="3">
-            <a:schemeClr val="accent1"/>
-          </a:fillRef>
-          <a:effectRef idx="2">
-            <a:schemeClr val="accent1"/>
-          </a:effectRef>
-          <a:fontRef idx="minor">
-            <a:schemeClr val="lt1"/>
-          </a:fontRef>
-        </p:style>
-        <p:txBody>
-          <a:bodyPr rtlCol="0" anchor="ctr"/>
-          <a:lstStyle/>
-          <a:p>
-            <a:pPr algn="ctr"/>
-            <a:r>
-              <a:rPr sz="1400" b="1" i="0">
-                <a:solidFill>
-                  <a:srgbClr val="FBB900"/>
-                </a:solidFill>
-                <a:latin typeface="Roboto"/>
-              </a:rPr>
-              <a:t>ACTIVITY</a:t>
-            </a:r>
           </a:p>
         </p:txBody>
       </p:sp>
@@ -7251,8 +7426,8 @@
         </p:nvSpPr>
         <p:spPr>
           <a:xfrm>
-            <a:off x="2560320" y="310896"/>
-            <a:ext cx="8961120" cy="685800"/>
+            <a:off x="658368" y="1691640"/>
+            <a:ext cx="10881360" cy="4480560"/>
           </a:xfrm>
           <a:prstGeom prst="rect">
             <a:avLst/>
@@ -7260,41 +7435,7 @@
           <a:noFill/>
         </p:spPr>
         <p:txBody>
-          <a:bodyPr wrap="square" lIns="0" tIns="0" rIns="0" bIns="0" anchor="ctr">
-            <a:spAutoFit/>
-          </a:bodyPr>
-          <a:lstStyle/>
-          <a:p>
-            <a:r>
-              <a:rPr sz="2600" b="1" i="0">
-                <a:solidFill>
-                  <a:srgbClr val="FFFFFF"/>
-                </a:solidFill>
-                <a:latin typeface="Roboto"/>
-              </a:rPr>
-              <a:t>Compare, adjust &amp; document</a:t>
-            </a:r>
-          </a:p>
-        </p:txBody>
-      </p:sp>
-      <p:sp>
-        <p:nvSpPr>
-          <p:cNvPr id="5" name="TextBox 4"/>
-          <p:cNvSpPr txBox="1"/>
-          <p:nvPr/>
-        </p:nvSpPr>
-        <p:spPr>
-          <a:xfrm>
-            <a:off x="658368" y="1554480"/>
-            <a:ext cx="10881360" cy="4297680"/>
-          </a:xfrm>
-          <a:prstGeom prst="rect">
-            <a:avLst/>
-          </a:prstGeom>
-          <a:noFill/>
-        </p:spPr>
-        <p:txBody>
-          <a:bodyPr wrap="square" lIns="0" tIns="0" rIns="0" bIns="0" anchor="t">
+          <a:bodyPr wrap="square" anchor="ctr" lIns="0" rIns="0" tIns="0" bIns="0">
             <a:spAutoFit/>
           </a:bodyPr>
           <a:lstStyle/>
@@ -7311,7 +7452,7 @@
               </a:spcAft>
             </a:pPr>
             <a:r>
-              <a:rPr sz="1700" b="1" i="0">
+              <a:rPr sz="2400" b="1" i="0">
                 <a:solidFill>
                   <a:srgbClr val="EDAB0C"/>
                 </a:solidFill>
@@ -7320,75 +7461,13 @@
               <a:t>■  </a:t>
             </a:r>
             <a:r>
-              <a:rPr sz="1700" b="1" i="0">
+              <a:rPr sz="2400" b="0" i="0">
                 <a:solidFill>
                   <a:srgbClr val="2A2929"/>
                 </a:solidFill>
                 <a:latin typeface="Roboto"/>
               </a:rPr>
-              <a:t>Finalise the implementation:</a:t>
-            </a:r>
-          </a:p>
-          <a:p>
-            <a:pPr marL="365760" indent="0">
-              <a:lnSpc>
-                <a:spcPct val="105000"/>
-              </a:lnSpc>
-              <a:spcBef>
-                <a:spcPts val="0"/>
-              </a:spcBef>
-              <a:spcAft>
-                <a:spcPts val="500"/>
-              </a:spcAft>
-            </a:pPr>
-            <a:r>
-              <a:rPr sz="1400" b="0" i="0">
-                <a:solidFill>
-                  <a:srgbClr val="7A7A7A"/>
-                </a:solidFill>
-                <a:latin typeface="Roboto"/>
-              </a:rPr>
-              <a:t>–  </a:t>
-            </a:r>
-            <a:r>
-              <a:rPr sz="1400" b="0" i="0">
-                <a:solidFill>
-                  <a:srgbClr val="2A2929"/>
-                </a:solidFill>
-                <a:latin typeface="Roboto"/>
-              </a:rPr>
-              <a:t>compare your simulation findings against your documented design</a:t>
-            </a:r>
-          </a:p>
-          <a:p>
-            <a:pPr marL="365760" indent="0">
-              <a:lnSpc>
-                <a:spcPct val="105000"/>
-              </a:lnSpc>
-              <a:spcBef>
-                <a:spcPts val="0"/>
-              </a:spcBef>
-              <a:spcAft>
-                <a:spcPts val="500"/>
-              </a:spcAft>
-            </a:pPr>
-            <a:r>
-              <a:rPr sz="1400" b="0" i="0">
-                <a:solidFill>
-                  <a:srgbClr val="7A7A7A"/>
-                </a:solidFill>
-                <a:latin typeface="Roboto"/>
-              </a:rPr>
-              <a:t>–  </a:t>
-            </a:r>
-            <a:r>
-              <a:rPr sz="1400" b="0" i="0">
-                <a:solidFill>
-                  <a:srgbClr val="2A2929"/>
-                </a:solidFill>
-                <a:latin typeface="Roboto"/>
-              </a:rPr>
-              <a:t>make any improvements the simulations call for, and re-test</a:t>
+              <a:t>In Topic 12 you designed the HA upgrade; now you implement it on the running baseline.</a:t>
             </a:r>
           </a:p>
           <a:p>
@@ -7404,38 +7483,107 @@
               </a:spcAft>
             </a:pPr>
             <a:r>
-              <a:rPr sz="1700" b="1" i="0">
-                <a:solidFill>
-                  <a:srgbClr val="205F61"/>
-                </a:solidFill>
-                <a:latin typeface="Roboto"/>
-              </a:rPr>
-              <a:t>■  Document the simulation findings against the design — this feeds the HA Deployment Report.</a:t>
-            </a:r>
-          </a:p>
-        </p:txBody>
-      </p:sp>
-      <p:sp>
-        <p:nvSpPr>
-          <p:cNvPr id="6" name="Rounded Rectangle 5"/>
+              <a:rPr sz="2400" b="1" i="0">
+                <a:solidFill>
+                  <a:srgbClr val="92268F"/>
+                </a:solidFill>
+                <a:latin typeface="Roboto"/>
+              </a:rPr>
+              <a:t>■  </a:t>
+            </a:r>
+            <a:r>
+              <a:rPr sz="2400" b="1" i="0">
+                <a:solidFill>
+                  <a:srgbClr val="92268F"/>
+                </a:solidFill>
+                <a:latin typeface="Roboto"/>
+              </a:rPr>
+              <a:t>Then you simulate failures and resizes — to prove the design is actually fault tolerant.</a:t>
+            </a:r>
+          </a:p>
+          <a:p>
+            <a:pPr marL="0" indent="0">
+              <a:lnSpc>
+                <a:spcPct val="105000"/>
+              </a:lnSpc>
+              <a:spcBef>
+                <a:spcPts val="0"/>
+              </a:spcBef>
+              <a:spcAft>
+                <a:spcPts val="1000"/>
+              </a:spcAft>
+            </a:pPr>
+            <a:r>
+              <a:rPr sz="2400" b="1" i="0">
+                <a:solidFill>
+                  <a:srgbClr val="EDAB0C"/>
+                </a:solidFill>
+                <a:latin typeface="Roboto"/>
+              </a:rPr>
+              <a:t>■  </a:t>
+            </a:r>
+            <a:r>
+              <a:rPr sz="2400" b="0" i="0">
+                <a:solidFill>
+                  <a:srgbClr val="2A2929"/>
+                </a:solidFill>
+                <a:latin typeface="Roboto"/>
+              </a:rPr>
+              <a:t>Build → demonstrate connectivity → simulate → compare to your design → improve → document.</a:t>
+            </a:r>
+          </a:p>
+          <a:p>
+            <a:pPr marL="0" indent="0">
+              <a:lnSpc>
+                <a:spcPct val="105000"/>
+              </a:lnSpc>
+              <a:spcBef>
+                <a:spcPts val="0"/>
+              </a:spcBef>
+              <a:spcAft>
+                <a:spcPts val="1000"/>
+              </a:spcAft>
+            </a:pPr>
+            <a:r>
+              <a:rPr sz="2400" b="1" i="0">
+                <a:solidFill>
+                  <a:srgbClr val="EDAB0C"/>
+                </a:solidFill>
+                <a:latin typeface="Roboto"/>
+              </a:rPr>
+              <a:t>■  </a:t>
+            </a:r>
+            <a:r>
+              <a:rPr sz="2400" b="0" i="0">
+                <a:solidFill>
+                  <a:srgbClr val="2A2929"/>
+                </a:solidFill>
+                <a:latin typeface="Roboto"/>
+              </a:rPr>
+              <a:t>For the build: watch the recorded demo, then do it. The simulations you drive yourself.</a:t>
+            </a:r>
+          </a:p>
+        </p:txBody>
+      </p:sp>
+      <p:sp>
+        <p:nvSpPr>
+          <p:cNvPr id="5" name="Rectangle 4"/>
           <p:cNvSpPr/>
           <p:nvPr/>
         </p:nvSpPr>
         <p:spPr>
           <a:xfrm>
-            <a:off x="640080" y="5897880"/>
-            <a:ext cx="4023360" cy="457200"/>
-          </a:xfrm>
-          <a:prstGeom prst="roundRect">
+            <a:off x="0" y="6565392"/>
+            <a:ext cx="12191695" cy="38100"/>
+          </a:xfrm>
+          <a:prstGeom prst="rect">
             <a:avLst/>
           </a:prstGeom>
           <a:solidFill>
-            <a:srgbClr val="F9F9F9"/>
+            <a:srgbClr val="EDAB0C"/>
           </a:solidFill>
-          <a:ln w="12700">
-            <a:solidFill>
-              <a:srgbClr val="CCCCCC"/>
-            </a:solidFill>
+          <a:ln>
+            <a:noFill/>
           </a:ln>
           <a:effectLst/>
         </p:spPr>
@@ -7458,7 +7606,49 @@
           <a:lstStyle/>
           <a:p>
             <a:pPr algn="ctr"/>
-            <a:endParaRPr/>
+          </a:p>
+        </p:txBody>
+      </p:sp>
+      <p:sp>
+        <p:nvSpPr>
+          <p:cNvPr id="6" name="TextBox 5"/>
+          <p:cNvSpPr txBox="1"/>
+          <p:nvPr/>
+        </p:nvSpPr>
+        <p:spPr>
+          <a:xfrm>
+            <a:off x="502920" y="6400800"/>
+            <a:ext cx="5486400" cy="320040"/>
+          </a:xfrm>
+          <a:prstGeom prst="rect">
+            <a:avLst/>
+          </a:prstGeom>
+          <a:noFill/>
+        </p:spPr>
+        <p:txBody>
+          <a:bodyPr wrap="square" anchor="t" lIns="0" rIns="0" tIns="0" bIns="0">
+            <a:spAutoFit/>
+          </a:bodyPr>
+          <a:lstStyle/>
+          <a:p>
+            <a:r>
+              <a:rPr sz="1100" b="1" i="0">
+                <a:solidFill>
+                  <a:srgbClr val="2A2929"/>
+                </a:solidFill>
+                <a:latin typeface="Roboto"/>
+              </a:rPr>
+              <a:t>Kangan </a:t>
+            </a:r>
+            <a:r>
+              <a:rPr sz="1100" b="1" i="0">
+                <a:solidFill>
+                  <a:srgbClr val="D68E10"/>
+                </a:solidFill>
+                <a:latin typeface="Roboto"/>
+              </a:rPr>
+              <a:t>Institute</a:t>
+            </a:r>
           </a:p>
         </p:txBody>
       </p:sp>
@@ -7470,8 +7660,8 @@
         </p:nvSpPr>
         <p:spPr>
           <a:xfrm>
-            <a:off x="822960" y="5943600"/>
-            <a:ext cx="3657600" cy="365760"/>
+            <a:off x="10515600" y="6400800"/>
+            <a:ext cx="1188720" cy="320040"/>
           </a:xfrm>
           <a:prstGeom prst="rect">
             <a:avLst/>
@@ -7479,133 +7669,11 @@
           <a:noFill/>
         </p:spPr>
         <p:txBody>
-          <a:bodyPr wrap="square" lIns="0" tIns="0" rIns="0" bIns="0" anchor="ctr">
+          <a:bodyPr wrap="square" anchor="t" lIns="0" rIns="0" tIns="0" bIns="0">
             <a:spAutoFit/>
           </a:bodyPr>
           <a:lstStyle/>
           <a:p>
-            <a:r>
-              <a:rPr sz="1500" b="1" i="0">
-                <a:solidFill>
-                  <a:srgbClr val="2A2929"/>
-                </a:solidFill>
-                <a:latin typeface="Roboto"/>
-              </a:rPr>
-              <a:t>⏱  ~20 min</a:t>
-            </a:r>
-          </a:p>
-        </p:txBody>
-      </p:sp>
-      <p:sp>
-        <p:nvSpPr>
-          <p:cNvPr id="8" name="Rectangle 7"/>
-          <p:cNvSpPr/>
-          <p:nvPr/>
-        </p:nvSpPr>
-        <p:spPr>
-          <a:xfrm>
-            <a:off x="0" y="6565392"/>
-            <a:ext cx="12191695" cy="38100"/>
-          </a:xfrm>
-          <a:prstGeom prst="rect">
-            <a:avLst/>
-          </a:prstGeom>
-          <a:solidFill>
-            <a:srgbClr val="205F61"/>
-          </a:solidFill>
-          <a:ln>
-            <a:noFill/>
-          </a:ln>
-          <a:effectLst/>
-        </p:spPr>
-        <p:style>
-          <a:lnRef idx="1">
-            <a:schemeClr val="accent1"/>
-          </a:lnRef>
-          <a:fillRef idx="3">
-            <a:schemeClr val="accent1"/>
-          </a:fillRef>
-          <a:effectRef idx="2">
-            <a:schemeClr val="accent1"/>
-          </a:effectRef>
-          <a:fontRef idx="minor">
-            <a:schemeClr val="lt1"/>
-          </a:fontRef>
-        </p:style>
-        <p:txBody>
-          <a:bodyPr rtlCol="0" anchor="ctr"/>
-          <a:lstStyle/>
-          <a:p>
-            <a:pPr algn="ctr"/>
-            <a:endParaRPr/>
-          </a:p>
-        </p:txBody>
-      </p:sp>
-      <p:sp>
-        <p:nvSpPr>
-          <p:cNvPr id="9" name="TextBox 8"/>
-          <p:cNvSpPr txBox="1"/>
-          <p:nvPr/>
-        </p:nvSpPr>
-        <p:spPr>
-          <a:xfrm>
-            <a:off x="502920" y="6400800"/>
-            <a:ext cx="5486400" cy="320040"/>
-          </a:xfrm>
-          <a:prstGeom prst="rect">
-            <a:avLst/>
-          </a:prstGeom>
-          <a:noFill/>
-        </p:spPr>
-        <p:txBody>
-          <a:bodyPr wrap="square" lIns="0" tIns="0" rIns="0" bIns="0" anchor="t">
-            <a:spAutoFit/>
-          </a:bodyPr>
-          <a:lstStyle/>
-          <a:p>
-            <a:r>
-              <a:rPr sz="1100" b="1" i="0">
-                <a:solidFill>
-                  <a:srgbClr val="2A2929"/>
-                </a:solidFill>
-                <a:latin typeface="Roboto"/>
-              </a:rPr>
-              <a:t>Kangan </a:t>
-            </a:r>
-            <a:r>
-              <a:rPr sz="1100" b="1" i="0">
-                <a:solidFill>
-                  <a:srgbClr val="D68E10"/>
-                </a:solidFill>
-                <a:latin typeface="Roboto"/>
-              </a:rPr>
-              <a:t>Institute</a:t>
-            </a:r>
-          </a:p>
-        </p:txBody>
-      </p:sp>
-      <p:sp>
-        <p:nvSpPr>
-          <p:cNvPr id="10" name="TextBox 9"/>
-          <p:cNvSpPr txBox="1"/>
-          <p:nvPr/>
-        </p:nvSpPr>
-        <p:spPr>
-          <a:xfrm>
-            <a:off x="10515600" y="6400800"/>
-            <a:ext cx="1188720" cy="320040"/>
-          </a:xfrm>
-          <a:prstGeom prst="rect">
-            <a:avLst/>
-          </a:prstGeom>
-          <a:noFill/>
-        </p:spPr>
-        <p:txBody>
-          <a:bodyPr wrap="square" lIns="0" tIns="0" rIns="0" bIns="0" anchor="t">
-            <a:spAutoFit/>
-          </a:bodyPr>
-          <a:lstStyle/>
-          <a:p>
             <a:pPr algn="r"/>
             <a:r>
               <a:rPr sz="1100" b="0" i="0">
@@ -7614,7 +7682,7 @@
                 </a:solidFill>
                 <a:latin typeface="Roboto"/>
               </a:rPr>
-              <a:t>16</a:t>
+              <a:t>1</a:t>
             </a:r>
           </a:p>
         </p:txBody>
@@ -7627,8 +7695,8 @@
 </p:sld>
 </file>
 
-<file path=ppt/slides/slide2.xml><?xml version="1.0" encoding="utf-8"?>
-<p:sld xmlns:a="http://schemas.openxmlformats.org/drawingml/2006/main" xmlns:r="http://schemas.openxmlformats.org/officeDocument/2006/relationships" xmlns:p="http://schemas.openxmlformats.org/presentationml/2006/main">
+<file path=ppt/slides/slide20.xml><?xml version="1.0" encoding="utf-8"?>
+<p:sld xmlns:a="http://schemas.openxmlformats.org/drawingml/2006/main" xmlns:p="http://schemas.openxmlformats.org/presentationml/2006/main" xmlns:r="http://schemas.openxmlformats.org/officeDocument/2006/relationships">
   <p:cSld>
     <p:bg>
       <p:bgPr>
@@ -7644,80 +7712,23 @@
         <p:cNvGrpSpPr/>
         <p:nvPr/>
       </p:nvGrpSpPr>
-      <p:grpSpPr>
-        <a:xfrm>
-          <a:off x="0" y="0"/>
-          <a:ext cx="0" cy="0"/>
-          <a:chOff x="0" y="0"/>
-          <a:chExt cx="0" cy="0"/>
-        </a:xfrm>
-      </p:grpSpPr>
-      <p:sp>
-        <p:nvSpPr>
-          <p:cNvPr id="2" name="TextBox 1"/>
-          <p:cNvSpPr txBox="1"/>
-          <p:nvPr/>
-        </p:nvSpPr>
-        <p:spPr>
-          <a:xfrm>
-            <a:off x="640080" y="457200"/>
-            <a:ext cx="10881360" cy="960120"/>
-          </a:xfrm>
-          <a:prstGeom prst="rect">
-            <a:avLst/>
-          </a:prstGeom>
-          <a:noFill/>
-        </p:spPr>
-        <p:txBody>
-          <a:bodyPr wrap="square" lIns="0" tIns="0" rIns="0" bIns="0" anchor="t">
-            <a:spAutoFit/>
-          </a:bodyPr>
-          <a:lstStyle/>
-          <a:p>
-            <a:r>
-              <a:rPr sz="2800" b="1" i="0">
-                <a:solidFill>
-                  <a:srgbClr val="2A2929"/>
-                </a:solidFill>
-                <a:latin typeface="Roboto"/>
-              </a:rPr>
-              <a:t>Build it, then break it</a:t>
-            </a:r>
-          </a:p>
-          <a:p>
-            <a:pPr>
-              <a:spcBef>
-                <a:spcPts val="200"/>
-              </a:spcBef>
-            </a:pPr>
-            <a:r>
-              <a:rPr sz="1800" b="0" i="1">
-                <a:solidFill>
-                  <a:srgbClr val="D68E10"/>
-                </a:solidFill>
-                <a:latin typeface="Roboto Light"/>
-              </a:rPr>
-              <a:t>AT3 Part B skills</a:t>
-            </a:r>
-          </a:p>
-        </p:txBody>
-      </p:sp>
-      <p:sp>
-        <p:nvSpPr>
-          <p:cNvPr id="3" name="Rectangle 2"/>
+      <p:grpSpPr/>
+      <p:sp>
+        <p:nvSpPr>
+          <p:cNvPr id="2" name="Rectangle 1"/>
           <p:cNvSpPr/>
           <p:nvPr/>
         </p:nvSpPr>
         <p:spPr>
           <a:xfrm>
-            <a:off x="658368" y="1371600"/>
-            <a:ext cx="1463040" cy="50800"/>
+            <a:off x="0" y="0"/>
+            <a:ext cx="12191695" cy="1234440"/>
           </a:xfrm>
           <a:prstGeom prst="rect">
             <a:avLst/>
           </a:prstGeom>
           <a:solidFill>
-            <a:srgbClr val="EDAB0C"/>
+            <a:srgbClr val="205F61"/>
           </a:solidFill>
           <a:ln>
             <a:noFill/>
@@ -7743,7 +7754,59 @@
           <a:lstStyle/>
           <a:p>
             <a:pPr algn="ctr"/>
-            <a:endParaRPr/>
+          </a:p>
+        </p:txBody>
+      </p:sp>
+      <p:sp>
+        <p:nvSpPr>
+          <p:cNvPr id="3" name="Rounded Rectangle 2"/>
+          <p:cNvSpPr/>
+          <p:nvPr/>
+        </p:nvSpPr>
+        <p:spPr>
+          <a:xfrm>
+            <a:off x="640080" y="384048"/>
+            <a:ext cx="1691640" cy="457200"/>
+          </a:xfrm>
+          <a:prstGeom prst="roundRect">
+            <a:avLst/>
+          </a:prstGeom>
+          <a:solidFill>
+            <a:srgbClr val="2A2929"/>
+          </a:solidFill>
+          <a:ln>
+            <a:noFill/>
+          </a:ln>
+          <a:effectLst/>
+        </p:spPr>
+        <p:style>
+          <a:lnRef idx="1">
+            <a:schemeClr val="accent1"/>
+          </a:lnRef>
+          <a:fillRef idx="3">
+            <a:schemeClr val="accent1"/>
+          </a:fillRef>
+          <a:effectRef idx="2">
+            <a:schemeClr val="accent1"/>
+          </a:effectRef>
+          <a:fontRef idx="minor">
+            <a:schemeClr val="lt1"/>
+          </a:fontRef>
+        </p:style>
+        <p:txBody>
+          <a:bodyPr rtlCol="0" anchor="ctr"/>
+          <a:lstStyle/>
+          <a:p>
+            <a:pPr algn="ctr"/>
+            <a:r>
+              <a:rPr sz="1400" b="1" i="0">
+                <a:solidFill>
+                  <a:srgbClr val="FBB900"/>
+                </a:solidFill>
+                <a:latin typeface="Roboto"/>
+              </a:rPr>
+              <a:t>ACTIVITY</a:t>
+            </a:r>
           </a:p>
         </p:txBody>
       </p:sp>
@@ -7755,8 +7818,8 @@
         </p:nvSpPr>
         <p:spPr>
           <a:xfrm>
-            <a:off x="658368" y="1691640"/>
-            <a:ext cx="10881360" cy="4480560"/>
+            <a:off x="2560320" y="310896"/>
+            <a:ext cx="8961120" cy="685800"/>
           </a:xfrm>
           <a:prstGeom prst="rect">
             <a:avLst/>
@@ -7764,7 +7827,41 @@
           <a:noFill/>
         </p:spPr>
         <p:txBody>
-          <a:bodyPr wrap="square" lIns="0" tIns="0" rIns="0" bIns="0" anchor="t">
+          <a:bodyPr wrap="square" anchor="ctr" lIns="0" rIns="0" tIns="0" bIns="0">
+            <a:spAutoFit/>
+          </a:bodyPr>
+          <a:lstStyle/>
+          <a:p>
+            <a:r>
+              <a:rPr sz="2600" b="1" i="0">
+                <a:solidFill>
+                  <a:srgbClr val="FFFFFF"/>
+                </a:solidFill>
+                <a:latin typeface="Roboto"/>
+              </a:rPr>
+              <a:t>Compare, adjust &amp; document</a:t>
+            </a:r>
+          </a:p>
+        </p:txBody>
+      </p:sp>
+      <p:sp>
+        <p:nvSpPr>
+          <p:cNvPr id="5" name="TextBox 4"/>
+          <p:cNvSpPr txBox="1"/>
+          <p:nvPr/>
+        </p:nvSpPr>
+        <p:spPr>
+          <a:xfrm>
+            <a:off x="658368" y="1554480"/>
+            <a:ext cx="10881360" cy="4297680"/>
+          </a:xfrm>
+          <a:prstGeom prst="rect">
+            <a:avLst/>
+          </a:prstGeom>
+          <a:noFill/>
+        </p:spPr>
+        <p:txBody>
+          <a:bodyPr wrap="square" anchor="t" lIns="0" rIns="0" tIns="0" bIns="0">
             <a:spAutoFit/>
           </a:bodyPr>
           <a:lstStyle/>
@@ -7781,7 +7878,7 @@
               </a:spcAft>
             </a:pPr>
             <a:r>
-              <a:rPr sz="1800" b="1" i="0">
+              <a:rPr sz="1700" b="1" i="0">
                 <a:solidFill>
                   <a:srgbClr val="EDAB0C"/>
                 </a:solidFill>
@@ -7790,13 +7887,75 @@
               <a:t>■  </a:t>
             </a:r>
             <a:r>
-              <a:rPr sz="1800" b="0" i="0">
+              <a:rPr sz="1700" b="1" i="0">
                 <a:solidFill>
                   <a:srgbClr val="2A2929"/>
                 </a:solidFill>
                 <a:latin typeface="Roboto"/>
               </a:rPr>
-              <a:t>In Topic 12 you designed the HA upgrade; now you implement it on the running baseline.</a:t>
+              <a:t>Finalise the implementation:</a:t>
+            </a:r>
+          </a:p>
+          <a:p>
+            <a:pPr marL="365760" indent="0">
+              <a:lnSpc>
+                <a:spcPct val="105000"/>
+              </a:lnSpc>
+              <a:spcBef>
+                <a:spcPts val="0"/>
+              </a:spcBef>
+              <a:spcAft>
+                <a:spcPts val="500"/>
+              </a:spcAft>
+            </a:pPr>
+            <a:r>
+              <a:rPr sz="1400" b="0" i="0">
+                <a:solidFill>
+                  <a:srgbClr val="7A7A7A"/>
+                </a:solidFill>
+                <a:latin typeface="Roboto"/>
+              </a:rPr>
+              <a:t>–  </a:t>
+            </a:r>
+            <a:r>
+              <a:rPr sz="1400" b="0" i="0">
+                <a:solidFill>
+                  <a:srgbClr val="2A2929"/>
+                </a:solidFill>
+                <a:latin typeface="Roboto"/>
+              </a:rPr>
+              <a:t>compare your simulation findings against your documented design</a:t>
+            </a:r>
+          </a:p>
+          <a:p>
+            <a:pPr marL="365760" indent="0">
+              <a:lnSpc>
+                <a:spcPct val="105000"/>
+              </a:lnSpc>
+              <a:spcBef>
+                <a:spcPts val="0"/>
+              </a:spcBef>
+              <a:spcAft>
+                <a:spcPts val="500"/>
+              </a:spcAft>
+            </a:pPr>
+            <a:r>
+              <a:rPr sz="1400" b="0" i="0">
+                <a:solidFill>
+                  <a:srgbClr val="7A7A7A"/>
+                </a:solidFill>
+                <a:latin typeface="Roboto"/>
+              </a:rPr>
+              <a:t>–  </a:t>
+            </a:r>
+            <a:r>
+              <a:rPr sz="1400" b="0" i="0">
+                <a:solidFill>
+                  <a:srgbClr val="2A2929"/>
+                </a:solidFill>
+                <a:latin typeface="Roboto"/>
+              </a:rPr>
+              <a:t>make any improvements the simulations call for, and re-test</a:t>
             </a:r>
           </a:p>
           <a:p>
@@ -7812,82 +7971,109 @@
               </a:spcAft>
             </a:pPr>
             <a:r>
-              <a:rPr sz="1800" b="1" i="0">
-                <a:solidFill>
-                  <a:srgbClr val="92268F"/>
-                </a:solidFill>
-                <a:latin typeface="Roboto"/>
-              </a:rPr>
-              <a:t>■  Then you simulate failures and resizes — to prove the design is actually fault tolerant.</a:t>
-            </a:r>
-          </a:p>
-          <a:p>
-            <a:pPr marL="0" indent="0">
-              <a:lnSpc>
-                <a:spcPct val="105000"/>
-              </a:lnSpc>
-              <a:spcBef>
-                <a:spcPts val="0"/>
-              </a:spcBef>
-              <a:spcAft>
-                <a:spcPts val="1000"/>
-              </a:spcAft>
-            </a:pPr>
-            <a:r>
-              <a:rPr sz="1800" b="1" i="0">
-                <a:solidFill>
-                  <a:srgbClr val="EDAB0C"/>
+              <a:rPr sz="1700" b="1" i="0">
+                <a:solidFill>
+                  <a:srgbClr val="205F61"/>
                 </a:solidFill>
                 <a:latin typeface="Roboto"/>
               </a:rPr>
               <a:t>■  </a:t>
             </a:r>
             <a:r>
-              <a:rPr sz="1800" b="0" i="0">
+              <a:rPr sz="1700" b="1" i="0">
+                <a:solidFill>
+                  <a:srgbClr val="205F61"/>
+                </a:solidFill>
+                <a:latin typeface="Roboto"/>
+              </a:rPr>
+              <a:t>Document the simulation findings against the design — this feeds the HA Deployment Report.</a:t>
+            </a:r>
+          </a:p>
+        </p:txBody>
+      </p:sp>
+      <p:sp>
+        <p:nvSpPr>
+          <p:cNvPr id="6" name="Rounded Rectangle 5"/>
+          <p:cNvSpPr/>
+          <p:nvPr/>
+        </p:nvSpPr>
+        <p:spPr>
+          <a:xfrm>
+            <a:off x="640080" y="5897880"/>
+            <a:ext cx="4023360" cy="457200"/>
+          </a:xfrm>
+          <a:prstGeom prst="roundRect">
+            <a:avLst/>
+          </a:prstGeom>
+          <a:solidFill>
+            <a:srgbClr val="F9F9F9"/>
+          </a:solidFill>
+          <a:ln w="12700">
+            <a:solidFill>
+              <a:srgbClr val="CCCCCC"/>
+            </a:solidFill>
+          </a:ln>
+          <a:effectLst/>
+        </p:spPr>
+        <p:style>
+          <a:lnRef idx="1">
+            <a:schemeClr val="accent1"/>
+          </a:lnRef>
+          <a:fillRef idx="3">
+            <a:schemeClr val="accent1"/>
+          </a:fillRef>
+          <a:effectRef idx="2">
+            <a:schemeClr val="accent1"/>
+          </a:effectRef>
+          <a:fontRef idx="minor">
+            <a:schemeClr val="lt1"/>
+          </a:fontRef>
+        </p:style>
+        <p:txBody>
+          <a:bodyPr rtlCol="0" anchor="ctr"/>
+          <a:lstStyle/>
+          <a:p>
+            <a:pPr algn="ctr"/>
+          </a:p>
+        </p:txBody>
+      </p:sp>
+      <p:sp>
+        <p:nvSpPr>
+          <p:cNvPr id="7" name="TextBox 6"/>
+          <p:cNvSpPr txBox="1"/>
+          <p:nvPr/>
+        </p:nvSpPr>
+        <p:spPr>
+          <a:xfrm>
+            <a:off x="822960" y="5943600"/>
+            <a:ext cx="3657600" cy="365760"/>
+          </a:xfrm>
+          <a:prstGeom prst="rect">
+            <a:avLst/>
+          </a:prstGeom>
+          <a:noFill/>
+        </p:spPr>
+        <p:txBody>
+          <a:bodyPr wrap="square" anchor="ctr" lIns="0" rIns="0" tIns="0" bIns="0">
+            <a:spAutoFit/>
+          </a:bodyPr>
+          <a:lstStyle/>
+          <a:p>
+            <a:r>
+              <a:rPr sz="1500" b="1" i="0">
                 <a:solidFill>
                   <a:srgbClr val="2A2929"/>
                 </a:solidFill>
                 <a:latin typeface="Roboto"/>
               </a:rPr>
-              <a:t>Build → demonstrate connectivity → simulate → compare to your design → improve → document.</a:t>
-            </a:r>
-          </a:p>
-          <a:p>
-            <a:pPr marL="0" indent="0">
-              <a:lnSpc>
-                <a:spcPct val="105000"/>
-              </a:lnSpc>
-              <a:spcBef>
-                <a:spcPts val="0"/>
-              </a:spcBef>
-              <a:spcAft>
-                <a:spcPts val="1000"/>
-              </a:spcAft>
-            </a:pPr>
-            <a:r>
-              <a:rPr sz="1800" b="1" i="0">
-                <a:solidFill>
-                  <a:srgbClr val="EDAB0C"/>
-                </a:solidFill>
-                <a:latin typeface="Roboto"/>
-              </a:rPr>
-              <a:t>■  </a:t>
-            </a:r>
-            <a:r>
-              <a:rPr sz="1800" b="0" i="0">
-                <a:solidFill>
-                  <a:srgbClr val="2A2929"/>
-                </a:solidFill>
-                <a:latin typeface="Roboto"/>
-              </a:rPr>
-              <a:t>For the build: watch the recorded demo, then do it. The simulations you drive yourself.</a:t>
-            </a:r>
-          </a:p>
-        </p:txBody>
-      </p:sp>
-      <p:sp>
-        <p:nvSpPr>
-          <p:cNvPr id="5" name="Rectangle 4"/>
+              <a:t>⏱  ~20 min</a:t>
+            </a:r>
+          </a:p>
+        </p:txBody>
+      </p:sp>
+      <p:sp>
+        <p:nvSpPr>
+          <p:cNvPr id="8" name="Rectangle 7"/>
           <p:cNvSpPr/>
           <p:nvPr/>
         </p:nvSpPr>
@@ -7900,7 +8086,7 @@
             <a:avLst/>
           </a:prstGeom>
           <a:solidFill>
-            <a:srgbClr val="EDAB0C"/>
+            <a:srgbClr val="205F61"/>
           </a:solidFill>
           <a:ln>
             <a:noFill/>
@@ -7926,13 +8112,12 @@
           <a:lstStyle/>
           <a:p>
             <a:pPr algn="ctr"/>
-            <a:endParaRPr/>
-          </a:p>
-        </p:txBody>
-      </p:sp>
-      <p:sp>
-        <p:nvSpPr>
-          <p:cNvPr id="6" name="TextBox 5"/>
+          </a:p>
+        </p:txBody>
+      </p:sp>
+      <p:sp>
+        <p:nvSpPr>
+          <p:cNvPr id="9" name="TextBox 8"/>
           <p:cNvSpPr txBox="1"/>
           <p:nvPr/>
         </p:nvSpPr>
@@ -7947,7 +8132,7 @@
           <a:noFill/>
         </p:spPr>
         <p:txBody>
-          <a:bodyPr wrap="square" lIns="0" tIns="0" rIns="0" bIns="0" anchor="t">
+          <a:bodyPr wrap="square" anchor="t" lIns="0" rIns="0" tIns="0" bIns="0">
             <a:spAutoFit/>
           </a:bodyPr>
           <a:lstStyle/>
@@ -7975,7 +8160,7 @@
       </p:sp>
       <p:sp>
         <p:nvSpPr>
-          <p:cNvPr id="7" name="TextBox 6"/>
+          <p:cNvPr id="10" name="TextBox 9"/>
           <p:cNvSpPr txBox="1"/>
           <p:nvPr/>
         </p:nvSpPr>
@@ -7990,7 +8175,7 @@
           <a:noFill/>
         </p:spPr>
         <p:txBody>
-          <a:bodyPr wrap="square" lIns="0" tIns="0" rIns="0" bIns="0" anchor="t">
+          <a:bodyPr wrap="square" anchor="t" lIns="0" rIns="0" tIns="0" bIns="0">
             <a:spAutoFit/>
           </a:bodyPr>
           <a:lstStyle/>
@@ -8003,7 +8188,7 @@
                 </a:solidFill>
                 <a:latin typeface="Roboto"/>
               </a:rPr>
-              <a:t>1</a:t>
+              <a:t>16</a:t>
             </a:r>
           </a:p>
         </p:txBody>
@@ -8016,8 +8201,8 @@
 </p:sld>
 </file>
 
-<file path=ppt/slides/slide20.xml><?xml version="1.0" encoding="utf-8"?>
-<p:sld xmlns:a="http://schemas.openxmlformats.org/drawingml/2006/main" xmlns:r="http://schemas.openxmlformats.org/officeDocument/2006/relationships" xmlns:p="http://schemas.openxmlformats.org/presentationml/2006/main">
+<file path=ppt/slides/slide21.xml><?xml version="1.0" encoding="utf-8"?>
+<p:sld xmlns:a="http://schemas.openxmlformats.org/drawingml/2006/main" xmlns:p="http://schemas.openxmlformats.org/presentationml/2006/main" xmlns:r="http://schemas.openxmlformats.org/officeDocument/2006/relationships">
   <p:cSld>
     <p:bg>
       <p:bgPr>
@@ -8033,14 +8218,7 @@
         <p:cNvGrpSpPr/>
         <p:nvPr/>
       </p:nvGrpSpPr>
-      <p:grpSpPr>
-        <a:xfrm>
-          <a:off x="0" y="0"/>
-          <a:ext cx="0" cy="0"/>
-          <a:chOff x="0" y="0"/>
-          <a:chExt cx="0" cy="0"/>
-        </a:xfrm>
-      </p:grpSpPr>
+      <p:grpSpPr/>
       <p:sp>
         <p:nvSpPr>
           <p:cNvPr id="2" name="TextBox 1"/>
@@ -8058,7 +8236,7 @@
           <a:noFill/>
         </p:spPr>
         <p:txBody>
-          <a:bodyPr wrap="square" lIns="0" tIns="0" rIns="0" bIns="0" anchor="t">
+          <a:bodyPr wrap="square" anchor="t" lIns="0" rIns="0" tIns="0" bIns="0">
             <a:spAutoFit/>
           </a:bodyPr>
           <a:lstStyle/>
@@ -8132,7 +8310,6 @@
           <a:lstStyle/>
           <a:p>
             <a:pPr algn="ctr"/>
-            <a:endParaRPr/>
           </a:p>
         </p:txBody>
       </p:sp>
@@ -8179,7 +8356,6 @@
           <a:lstStyle/>
           <a:p>
             <a:pPr algn="ctr"/>
-            <a:endParaRPr/>
           </a:p>
         </p:txBody>
       </p:sp>
@@ -8224,7 +8400,6 @@
           <a:lstStyle/>
           <a:p>
             <a:pPr algn="ctr"/>
-            <a:endParaRPr/>
           </a:p>
         </p:txBody>
       </p:sp>
@@ -8245,7 +8420,7 @@
           <a:noFill/>
         </p:spPr>
         <p:txBody>
-          <a:bodyPr wrap="square" lIns="0" tIns="0" rIns="0" bIns="0" anchor="ctr">
+          <a:bodyPr wrap="square" anchor="ctr" lIns="0" rIns="0" tIns="0" bIns="0">
             <a:spAutoFit/>
           </a:bodyPr>
           <a:lstStyle/>
@@ -8310,7 +8485,6 @@
           <a:lstStyle/>
           <a:p>
             <a:pPr algn="ctr"/>
-            <a:endParaRPr/>
           </a:p>
         </p:txBody>
       </p:sp>
@@ -8355,7 +8529,6 @@
           <a:lstStyle/>
           <a:p>
             <a:pPr algn="ctr"/>
-            <a:endParaRPr/>
           </a:p>
         </p:txBody>
       </p:sp>
@@ -8376,7 +8549,7 @@
           <a:noFill/>
         </p:spPr>
         <p:txBody>
-          <a:bodyPr wrap="square" lIns="0" tIns="0" rIns="0" bIns="0" anchor="ctr">
+          <a:bodyPr wrap="square" anchor="ctr" lIns="0" rIns="0" tIns="0" bIns="0">
             <a:spAutoFit/>
           </a:bodyPr>
           <a:lstStyle/>
@@ -8441,7 +8614,6 @@
           <a:lstStyle/>
           <a:p>
             <a:pPr algn="ctr"/>
-            <a:endParaRPr/>
           </a:p>
         </p:txBody>
       </p:sp>
@@ -8486,7 +8658,6 @@
           <a:lstStyle/>
           <a:p>
             <a:pPr algn="ctr"/>
-            <a:endParaRPr/>
           </a:p>
         </p:txBody>
       </p:sp>
@@ -8507,7 +8678,7 @@
           <a:noFill/>
         </p:spPr>
         <p:txBody>
-          <a:bodyPr wrap="square" lIns="0" tIns="0" rIns="0" bIns="0" anchor="ctr">
+          <a:bodyPr wrap="square" anchor="ctr" lIns="0" rIns="0" tIns="0" bIns="0">
             <a:spAutoFit/>
           </a:bodyPr>
           <a:lstStyle/>
@@ -8572,7 +8743,6 @@
           <a:lstStyle/>
           <a:p>
             <a:pPr algn="ctr"/>
-            <a:endParaRPr/>
           </a:p>
         </p:txBody>
       </p:sp>
@@ -8617,7 +8787,6 @@
           <a:lstStyle/>
           <a:p>
             <a:pPr algn="ctr"/>
-            <a:endParaRPr/>
           </a:p>
         </p:txBody>
       </p:sp>
@@ -8638,7 +8807,7 @@
           <a:noFill/>
         </p:spPr>
         <p:txBody>
-          <a:bodyPr wrap="square" lIns="0" tIns="0" rIns="0" bIns="0" anchor="ctr">
+          <a:bodyPr wrap="square" anchor="ctr" lIns="0" rIns="0" tIns="0" bIns="0">
             <a:spAutoFit/>
           </a:bodyPr>
           <a:lstStyle/>
@@ -8701,7 +8870,6 @@
           <a:lstStyle/>
           <a:p>
             <a:pPr algn="ctr"/>
-            <a:endParaRPr/>
           </a:p>
         </p:txBody>
       </p:sp>
@@ -8722,7 +8890,7 @@
           <a:noFill/>
         </p:spPr>
         <p:txBody>
-          <a:bodyPr wrap="square" lIns="0" tIns="0" rIns="0" bIns="0" anchor="t">
+          <a:bodyPr wrap="square" anchor="t" lIns="0" rIns="0" tIns="0" bIns="0">
             <a:spAutoFit/>
           </a:bodyPr>
           <a:lstStyle/>
@@ -8765,7 +8933,7 @@
           <a:noFill/>
         </p:spPr>
         <p:txBody>
-          <a:bodyPr wrap="square" lIns="0" tIns="0" rIns="0" bIns="0" anchor="t">
+          <a:bodyPr wrap="square" anchor="t" lIns="0" rIns="0" tIns="0" bIns="0">
             <a:spAutoFit/>
           </a:bodyPr>
           <a:lstStyle/>
@@ -8791,8 +8959,8 @@
 </p:sld>
 </file>
 
-<file path=ppt/slides/slide21.xml><?xml version="1.0" encoding="utf-8"?>
-<p:sld xmlns:a="http://schemas.openxmlformats.org/drawingml/2006/main" xmlns:r="http://schemas.openxmlformats.org/officeDocument/2006/relationships" xmlns:p="http://schemas.openxmlformats.org/presentationml/2006/main">
+<file path=ppt/slides/slide22.xml><?xml version="1.0" encoding="utf-8"?>
+<p:sld xmlns:a="http://schemas.openxmlformats.org/drawingml/2006/main" xmlns:p="http://schemas.openxmlformats.org/presentationml/2006/main" xmlns:r="http://schemas.openxmlformats.org/officeDocument/2006/relationships">
   <p:cSld>
     <p:bg>
       <p:bgPr>
@@ -8808,14 +8976,7 @@
         <p:cNvGrpSpPr/>
         <p:nvPr/>
       </p:nvGrpSpPr>
-      <p:grpSpPr>
-        <a:xfrm>
-          <a:off x="0" y="0"/>
-          <a:ext cx="0" cy="0"/>
-          <a:chOff x="0" y="0"/>
-          <a:chExt cx="0" cy="0"/>
-        </a:xfrm>
-      </p:grpSpPr>
+      <p:grpSpPr/>
       <p:sp>
         <p:nvSpPr>
           <p:cNvPr id="2" name="TextBox 1"/>
@@ -8833,7 +8994,7 @@
           <a:noFill/>
         </p:spPr>
         <p:txBody>
-          <a:bodyPr wrap="square" lIns="0" tIns="0" rIns="0" bIns="0" anchor="t">
+          <a:bodyPr wrap="square" anchor="t" lIns="0" rIns="0" tIns="0" bIns="0">
             <a:spAutoFit/>
           </a:bodyPr>
           <a:lstStyle/>
@@ -8907,7 +9068,6 @@
           <a:lstStyle/>
           <a:p>
             <a:pPr algn="ctr"/>
-            <a:endParaRPr/>
           </a:p>
         </p:txBody>
       </p:sp>
@@ -8954,7 +9114,6 @@
           <a:lstStyle/>
           <a:p>
             <a:pPr algn="ctr"/>
-            <a:endParaRPr/>
           </a:p>
         </p:txBody>
       </p:sp>
@@ -8999,7 +9158,6 @@
           <a:lstStyle/>
           <a:p>
             <a:pPr algn="ctr"/>
-            <a:endParaRPr/>
           </a:p>
         </p:txBody>
       </p:sp>
@@ -9020,7 +9178,7 @@
           <a:noFill/>
         </p:spPr>
         <p:txBody>
-          <a:bodyPr wrap="square" lIns="0" tIns="0" rIns="0" bIns="0" anchor="ctr">
+          <a:bodyPr wrap="square" anchor="ctr" lIns="0" rIns="0" tIns="0" bIns="0">
             <a:spAutoFit/>
           </a:bodyPr>
           <a:lstStyle/>
@@ -9085,7 +9243,6 @@
           <a:lstStyle/>
           <a:p>
             <a:pPr algn="ctr"/>
-            <a:endParaRPr/>
           </a:p>
         </p:txBody>
       </p:sp>
@@ -9130,7 +9287,6 @@
           <a:lstStyle/>
           <a:p>
             <a:pPr algn="ctr"/>
-            <a:endParaRPr/>
           </a:p>
         </p:txBody>
       </p:sp>
@@ -9151,7 +9307,7 @@
           <a:noFill/>
         </p:spPr>
         <p:txBody>
-          <a:bodyPr wrap="square" lIns="0" tIns="0" rIns="0" bIns="0" anchor="ctr">
+          <a:bodyPr wrap="square" anchor="ctr" lIns="0" rIns="0" tIns="0" bIns="0">
             <a:spAutoFit/>
           </a:bodyPr>
           <a:lstStyle/>
@@ -9216,7 +9372,6 @@
           <a:lstStyle/>
           <a:p>
             <a:pPr algn="ctr"/>
-            <a:endParaRPr/>
           </a:p>
         </p:txBody>
       </p:sp>
@@ -9261,7 +9416,6 @@
           <a:lstStyle/>
           <a:p>
             <a:pPr algn="ctr"/>
-            <a:endParaRPr/>
           </a:p>
         </p:txBody>
       </p:sp>
@@ -9282,7 +9436,7 @@
           <a:noFill/>
         </p:spPr>
         <p:txBody>
-          <a:bodyPr wrap="square" lIns="0" tIns="0" rIns="0" bIns="0" anchor="ctr">
+          <a:bodyPr wrap="square" anchor="ctr" lIns="0" rIns="0" tIns="0" bIns="0">
             <a:spAutoFit/>
           </a:bodyPr>
           <a:lstStyle/>
@@ -9347,7 +9501,6 @@
           <a:lstStyle/>
           <a:p>
             <a:pPr algn="ctr"/>
-            <a:endParaRPr/>
           </a:p>
         </p:txBody>
       </p:sp>
@@ -9392,7 +9545,6 @@
           <a:lstStyle/>
           <a:p>
             <a:pPr algn="ctr"/>
-            <a:endParaRPr/>
           </a:p>
         </p:txBody>
       </p:sp>
@@ -9413,7 +9565,7 @@
           <a:noFill/>
         </p:spPr>
         <p:txBody>
-          <a:bodyPr wrap="square" lIns="0" tIns="0" rIns="0" bIns="0" anchor="ctr">
+          <a:bodyPr wrap="square" anchor="ctr" lIns="0" rIns="0" tIns="0" bIns="0">
             <a:spAutoFit/>
           </a:bodyPr>
           <a:lstStyle/>
@@ -9478,7 +9630,6 @@
           <a:lstStyle/>
           <a:p>
             <a:pPr algn="ctr"/>
-            <a:endParaRPr/>
           </a:p>
         </p:txBody>
       </p:sp>
@@ -9523,7 +9674,6 @@
           <a:lstStyle/>
           <a:p>
             <a:pPr algn="ctr"/>
-            <a:endParaRPr/>
           </a:p>
         </p:txBody>
       </p:sp>
@@ -9544,7 +9694,7 @@
           <a:noFill/>
         </p:spPr>
         <p:txBody>
-          <a:bodyPr wrap="square" lIns="0" tIns="0" rIns="0" bIns="0" anchor="ctr">
+          <a:bodyPr wrap="square" anchor="ctr" lIns="0" rIns="0" tIns="0" bIns="0">
             <a:spAutoFit/>
           </a:bodyPr>
           <a:lstStyle/>
@@ -9607,7 +9757,6 @@
           <a:lstStyle/>
           <a:p>
             <a:pPr algn="ctr"/>
-            <a:endParaRPr/>
           </a:p>
         </p:txBody>
       </p:sp>
@@ -9628,7 +9777,7 @@
           <a:noFill/>
         </p:spPr>
         <p:txBody>
-          <a:bodyPr wrap="square" lIns="0" tIns="0" rIns="0" bIns="0" anchor="t">
+          <a:bodyPr wrap="square" anchor="t" lIns="0" rIns="0" tIns="0" bIns="0">
             <a:spAutoFit/>
           </a:bodyPr>
           <a:lstStyle/>
@@ -9671,7 +9820,7 @@
           <a:noFill/>
         </p:spPr>
         <p:txBody>
-          <a:bodyPr wrap="square" lIns="0" tIns="0" rIns="0" bIns="0" anchor="t">
+          <a:bodyPr wrap="square" anchor="t" lIns="0" rIns="0" tIns="0" bIns="0">
             <a:spAutoFit/>
           </a:bodyPr>
           <a:lstStyle/>
@@ -9697,8 +9846,8 @@
 </p:sld>
 </file>
 
-<file path=ppt/slides/slide22.xml><?xml version="1.0" encoding="utf-8"?>
-<p:sld xmlns:a="http://schemas.openxmlformats.org/drawingml/2006/main" xmlns:r="http://schemas.openxmlformats.org/officeDocument/2006/relationships" xmlns:p="http://schemas.openxmlformats.org/presentationml/2006/main">
+<file path=ppt/slides/slide23.xml><?xml version="1.0" encoding="utf-8"?>
+<p:sld xmlns:a="http://schemas.openxmlformats.org/drawingml/2006/main" xmlns:p="http://schemas.openxmlformats.org/presentationml/2006/main" xmlns:r="http://schemas.openxmlformats.org/officeDocument/2006/relationships">
   <p:cSld>
     <p:bg>
       <p:bgPr>
@@ -9714,14 +9863,7 @@
         <p:cNvGrpSpPr/>
         <p:nvPr/>
       </p:nvGrpSpPr>
-      <p:grpSpPr>
-        <a:xfrm>
-          <a:off x="0" y="0"/>
-          <a:ext cx="0" cy="0"/>
-          <a:chOff x="0" y="0"/>
-          <a:chExt cx="0" cy="0"/>
-        </a:xfrm>
-      </p:grpSpPr>
+      <p:grpSpPr/>
       <p:sp>
         <p:nvSpPr>
           <p:cNvPr id="2" name="Rectangle 1"/>
@@ -9763,7 +9905,6 @@
           <a:lstStyle/>
           <a:p>
             <a:pPr algn="ctr"/>
-            <a:endParaRPr/>
           </a:p>
         </p:txBody>
       </p:sp>
@@ -9784,7 +9925,7 @@
           <a:noFill/>
         </p:spPr>
         <p:txBody>
-          <a:bodyPr wrap="square" lIns="0" tIns="0" rIns="0" bIns="0" anchor="t">
+          <a:bodyPr wrap="square" anchor="t" lIns="0" rIns="0" tIns="0" bIns="0">
             <a:spAutoFit/>
           </a:bodyPr>
           <a:lstStyle/>
@@ -9848,7 +9989,7 @@
 </file>
 
 <file path=ppt/slides/slide3.xml><?xml version="1.0" encoding="utf-8"?>
-<p:sld xmlns:a="http://schemas.openxmlformats.org/drawingml/2006/main" xmlns:r="http://schemas.openxmlformats.org/officeDocument/2006/relationships" xmlns:p="http://schemas.openxmlformats.org/presentationml/2006/main">
+<p:sld xmlns:a="http://schemas.openxmlformats.org/drawingml/2006/main" xmlns:p="http://schemas.openxmlformats.org/presentationml/2006/main" xmlns:r="http://schemas.openxmlformats.org/officeDocument/2006/relationships">
   <p:cSld>
     <p:bg>
       <p:bgPr>
@@ -9864,14 +10005,7 @@
         <p:cNvGrpSpPr/>
         <p:nvPr/>
       </p:nvGrpSpPr>
-      <p:grpSpPr>
-        <a:xfrm>
-          <a:off x="0" y="0"/>
-          <a:ext cx="0" cy="0"/>
-          <a:chOff x="0" y="0"/>
-          <a:chExt cx="0" cy="0"/>
-        </a:xfrm>
-      </p:grpSpPr>
+      <p:grpSpPr/>
       <p:sp>
         <p:nvSpPr>
           <p:cNvPr id="2" name="Rectangle 1"/>
@@ -9913,7 +10047,6 @@
           <a:lstStyle/>
           <a:p>
             <a:pPr algn="ctr"/>
-            <a:endParaRPr/>
           </a:p>
         </p:txBody>
       </p:sp>
@@ -9934,7 +10067,7 @@
           <a:noFill/>
         </p:spPr>
         <p:txBody>
-          <a:bodyPr wrap="square" lIns="0" tIns="0" rIns="0" bIns="0" anchor="t">
+          <a:bodyPr wrap="square" anchor="t" lIns="0" rIns="0" tIns="0" bIns="0">
             <a:spAutoFit/>
           </a:bodyPr>
           <a:lstStyle/>
@@ -9968,7 +10101,7 @@
           <a:noFill/>
         </p:spPr>
         <p:txBody>
-          <a:bodyPr wrap="square" lIns="0" tIns="0" rIns="0" bIns="0" anchor="t">
+          <a:bodyPr wrap="square" anchor="t" lIns="0" rIns="0" tIns="0" bIns="0">
             <a:spAutoFit/>
           </a:bodyPr>
           <a:lstStyle/>
@@ -10058,7 +10191,6 @@
           <a:lstStyle/>
           <a:p>
             <a:pPr algn="ctr"/>
-            <a:endParaRPr/>
           </a:p>
         </p:txBody>
       </p:sp>
@@ -10079,7 +10211,7 @@
           <a:noFill/>
         </p:spPr>
         <p:txBody>
-          <a:bodyPr wrap="square" lIns="0" tIns="0" rIns="0" bIns="0" anchor="t">
+          <a:bodyPr wrap="square" anchor="t" lIns="0" rIns="0" tIns="0" bIns="0">
             <a:spAutoFit/>
           </a:bodyPr>
           <a:lstStyle/>
@@ -10122,13 +10254,21 @@
           <a:noFill/>
         </p:spPr>
         <p:txBody>
-          <a:bodyPr wrap="square" lIns="0" tIns="0" rIns="0" bIns="0" anchor="t">
+          <a:bodyPr wrap="square" anchor="t" lIns="0" rIns="0" tIns="0" bIns="0">
             <a:spAutoFit/>
           </a:bodyPr>
           <a:lstStyle/>
           <a:p>
             <a:pPr algn="r"/>
-            <a:endParaRPr/>
+            <a:r>
+              <a:rPr sz="1100" b="0" i="0">
+                <a:solidFill>
+                  <a:srgbClr val="7A7A7A"/>
+                </a:solidFill>
+                <a:latin typeface="Roboto"/>
+              </a:rPr>
+              <a:t/>
+            </a:r>
           </a:p>
         </p:txBody>
       </p:sp>
@@ -10141,7 +10281,7 @@
 </file>
 
 <file path=ppt/slides/slide4.xml><?xml version="1.0" encoding="utf-8"?>
-<p:sld xmlns:a="http://schemas.openxmlformats.org/drawingml/2006/main" xmlns:r="http://schemas.openxmlformats.org/officeDocument/2006/relationships" xmlns:p="http://schemas.openxmlformats.org/presentationml/2006/main">
+<p:sld xmlns:a="http://schemas.openxmlformats.org/drawingml/2006/main" xmlns:p="http://schemas.openxmlformats.org/presentationml/2006/main" xmlns:r="http://schemas.openxmlformats.org/officeDocument/2006/relationships">
   <p:cSld>
     <p:bg>
       <p:bgPr>
@@ -10157,14 +10297,7 @@
         <p:cNvGrpSpPr/>
         <p:nvPr/>
       </p:nvGrpSpPr>
-      <p:grpSpPr>
-        <a:xfrm>
-          <a:off x="0" y="0"/>
-          <a:ext cx="0" cy="0"/>
-          <a:chOff x="0" y="0"/>
-          <a:chExt cx="0" cy="0"/>
-        </a:xfrm>
-      </p:grpSpPr>
+      <p:grpSpPr/>
       <p:sp>
         <p:nvSpPr>
           <p:cNvPr id="2" name="TextBox 1"/>
@@ -10174,7 +10307,7 @@
         <p:spPr>
           <a:xfrm>
             <a:off x="640080" y="457200"/>
-            <a:ext cx="10881360" cy="430887"/>
+            <a:ext cx="10881360" cy="960120"/>
           </a:xfrm>
           <a:prstGeom prst="rect">
             <a:avLst/>
@@ -10182,13 +10315,13 @@
           <a:noFill/>
         </p:spPr>
         <p:txBody>
-          <a:bodyPr wrap="square" lIns="0" tIns="0" rIns="0" bIns="0" anchor="t">
+          <a:bodyPr wrap="square" anchor="t" lIns="0" rIns="0" tIns="0" bIns="0">
             <a:spAutoFit/>
           </a:bodyPr>
           <a:lstStyle/>
           <a:p>
             <a:r>
-              <a:rPr sz="2800" b="1" i="0" dirty="0">
+              <a:rPr sz="2800" b="1" i="0">
                 <a:solidFill>
                   <a:srgbClr val="2A2929"/>
                 </a:solidFill>
@@ -10196,12 +10329,22 @@
               </a:rPr>
               <a:t>Implementation approaches</a:t>
             </a:r>
-            <a:endParaRPr lang="en-AU" sz="2800" b="1" i="0" dirty="0">
-              <a:solidFill>
-                <a:srgbClr val="2A2929"/>
-              </a:solidFill>
-              <a:latin typeface="Roboto"/>
-            </a:endParaRPr>
+          </a:p>
+          <a:p>
+            <a:pPr>
+              <a:spcBef>
+                <a:spcPts val="200"/>
+              </a:spcBef>
+            </a:pPr>
+            <a:r>
+              <a:rPr sz="1800" b="0" i="1">
+                <a:solidFill>
+                  <a:srgbClr val="D68E10"/>
+                </a:solidFill>
+                <a:latin typeface="Roboto Light"/>
+              </a:rPr>
+              <a:t>ICTCLD502 · Implement &amp; finalise</a:t>
+            </a:r>
           </a:p>
         </p:txBody>
       </p:sp>
@@ -10213,7 +10356,7 @@
         </p:nvSpPr>
         <p:spPr>
           <a:xfrm>
-            <a:off x="658368" y="976987"/>
+            <a:off x="658368" y="1371600"/>
             <a:ext cx="1463040" cy="50800"/>
           </a:xfrm>
           <a:prstGeom prst="rect">
@@ -10246,7 +10389,6 @@
           <a:lstStyle/>
           <a:p>
             <a:pPr algn="ctr"/>
-            <a:endParaRPr/>
           </a:p>
         </p:txBody>
       </p:sp>
@@ -10267,7 +10409,7 @@
           <a:noFill/>
         </p:spPr>
         <p:txBody>
-          <a:bodyPr wrap="square" lIns="0" tIns="0" rIns="0" bIns="0" anchor="t">
+          <a:bodyPr wrap="square" anchor="ctr" lIns="0" rIns="0" tIns="0" bIns="0">
             <a:spAutoFit/>
           </a:bodyPr>
           <a:lstStyle/>
@@ -10284,7 +10426,7 @@
               </a:spcAft>
             </a:pPr>
             <a:r>
-              <a:rPr sz="1800" b="1" i="0">
+              <a:rPr sz="2400" b="1" i="0">
                 <a:solidFill>
                   <a:srgbClr val="EDAB0C"/>
                 </a:solidFill>
@@ -10293,7 +10435,7 @@
               <a:t>■  </a:t>
             </a:r>
             <a:r>
-              <a:rPr sz="1800" b="0" i="0">
+              <a:rPr sz="2400" b="0" i="0">
                 <a:solidFill>
                   <a:srgbClr val="2A2929"/>
                 </a:solidFill>
@@ -10315,7 +10457,7 @@
               </a:spcAft>
             </a:pPr>
             <a:r>
-              <a:rPr sz="1800" b="1" i="0">
+              <a:rPr sz="2400" b="1" i="0">
                 <a:solidFill>
                   <a:srgbClr val="EDAB0C"/>
                 </a:solidFill>
@@ -10324,7 +10466,7 @@
               <a:t>■  </a:t>
             </a:r>
             <a:r>
-              <a:rPr sz="1800" b="0" i="0">
+              <a:rPr sz="2400" b="0" i="0">
                 <a:solidFill>
                   <a:srgbClr val="2A2929"/>
                 </a:solidFill>
@@ -10346,7 +10488,7 @@
               </a:spcAft>
             </a:pPr>
             <a:r>
-              <a:rPr sz="1800" b="1" i="0">
+              <a:rPr sz="2400" b="1" i="0">
                 <a:solidFill>
                   <a:srgbClr val="EDAB0C"/>
                 </a:solidFill>
@@ -10355,7 +10497,7 @@
               <a:t>■  </a:t>
             </a:r>
             <a:r>
-              <a:rPr sz="1800" b="0" i="0">
+              <a:rPr sz="2400" b="0" i="0">
                 <a:solidFill>
                   <a:srgbClr val="2A2929"/>
                 </a:solidFill>
@@ -10377,13 +10519,22 @@
               </a:spcAft>
             </a:pPr>
             <a:r>
-              <a:rPr sz="1800" b="1" i="0">
+              <a:rPr sz="2400" b="1" i="0">
                 <a:solidFill>
                   <a:srgbClr val="92268F"/>
                 </a:solidFill>
                 <a:latin typeface="Roboto"/>
               </a:rPr>
-              <a:t>■  In-place HA hardening is incremental — add redundancy without taking the service down.</a:t>
+              <a:t>■  </a:t>
+            </a:r>
+            <a:r>
+              <a:rPr sz="2400" b="1" i="0">
+                <a:solidFill>
+                  <a:srgbClr val="92268F"/>
+                </a:solidFill>
+                <a:latin typeface="Roboto"/>
+              </a:rPr>
+              <a:t>In-place HA hardening is incremental — add redundancy without taking the service down.</a:t>
             </a:r>
           </a:p>
         </p:txBody>
@@ -10429,7 +10580,6 @@
           <a:lstStyle/>
           <a:p>
             <a:pPr algn="ctr"/>
-            <a:endParaRPr/>
           </a:p>
         </p:txBody>
       </p:sp>
@@ -10450,7 +10600,7 @@
           <a:noFill/>
         </p:spPr>
         <p:txBody>
-          <a:bodyPr wrap="square" lIns="0" tIns="0" rIns="0" bIns="0" anchor="t">
+          <a:bodyPr wrap="square" anchor="t" lIns="0" rIns="0" tIns="0" bIns="0">
             <a:spAutoFit/>
           </a:bodyPr>
           <a:lstStyle/>
@@ -10493,7 +10643,7 @@
           <a:noFill/>
         </p:spPr>
         <p:txBody>
-          <a:bodyPr wrap="square" lIns="0" tIns="0" rIns="0" bIns="0" anchor="t">
+          <a:bodyPr wrap="square" anchor="t" lIns="0" rIns="0" tIns="0" bIns="0">
             <a:spAutoFit/>
           </a:bodyPr>
           <a:lstStyle/>
@@ -10520,7 +10670,7 @@
 </file>
 
 <file path=ppt/slides/slide5.xml><?xml version="1.0" encoding="utf-8"?>
-<p:sld xmlns:a="http://schemas.openxmlformats.org/drawingml/2006/main" xmlns:r="http://schemas.openxmlformats.org/officeDocument/2006/relationships" xmlns:p="http://schemas.openxmlformats.org/presentationml/2006/main">
+<p:sld xmlns:a="http://schemas.openxmlformats.org/drawingml/2006/main" xmlns:p="http://schemas.openxmlformats.org/presentationml/2006/main" xmlns:r="http://schemas.openxmlformats.org/officeDocument/2006/relationships">
   <p:cSld>
     <p:bg>
       <p:bgPr>
@@ -10536,14 +10686,7 @@
         <p:cNvGrpSpPr/>
         <p:nvPr/>
       </p:nvGrpSpPr>
-      <p:grpSpPr>
-        <a:xfrm>
-          <a:off x="0" y="0"/>
-          <a:ext cx="0" cy="0"/>
-          <a:chOff x="0" y="0"/>
-          <a:chExt cx="0" cy="0"/>
-        </a:xfrm>
-      </p:grpSpPr>
+      <p:grpSpPr/>
       <p:sp>
         <p:nvSpPr>
           <p:cNvPr id="2" name="TextBox 1"/>
@@ -10553,7 +10696,7 @@
         <p:spPr>
           <a:xfrm>
             <a:off x="640080" y="457200"/>
-            <a:ext cx="10881360" cy="430887"/>
+            <a:ext cx="10881360" cy="960120"/>
           </a:xfrm>
           <a:prstGeom prst="rect">
             <a:avLst/>
@@ -10561,19 +10704,35 @@
           <a:noFill/>
         </p:spPr>
         <p:txBody>
-          <a:bodyPr wrap="square" lIns="0" tIns="0" rIns="0" bIns="0" anchor="t">
+          <a:bodyPr wrap="square" anchor="t" lIns="0" rIns="0" tIns="0" bIns="0">
             <a:spAutoFit/>
           </a:bodyPr>
           <a:lstStyle/>
           <a:p>
             <a:r>
-              <a:rPr sz="2800" b="1" i="0" dirty="0">
+              <a:rPr sz="2800" b="1" i="0">
                 <a:solidFill>
                   <a:srgbClr val="2A2929"/>
                 </a:solidFill>
                 <a:latin typeface="Roboto"/>
               </a:rPr>
               <a:t>Build it well</a:t>
+            </a:r>
+          </a:p>
+          <a:p>
+            <a:pPr>
+              <a:spcBef>
+                <a:spcPts val="200"/>
+              </a:spcBef>
+            </a:pPr>
+            <a:r>
+              <a:rPr sz="1800" b="0" i="1">
+                <a:solidFill>
+                  <a:srgbClr val="D68E10"/>
+                </a:solidFill>
+                <a:latin typeface="Roboto Light"/>
+              </a:rPr>
+              <a:t>ICTCLD502 · Implement &amp; finalise</a:t>
             </a:r>
           </a:p>
         </p:txBody>
@@ -10586,7 +10745,7 @@
         </p:nvSpPr>
         <p:spPr>
           <a:xfrm>
-            <a:off x="658368" y="983083"/>
+            <a:off x="658368" y="1371600"/>
             <a:ext cx="1463040" cy="50800"/>
           </a:xfrm>
           <a:prstGeom prst="rect">
@@ -10619,7 +10778,6 @@
           <a:lstStyle/>
           <a:p>
             <a:pPr algn="ctr"/>
-            <a:endParaRPr/>
           </a:p>
         </p:txBody>
       </p:sp>
@@ -10640,7 +10798,7 @@
           <a:noFill/>
         </p:spPr>
         <p:txBody>
-          <a:bodyPr wrap="square" lIns="0" tIns="0" rIns="0" bIns="0" anchor="t">
+          <a:bodyPr wrap="square" anchor="ctr" lIns="0" rIns="0" tIns="0" bIns="0">
             <a:spAutoFit/>
           </a:bodyPr>
           <a:lstStyle/>
@@ -10657,7 +10815,7 @@
               </a:spcAft>
             </a:pPr>
             <a:r>
-              <a:rPr sz="1800" b="1" i="0">
+              <a:rPr sz="2400" b="1" i="0">
                 <a:solidFill>
                   <a:srgbClr val="EDAB0C"/>
                 </a:solidFill>
@@ -10666,7 +10824,7 @@
               <a:t>■  </a:t>
             </a:r>
             <a:r>
-              <a:rPr sz="1800" b="0" i="0">
+              <a:rPr sz="2400" b="0" i="0">
                 <a:solidFill>
                   <a:srgbClr val="2A2929"/>
                 </a:solidFill>
@@ -10688,7 +10846,7 @@
               </a:spcAft>
             </a:pPr>
             <a:r>
-              <a:rPr sz="1800" b="1" i="0">
+              <a:rPr sz="2400" b="1" i="0">
                 <a:solidFill>
                   <a:srgbClr val="EDAB0C"/>
                 </a:solidFill>
@@ -10697,7 +10855,7 @@
               <a:t>■  </a:t>
             </a:r>
             <a:r>
-              <a:rPr sz="1800" b="0" i="0">
+              <a:rPr sz="2400" b="0" i="0">
                 <a:solidFill>
                   <a:srgbClr val="2A2929"/>
                 </a:solidFill>
@@ -10719,13 +10877,22 @@
               </a:spcAft>
             </a:pPr>
             <a:r>
-              <a:rPr sz="1800" b="1" i="0">
+              <a:rPr sz="2400" b="1" i="0">
                 <a:solidFill>
                   <a:srgbClr val="92268F"/>
                 </a:solidFill>
                 <a:latin typeface="Roboto"/>
               </a:rPr>
-              <a:t>■  Automate security and monitoring (IAM, CloudWatch, alarms).</a:t>
+              <a:t>■  </a:t>
+            </a:r>
+            <a:r>
+              <a:rPr sz="2400" b="1" i="0">
+                <a:solidFill>
+                  <a:srgbClr val="92268F"/>
+                </a:solidFill>
+                <a:latin typeface="Roboto"/>
+              </a:rPr>
+              <a:t>Automate security and monitoring (IAM, CloudWatch, alarms).</a:t>
             </a:r>
           </a:p>
         </p:txBody>
@@ -10771,7 +10938,6 @@
           <a:lstStyle/>
           <a:p>
             <a:pPr algn="ctr"/>
-            <a:endParaRPr/>
           </a:p>
         </p:txBody>
       </p:sp>
@@ -10792,7 +10958,7 @@
           <a:noFill/>
         </p:spPr>
         <p:txBody>
-          <a:bodyPr wrap="square" lIns="0" tIns="0" rIns="0" bIns="0" anchor="t">
+          <a:bodyPr wrap="square" anchor="t" lIns="0" rIns="0" tIns="0" bIns="0">
             <a:spAutoFit/>
           </a:bodyPr>
           <a:lstStyle/>
@@ -10835,7 +11001,7 @@
           <a:noFill/>
         </p:spPr>
         <p:txBody>
-          <a:bodyPr wrap="square" lIns="0" tIns="0" rIns="0" bIns="0" anchor="t">
+          <a:bodyPr wrap="square" anchor="t" lIns="0" rIns="0" tIns="0" bIns="0">
             <a:spAutoFit/>
           </a:bodyPr>
           <a:lstStyle/>
@@ -10862,7 +11028,7 @@
 </file>
 
 <file path=ppt/slides/slide6.xml><?xml version="1.0" encoding="utf-8"?>
-<p:sld xmlns:a="http://schemas.openxmlformats.org/drawingml/2006/main" xmlns:r="http://schemas.openxmlformats.org/officeDocument/2006/relationships" xmlns:p="http://schemas.openxmlformats.org/presentationml/2006/main">
+<p:sld xmlns:a="http://schemas.openxmlformats.org/drawingml/2006/main" xmlns:p="http://schemas.openxmlformats.org/presentationml/2006/main" xmlns:r="http://schemas.openxmlformats.org/officeDocument/2006/relationships">
   <p:cSld>
     <p:bg>
       <p:bgPr>
@@ -10878,14 +11044,7 @@
         <p:cNvGrpSpPr/>
         <p:nvPr/>
       </p:nvGrpSpPr>
-      <p:grpSpPr>
-        <a:xfrm>
-          <a:off x="0" y="0"/>
-          <a:ext cx="0" cy="0"/>
-          <a:chOff x="0" y="0"/>
-          <a:chExt cx="0" cy="0"/>
-        </a:xfrm>
-      </p:grpSpPr>
+      <p:grpSpPr/>
       <p:sp>
         <p:nvSpPr>
           <p:cNvPr id="2" name="TextBox 1"/>
@@ -10895,7 +11054,7 @@
         <p:spPr>
           <a:xfrm>
             <a:off x="640080" y="457200"/>
-            <a:ext cx="10881360" cy="430887"/>
+            <a:ext cx="10881360" cy="960120"/>
           </a:xfrm>
           <a:prstGeom prst="rect">
             <a:avLst/>
@@ -10903,19 +11062,35 @@
           <a:noFill/>
         </p:spPr>
         <p:txBody>
-          <a:bodyPr wrap="square" lIns="0" tIns="0" rIns="0" bIns="0" anchor="t">
+          <a:bodyPr wrap="square" anchor="t" lIns="0" rIns="0" tIns="0" bIns="0">
             <a:spAutoFit/>
           </a:bodyPr>
           <a:lstStyle/>
           <a:p>
             <a:r>
-              <a:rPr sz="2800" b="1" i="0" dirty="0">
+              <a:rPr sz="2800" b="1" i="0">
                 <a:solidFill>
                   <a:srgbClr val="2A2929"/>
                 </a:solidFill>
                 <a:latin typeface="Roboto"/>
               </a:rPr>
               <a:t>Demonstrate connectivity at all tiers</a:t>
+            </a:r>
+          </a:p>
+          <a:p>
+            <a:pPr>
+              <a:spcBef>
+                <a:spcPts val="200"/>
+              </a:spcBef>
+            </a:pPr>
+            <a:r>
+              <a:rPr sz="1800" b="0" i="1">
+                <a:solidFill>
+                  <a:srgbClr val="D68E10"/>
+                </a:solidFill>
+                <a:latin typeface="Roboto Light"/>
+              </a:rPr>
+              <a:t>ICTCLD502 · Implement &amp; finalise</a:t>
             </a:r>
           </a:p>
         </p:txBody>
@@ -10928,7 +11103,7 @@
         </p:nvSpPr>
         <p:spPr>
           <a:xfrm>
-            <a:off x="658368" y="1033883"/>
+            <a:off x="658368" y="1371600"/>
             <a:ext cx="1463040" cy="50800"/>
           </a:xfrm>
           <a:prstGeom prst="rect">
@@ -10961,7 +11136,6 @@
           <a:lstStyle/>
           <a:p>
             <a:pPr algn="ctr"/>
-            <a:endParaRPr/>
           </a:p>
         </p:txBody>
       </p:sp>
@@ -10982,7 +11156,7 @@
           <a:noFill/>
         </p:spPr>
         <p:txBody>
-          <a:bodyPr wrap="square" lIns="0" tIns="0" rIns="0" bIns="0" anchor="t">
+          <a:bodyPr wrap="square" anchor="ctr" lIns="0" rIns="0" tIns="0" bIns="0">
             <a:spAutoFit/>
           </a:bodyPr>
           <a:lstStyle/>
@@ -10999,7 +11173,7 @@
               </a:spcAft>
             </a:pPr>
             <a:r>
-              <a:rPr sz="1800" b="1" i="0">
+              <a:rPr sz="2400" b="1" i="0">
                 <a:solidFill>
                   <a:srgbClr val="EDAB0C"/>
                 </a:solidFill>
@@ -11008,7 +11182,7 @@
               <a:t>■  </a:t>
             </a:r>
             <a:r>
-              <a:rPr sz="1800" b="0" i="0">
+              <a:rPr sz="2400" b="0" i="0">
                 <a:solidFill>
                   <a:srgbClr val="2A2929"/>
                 </a:solidFill>
@@ -11030,7 +11204,7 @@
               </a:spcAft>
             </a:pPr>
             <a:r>
-              <a:rPr sz="1500" b="0" i="0">
+              <a:rPr sz="2100" b="0" i="0">
                 <a:solidFill>
                   <a:srgbClr val="7A7A7A"/>
                 </a:solidFill>
@@ -11039,7 +11213,7 @@
               <a:t>–  </a:t>
             </a:r>
             <a:r>
-              <a:rPr sz="1500" b="0" i="0">
+              <a:rPr sz="2100" b="0" i="0">
                 <a:solidFill>
                   <a:srgbClr val="2A2929"/>
                 </a:solidFill>
@@ -11061,13 +11235,22 @@
               </a:spcAft>
             </a:pPr>
             <a:r>
-              <a:rPr sz="1800" b="1" i="0">
+              <a:rPr sz="2400" b="1" i="0">
                 <a:solidFill>
                   <a:srgbClr val="92268F"/>
                 </a:solidFill>
                 <a:latin typeface="Roboto"/>
               </a:rPr>
-              <a:t>■  Confirm failover works — and that you can fail back to the primary.</a:t>
+              <a:t>■  </a:t>
+            </a:r>
+            <a:r>
+              <a:rPr sz="2400" b="1" i="0">
+                <a:solidFill>
+                  <a:srgbClr val="92268F"/>
+                </a:solidFill>
+                <a:latin typeface="Roboto"/>
+              </a:rPr>
+              <a:t>Confirm failover works — and that you can fail back to the primary.</a:t>
             </a:r>
           </a:p>
           <a:p>
@@ -11083,7 +11266,7 @@
               </a:spcAft>
             </a:pPr>
             <a:r>
-              <a:rPr sz="1800" b="1" i="0">
+              <a:rPr sz="2400" b="1" i="0">
                 <a:solidFill>
                   <a:srgbClr val="EDAB0C"/>
                 </a:solidFill>
@@ -11092,7 +11275,7 @@
               <a:t>■  </a:t>
             </a:r>
             <a:r>
-              <a:rPr sz="1800" b="0" i="0">
+              <a:rPr sz="2400" b="0" i="0">
                 <a:solidFill>
                   <a:srgbClr val="2A2929"/>
                 </a:solidFill>
@@ -11144,7 +11327,6 @@
           <a:lstStyle/>
           <a:p>
             <a:pPr algn="ctr"/>
-            <a:endParaRPr/>
           </a:p>
         </p:txBody>
       </p:sp>
@@ -11165,7 +11347,7 @@
           <a:noFill/>
         </p:spPr>
         <p:txBody>
-          <a:bodyPr wrap="square" lIns="0" tIns="0" rIns="0" bIns="0" anchor="t">
+          <a:bodyPr wrap="square" anchor="t" lIns="0" rIns="0" tIns="0" bIns="0">
             <a:spAutoFit/>
           </a:bodyPr>
           <a:lstStyle/>
@@ -11208,7 +11390,7 @@
           <a:noFill/>
         </p:spPr>
         <p:txBody>
-          <a:bodyPr wrap="square" lIns="0" tIns="0" rIns="0" bIns="0" anchor="t">
+          <a:bodyPr wrap="square" anchor="t" lIns="0" rIns="0" tIns="0" bIns="0">
             <a:spAutoFit/>
           </a:bodyPr>
           <a:lstStyle/>
@@ -11235,7 +11417,7 @@
 </file>
 
 <file path=ppt/slides/slide7.xml><?xml version="1.0" encoding="utf-8"?>
-<p:sld xmlns:a="http://schemas.openxmlformats.org/drawingml/2006/main" xmlns:r="http://schemas.openxmlformats.org/officeDocument/2006/relationships" xmlns:p="http://schemas.openxmlformats.org/presentationml/2006/main">
+<p:sld xmlns:a="http://schemas.openxmlformats.org/drawingml/2006/main" xmlns:p="http://schemas.openxmlformats.org/presentationml/2006/main" xmlns:r="http://schemas.openxmlformats.org/officeDocument/2006/relationships">
   <p:cSld>
     <p:bg>
       <p:bgPr>
@@ -11251,14 +11433,7 @@
         <p:cNvGrpSpPr/>
         <p:nvPr/>
       </p:nvGrpSpPr>
-      <p:grpSpPr>
-        <a:xfrm>
-          <a:off x="0" y="0"/>
-          <a:ext cx="0" cy="0"/>
-          <a:chOff x="0" y="0"/>
-          <a:chExt cx="0" cy="0"/>
-        </a:xfrm>
-      </p:grpSpPr>
+      <p:grpSpPr/>
       <p:sp>
         <p:nvSpPr>
           <p:cNvPr id="2" name="Rectangle 1"/>
@@ -11300,7 +11475,6 @@
           <a:lstStyle/>
           <a:p>
             <a:pPr algn="ctr"/>
-            <a:endParaRPr/>
           </a:p>
         </p:txBody>
       </p:sp>
@@ -11374,7 +11548,7 @@
           <a:noFill/>
         </p:spPr>
         <p:txBody>
-          <a:bodyPr wrap="square" lIns="0" tIns="0" rIns="0" bIns="0" anchor="ctr">
+          <a:bodyPr wrap="square" anchor="ctr" lIns="0" rIns="0" tIns="0" bIns="0">
             <a:spAutoFit/>
           </a:bodyPr>
           <a:lstStyle/>
@@ -11408,7 +11582,7 @@
           <a:noFill/>
         </p:spPr>
         <p:txBody>
-          <a:bodyPr wrap="square" lIns="0" tIns="0" rIns="0" bIns="0" anchor="t">
+          <a:bodyPr wrap="square" anchor="t" lIns="0" rIns="0" tIns="0" bIns="0">
             <a:spAutoFit/>
           </a:bodyPr>
           <a:lstStyle/>
@@ -11550,7 +11724,6 @@
           <a:lstStyle/>
           <a:p>
             <a:pPr algn="ctr"/>
-            <a:endParaRPr/>
           </a:p>
         </p:txBody>
       </p:sp>
@@ -11571,7 +11744,7 @@
           <a:noFill/>
         </p:spPr>
         <p:txBody>
-          <a:bodyPr wrap="square" lIns="0" tIns="0" rIns="0" bIns="0" anchor="ctr">
+          <a:bodyPr wrap="square" anchor="ctr" lIns="0" rIns="0" tIns="0" bIns="0">
             <a:spAutoFit/>
           </a:bodyPr>
           <a:lstStyle/>
@@ -11629,7 +11802,6 @@
           <a:lstStyle/>
           <a:p>
             <a:pPr algn="ctr"/>
-            <a:endParaRPr/>
           </a:p>
         </p:txBody>
       </p:sp>
@@ -11650,7 +11822,7 @@
           <a:noFill/>
         </p:spPr>
         <p:txBody>
-          <a:bodyPr wrap="square" lIns="0" tIns="0" rIns="0" bIns="0" anchor="t">
+          <a:bodyPr wrap="square" anchor="t" lIns="0" rIns="0" tIns="0" bIns="0">
             <a:spAutoFit/>
           </a:bodyPr>
           <a:lstStyle/>
@@ -11693,7 +11865,7 @@
           <a:noFill/>
         </p:spPr>
         <p:txBody>
-          <a:bodyPr wrap="square" lIns="0" tIns="0" rIns="0" bIns="0" anchor="t">
+          <a:bodyPr wrap="square" anchor="t" lIns="0" rIns="0" tIns="0" bIns="0">
             <a:spAutoFit/>
           </a:bodyPr>
           <a:lstStyle/>
@@ -11720,7 +11892,7 @@
 </file>
 
 <file path=ppt/slides/slide8.xml><?xml version="1.0" encoding="utf-8"?>
-<p:sld xmlns:a="http://schemas.openxmlformats.org/drawingml/2006/main" xmlns:r="http://schemas.openxmlformats.org/officeDocument/2006/relationships" xmlns:p="http://schemas.openxmlformats.org/presentationml/2006/main">
+<p:sld xmlns:a="http://schemas.openxmlformats.org/drawingml/2006/main" xmlns:p="http://schemas.openxmlformats.org/presentationml/2006/main" xmlns:r="http://schemas.openxmlformats.org/officeDocument/2006/relationships">
   <p:cSld>
     <p:bg>
       <p:bgPr>
@@ -11736,14 +11908,7 @@
         <p:cNvGrpSpPr/>
         <p:nvPr/>
       </p:nvGrpSpPr>
-      <p:grpSpPr>
-        <a:xfrm>
-          <a:off x="0" y="0"/>
-          <a:ext cx="0" cy="0"/>
-          <a:chOff x="0" y="0"/>
-          <a:chExt cx="0" cy="0"/>
-        </a:xfrm>
-      </p:grpSpPr>
+      <p:grpSpPr/>
       <p:sp>
         <p:nvSpPr>
           <p:cNvPr id="2" name="Rectangle 1"/>
@@ -11785,7 +11950,6 @@
           <a:lstStyle/>
           <a:p>
             <a:pPr algn="ctr"/>
-            <a:endParaRPr/>
           </a:p>
         </p:txBody>
       </p:sp>
@@ -11859,7 +12023,7 @@
           <a:noFill/>
         </p:spPr>
         <p:txBody>
-          <a:bodyPr wrap="square" lIns="0" tIns="0" rIns="0" bIns="0" anchor="ctr">
+          <a:bodyPr wrap="square" anchor="ctr" lIns="0" rIns="0" tIns="0" bIns="0">
             <a:spAutoFit/>
           </a:bodyPr>
           <a:lstStyle/>
@@ -11893,7 +12057,7 @@
           <a:noFill/>
         </p:spPr>
         <p:txBody>
-          <a:bodyPr wrap="square" lIns="0" tIns="0" rIns="0" bIns="0" anchor="t">
+          <a:bodyPr wrap="square" anchor="t" lIns="0" rIns="0" tIns="0" bIns="0">
             <a:spAutoFit/>
           </a:bodyPr>
           <a:lstStyle/>
@@ -12009,7 +12173,16 @@
                 </a:solidFill>
                 <a:latin typeface="Roboto"/>
               </a:rPr>
-              <a:t>■  Demonstrate connectivity at all tiers and capture evidence.</a:t>
+              <a:t>■  </a:t>
+            </a:r>
+            <a:r>
+              <a:rPr sz="1700" b="1" i="0">
+                <a:solidFill>
+                  <a:srgbClr val="92268F"/>
+                </a:solidFill>
+                <a:latin typeface="Roboto"/>
+              </a:rPr>
+              <a:t>Demonstrate connectivity at all tiers and capture evidence.</a:t>
             </a:r>
           </a:p>
         </p:txBody>
@@ -12057,7 +12230,6 @@
           <a:lstStyle/>
           <a:p>
             <a:pPr algn="ctr"/>
-            <a:endParaRPr/>
           </a:p>
         </p:txBody>
       </p:sp>
@@ -12078,7 +12250,7 @@
           <a:noFill/>
         </p:spPr>
         <p:txBody>
-          <a:bodyPr wrap="square" lIns="0" tIns="0" rIns="0" bIns="0" anchor="ctr">
+          <a:bodyPr wrap="square" anchor="ctr" lIns="0" rIns="0" tIns="0" bIns="0">
             <a:spAutoFit/>
           </a:bodyPr>
           <a:lstStyle/>
@@ -12136,7 +12308,6 @@
           <a:lstStyle/>
           <a:p>
             <a:pPr algn="ctr"/>
-            <a:endParaRPr/>
           </a:p>
         </p:txBody>
       </p:sp>
@@ -12157,7 +12328,7 @@
           <a:noFill/>
         </p:spPr>
         <p:txBody>
-          <a:bodyPr wrap="square" lIns="0" tIns="0" rIns="0" bIns="0" anchor="t">
+          <a:bodyPr wrap="square" anchor="t" lIns="0" rIns="0" tIns="0" bIns="0">
             <a:spAutoFit/>
           </a:bodyPr>
           <a:lstStyle/>
@@ -12200,7 +12371,7 @@
           <a:noFill/>
         </p:spPr>
         <p:txBody>
-          <a:bodyPr wrap="square" lIns="0" tIns="0" rIns="0" bIns="0" anchor="t">
+          <a:bodyPr wrap="square" anchor="t" lIns="0" rIns="0" tIns="0" bIns="0">
             <a:spAutoFit/>
           </a:bodyPr>
           <a:lstStyle/>
@@ -12227,7 +12398,7 @@
 </file>
 
 <file path=ppt/slides/slide9.xml><?xml version="1.0" encoding="utf-8"?>
-<p:sld xmlns:a="http://schemas.openxmlformats.org/drawingml/2006/main" xmlns:r="http://schemas.openxmlformats.org/officeDocument/2006/relationships" xmlns:p="http://schemas.openxmlformats.org/presentationml/2006/main">
+<p:sld xmlns:a="http://schemas.openxmlformats.org/drawingml/2006/main" xmlns:p="http://schemas.openxmlformats.org/presentationml/2006/main" xmlns:r="http://schemas.openxmlformats.org/officeDocument/2006/relationships">
   <p:cSld>
     <p:bg>
       <p:bgPr>
@@ -12243,14 +12414,7 @@
         <p:cNvGrpSpPr/>
         <p:nvPr/>
       </p:nvGrpSpPr>
-      <p:grpSpPr>
-        <a:xfrm>
-          <a:off x="0" y="0"/>
-          <a:ext cx="0" cy="0"/>
-          <a:chOff x="0" y="0"/>
-          <a:chExt cx="0" cy="0"/>
-        </a:xfrm>
-      </p:grpSpPr>
+      <p:grpSpPr/>
       <p:sp>
         <p:nvSpPr>
           <p:cNvPr id="2" name="TextBox 1"/>
@@ -12268,7 +12432,7 @@
           <a:noFill/>
         </p:spPr>
         <p:txBody>
-          <a:bodyPr wrap="square" lIns="0" tIns="0" rIns="0" bIns="0" anchor="t">
+          <a:bodyPr wrap="square" anchor="t" lIns="0" rIns="0" tIns="0" bIns="0">
             <a:spAutoFit/>
           </a:bodyPr>
           <a:lstStyle/>
@@ -12342,7 +12506,6 @@
           <a:lstStyle/>
           <a:p>
             <a:pPr algn="ctr"/>
-            <a:endParaRPr/>
           </a:p>
         </p:txBody>
       </p:sp>
@@ -12389,7 +12552,6 @@
           <a:lstStyle/>
           <a:p>
             <a:pPr algn="ctr"/>
-            <a:endParaRPr/>
           </a:p>
         </p:txBody>
       </p:sp>
@@ -12434,7 +12596,6 @@
           <a:lstStyle/>
           <a:p>
             <a:pPr algn="ctr"/>
-            <a:endParaRPr/>
           </a:p>
         </p:txBody>
       </p:sp>
@@ -12455,7 +12616,7 @@
           <a:noFill/>
         </p:spPr>
         <p:txBody>
-          <a:bodyPr wrap="square" lIns="0" tIns="0" rIns="0" bIns="0" anchor="ctr">
+          <a:bodyPr wrap="square" anchor="ctr" lIns="0" rIns="0" tIns="0" bIns="0">
             <a:spAutoFit/>
           </a:bodyPr>
           <a:lstStyle/>
@@ -12520,7 +12681,6 @@
           <a:lstStyle/>
           <a:p>
             <a:pPr algn="ctr"/>
-            <a:endParaRPr/>
           </a:p>
         </p:txBody>
       </p:sp>
@@ -12565,7 +12725,6 @@
           <a:lstStyle/>
           <a:p>
             <a:pPr algn="ctr"/>
-            <a:endParaRPr/>
           </a:p>
         </p:txBody>
       </p:sp>
@@ -12586,7 +12745,7 @@
           <a:noFill/>
         </p:spPr>
         <p:txBody>
-          <a:bodyPr wrap="square" lIns="0" tIns="0" rIns="0" bIns="0" anchor="ctr">
+          <a:bodyPr wrap="square" anchor="ctr" lIns="0" rIns="0" tIns="0" bIns="0">
             <a:spAutoFit/>
           </a:bodyPr>
           <a:lstStyle/>
@@ -12651,7 +12810,6 @@
           <a:lstStyle/>
           <a:p>
             <a:pPr algn="ctr"/>
-            <a:endParaRPr/>
           </a:p>
         </p:txBody>
       </p:sp>
@@ -12696,7 +12854,6 @@
           <a:lstStyle/>
           <a:p>
             <a:pPr algn="ctr"/>
-            <a:endParaRPr/>
           </a:p>
         </p:txBody>
       </p:sp>
@@ -12717,7 +12874,7 @@
           <a:noFill/>
         </p:spPr>
         <p:txBody>
-          <a:bodyPr wrap="square" lIns="0" tIns="0" rIns="0" bIns="0" anchor="ctr">
+          <a:bodyPr wrap="square" anchor="ctr" lIns="0" rIns="0" tIns="0" bIns="0">
             <a:spAutoFit/>
           </a:bodyPr>
           <a:lstStyle/>
@@ -12782,7 +12939,6 @@
           <a:lstStyle/>
           <a:p>
             <a:pPr algn="ctr"/>
-            <a:endParaRPr/>
           </a:p>
         </p:txBody>
       </p:sp>
@@ -12827,7 +12983,6 @@
           <a:lstStyle/>
           <a:p>
             <a:pPr algn="ctr"/>
-            <a:endParaRPr/>
           </a:p>
         </p:txBody>
       </p:sp>
@@ -12848,7 +13003,7 @@
           <a:noFill/>
         </p:spPr>
         <p:txBody>
-          <a:bodyPr wrap="square" lIns="0" tIns="0" rIns="0" bIns="0" anchor="ctr">
+          <a:bodyPr wrap="square" anchor="ctr" lIns="0" rIns="0" tIns="0" bIns="0">
             <a:spAutoFit/>
           </a:bodyPr>
           <a:lstStyle/>
@@ -12911,7 +13066,6 @@
           <a:lstStyle/>
           <a:p>
             <a:pPr algn="ctr"/>
-            <a:endParaRPr/>
           </a:p>
         </p:txBody>
       </p:sp>
@@ -12932,7 +13086,7 @@
           <a:noFill/>
         </p:spPr>
         <p:txBody>
-          <a:bodyPr wrap="square" lIns="0" tIns="0" rIns="0" bIns="0" anchor="t">
+          <a:bodyPr wrap="square" anchor="t" lIns="0" rIns="0" tIns="0" bIns="0">
             <a:spAutoFit/>
           </a:bodyPr>
           <a:lstStyle/>
@@ -12975,7 +13129,7 @@
           <a:noFill/>
         </p:spPr>
         <p:txBody>
-          <a:bodyPr wrap="square" lIns="0" tIns="0" rIns="0" bIns="0" anchor="t">
+          <a:bodyPr wrap="square" anchor="t" lIns="0" rIns="0" tIns="0" bIns="0">
             <a:spAutoFit/>
           </a:bodyPr>
           <a:lstStyle/>

--- a/S1-CL1-Cloud-Design-Build/delivery/topic_13/Topic_13_Slides.pptx
+++ b/S1-CL1-Cloud-Design-Build/delivery/topic_13/Topic_13_Slides.pptx
@@ -7,27 +7,27 @@
   <p:sldIdLst>
     <p:sldId id="256" r:id="rId7"/>
     <p:sldId id="257" r:id="rId8"/>
-    <p:sldId id="258" r:id="rId9"/>
-    <p:sldId id="259" r:id="rId10"/>
-    <p:sldId id="260" r:id="rId11"/>
-    <p:sldId id="261" r:id="rId12"/>
-    <p:sldId id="262" r:id="rId13"/>
-    <p:sldId id="263" r:id="rId14"/>
-    <p:sldId id="264" r:id="rId15"/>
-    <p:sldId id="265" r:id="rId16"/>
-    <p:sldId id="266" r:id="rId17"/>
-    <p:sldId id="267" r:id="rId18"/>
-    <p:sldId id="268" r:id="rId19"/>
-    <p:sldId id="269" r:id="rId20"/>
-    <p:sldId id="270" r:id="rId21"/>
-    <p:sldId id="271" r:id="rId22"/>
-    <p:sldId id="272" r:id="rId23"/>
-    <p:sldId id="273" r:id="rId24"/>
-    <p:sldId id="274" r:id="rId25"/>
-    <p:sldId id="275" r:id="rId26"/>
-    <p:sldId id="276" r:id="rId27"/>
-    <p:sldId id="277" r:id="rId28"/>
-    <p:sldId id="278" r:id="rId29"/>
+    <p:sldId id="258" r:id="rId10"/>
+    <p:sldId id="259" r:id="rId11"/>
+    <p:sldId id="260" r:id="rId12"/>
+    <p:sldId id="261" r:id="rId13"/>
+    <p:sldId id="262" r:id="rId14"/>
+    <p:sldId id="263" r:id="rId15"/>
+    <p:sldId id="264" r:id="rId16"/>
+    <p:sldId id="265" r:id="rId17"/>
+    <p:sldId id="266" r:id="rId18"/>
+    <p:sldId id="267" r:id="rId19"/>
+    <p:sldId id="268" r:id="rId20"/>
+    <p:sldId id="269" r:id="rId21"/>
+    <p:sldId id="270" r:id="rId22"/>
+    <p:sldId id="271" r:id="rId23"/>
+    <p:sldId id="272" r:id="rId24"/>
+    <p:sldId id="273" r:id="rId25"/>
+    <p:sldId id="274" r:id="rId26"/>
+    <p:sldId id="275" r:id="rId27"/>
+    <p:sldId id="276" r:id="rId28"/>
+    <p:sldId id="277" r:id="rId29"/>
+    <p:sldId id="278" r:id="rId30"/>
   </p:sldIdLst>
   <p:sldSz cx="12191695" cy="6858000" type="screen4x3"/>
   <p:notesSz cx="6858000" cy="9144000"/>
@@ -127,6 +127,2225 @@
     </a:lvl9pPr>
   </p:defaultTextStyle>
 </p:presentation>
+</file>
+
+<file path=ppt/notesMasters/notesMaster1.xml><?xml version="1.0" encoding="utf-8"?>
+<p:notesMaster xmlns:a="http://schemas.openxmlformats.org/drawingml/2006/main" xmlns:p="http://schemas.openxmlformats.org/presentationml/2006/main" xmlns:r="http://schemas.openxmlformats.org/officeDocument/2006/relationships">
+  <p:cSld>
+    <p:bg>
+      <p:bgRef idx="1001">
+        <a:schemeClr val="bg1"/>
+      </p:bgRef>
+    </p:bg>
+    <p:spTree>
+      <p:nvGrpSpPr>
+        <p:cNvPr id="1" name=""/>
+        <p:cNvGrpSpPr/>
+        <p:nvPr/>
+      </p:nvGrpSpPr>
+      <p:grpSpPr>
+        <a:xfrm>
+          <a:off x="0" y="0"/>
+          <a:ext cx="0" cy="0"/>
+          <a:chOff x="0" y="0"/>
+          <a:chExt cx="0" cy="0"/>
+        </a:xfrm>
+      </p:grpSpPr>
+      <p:sp>
+        <p:nvSpPr>
+          <p:cNvPr id="2" name="Header Placeholder 1"/>
+          <p:cNvSpPr>
+            <a:spLocks noGrp="1"/>
+          </p:cNvSpPr>
+          <p:nvPr>
+            <p:ph type="hdr" sz="quarter"/>
+          </p:nvPr>
+        </p:nvSpPr>
+        <p:spPr>
+          <a:xfrm>
+            <a:off x="0" y="0"/>
+            <a:ext cx="2971800" cy="457200"/>
+          </a:xfrm>
+          <a:prstGeom prst="rect">
+            <a:avLst/>
+          </a:prstGeom>
+        </p:spPr>
+        <p:txBody>
+          <a:bodyPr vert="horz" lIns="91440" tIns="45720" rIns="91440" bIns="45720" rtlCol="0"/>
+          <a:lstStyle>
+            <a:lvl1pPr algn="l">
+              <a:defRPr sz="1200"/>
+            </a:lvl1pPr>
+          </a:lstStyle>
+          <a:p>
+            <a:endParaRPr lang="en-US"/>
+          </a:p>
+        </p:txBody>
+      </p:sp>
+      <p:sp>
+        <p:nvSpPr>
+          <p:cNvPr id="3" name="Date Placeholder 2"/>
+          <p:cNvSpPr>
+            <a:spLocks noGrp="1"/>
+          </p:cNvSpPr>
+          <p:nvPr>
+            <p:ph type="dt" idx="1"/>
+          </p:nvPr>
+        </p:nvSpPr>
+        <p:spPr>
+          <a:xfrm>
+            <a:off x="3884613" y="0"/>
+            <a:ext cx="2971800" cy="457200"/>
+          </a:xfrm>
+          <a:prstGeom prst="rect">
+            <a:avLst/>
+          </a:prstGeom>
+        </p:spPr>
+        <p:txBody>
+          <a:bodyPr vert="horz" lIns="91440" tIns="45720" rIns="91440" bIns="45720" rtlCol="0"/>
+          <a:lstStyle>
+            <a:lvl1pPr algn="r">
+              <a:defRPr sz="1200"/>
+            </a:lvl1pPr>
+          </a:lstStyle>
+          <a:p>
+            <a:fld id="{0F89C1C7-3DCD-1040-A9CF-14679D8B5DDD}" type="datetimeFigureOut">
+              <a:rPr lang="en-US" smtClean="0"/>
+              <a:t>10/17/16</a:t>
+            </a:fld>
+            <a:endParaRPr lang="en-US"/>
+          </a:p>
+        </p:txBody>
+      </p:sp>
+      <p:sp>
+        <p:nvSpPr>
+          <p:cNvPr id="4" name="Slide Image Placeholder 3"/>
+          <p:cNvSpPr>
+            <a:spLocks noGrp="1" noRot="1" noChangeAspect="1"/>
+          </p:cNvSpPr>
+          <p:nvPr>
+            <p:ph type="sldImg" idx="2"/>
+          </p:nvPr>
+        </p:nvSpPr>
+        <p:spPr>
+          <a:xfrm>
+            <a:off x="1143000" y="685800"/>
+            <a:ext cx="4572000" cy="3429000"/>
+          </a:xfrm>
+          <a:prstGeom prst="rect">
+            <a:avLst/>
+          </a:prstGeom>
+          <a:noFill/>
+          <a:ln w="12700">
+            <a:solidFill>
+              <a:prstClr val="black"/>
+            </a:solidFill>
+          </a:ln>
+        </p:spPr>
+        <p:txBody>
+          <a:bodyPr vert="horz" lIns="91440" tIns="45720" rIns="91440" bIns="45720" rtlCol="0" anchor="ctr"/>
+          <a:lstStyle/>
+          <a:p>
+            <a:endParaRPr lang="en-US"/>
+          </a:p>
+        </p:txBody>
+      </p:sp>
+      <p:sp>
+        <p:nvSpPr>
+          <p:cNvPr id="5" name="Notes Placeholder 4"/>
+          <p:cNvSpPr>
+            <a:spLocks noGrp="1"/>
+          </p:cNvSpPr>
+          <p:nvPr>
+            <p:ph type="body" sz="quarter" idx="3"/>
+          </p:nvPr>
+        </p:nvSpPr>
+        <p:spPr>
+          <a:xfrm>
+            <a:off x="685800" y="4343400"/>
+            <a:ext cx="5486400" cy="4114800"/>
+          </a:xfrm>
+          <a:prstGeom prst="rect">
+            <a:avLst/>
+          </a:prstGeom>
+        </p:spPr>
+        <p:txBody>
+          <a:bodyPr vert="horz" lIns="91440" tIns="45720" rIns="91440" bIns="45720" rtlCol="0"/>
+          <a:lstStyle/>
+          <a:p>
+            <a:pPr lvl="0"/>
+            <a:r>
+              <a:rPr lang="en-US" smtClean="0"/>
+              <a:t>Click to edit Master text styles</a:t>
+            </a:r>
+          </a:p>
+          <a:p>
+            <a:pPr lvl="1"/>
+            <a:r>
+              <a:rPr lang="en-US" smtClean="0"/>
+              <a:t>Second level</a:t>
+            </a:r>
+          </a:p>
+          <a:p>
+            <a:pPr lvl="2"/>
+            <a:r>
+              <a:rPr lang="en-US" smtClean="0"/>
+              <a:t>Third level</a:t>
+            </a:r>
+          </a:p>
+          <a:p>
+            <a:pPr lvl="3"/>
+            <a:r>
+              <a:rPr lang="en-US" smtClean="0"/>
+              <a:t>Fourth level</a:t>
+            </a:r>
+          </a:p>
+          <a:p>
+            <a:pPr lvl="4"/>
+            <a:r>
+              <a:rPr lang="en-US" smtClean="0"/>
+              <a:t>Fifth level</a:t>
+            </a:r>
+            <a:endParaRPr lang="en-US"/>
+          </a:p>
+        </p:txBody>
+      </p:sp>
+      <p:sp>
+        <p:nvSpPr>
+          <p:cNvPr id="6" name="Footer Placeholder 5"/>
+          <p:cNvSpPr>
+            <a:spLocks noGrp="1"/>
+          </p:cNvSpPr>
+          <p:nvPr>
+            <p:ph type="ftr" sz="quarter" idx="4"/>
+          </p:nvPr>
+        </p:nvSpPr>
+        <p:spPr>
+          <a:xfrm>
+            <a:off x="0" y="8685213"/>
+            <a:ext cx="2971800" cy="457200"/>
+          </a:xfrm>
+          <a:prstGeom prst="rect">
+            <a:avLst/>
+          </a:prstGeom>
+        </p:spPr>
+        <p:txBody>
+          <a:bodyPr vert="horz" lIns="91440" tIns="45720" rIns="91440" bIns="45720" rtlCol="0" anchor="b"/>
+          <a:lstStyle>
+            <a:lvl1pPr algn="l">
+              <a:defRPr sz="1200"/>
+            </a:lvl1pPr>
+          </a:lstStyle>
+          <a:p>
+            <a:endParaRPr lang="en-US"/>
+          </a:p>
+        </p:txBody>
+      </p:sp>
+      <p:sp>
+        <p:nvSpPr>
+          <p:cNvPr id="7" name="Slide Number Placeholder 6"/>
+          <p:cNvSpPr>
+            <a:spLocks noGrp="1"/>
+          </p:cNvSpPr>
+          <p:nvPr>
+            <p:ph type="sldNum" sz="quarter" idx="5"/>
+          </p:nvPr>
+        </p:nvSpPr>
+        <p:spPr>
+          <a:xfrm>
+            <a:off x="3884613" y="8685213"/>
+            <a:ext cx="2971800" cy="457200"/>
+          </a:xfrm>
+          <a:prstGeom prst="rect">
+            <a:avLst/>
+          </a:prstGeom>
+        </p:spPr>
+        <p:txBody>
+          <a:bodyPr vert="horz" lIns="91440" tIns="45720" rIns="91440" bIns="45720" rtlCol="0" anchor="b"/>
+          <a:lstStyle>
+            <a:lvl1pPr algn="r">
+              <a:defRPr sz="1200"/>
+            </a:lvl1pPr>
+          </a:lstStyle>
+          <a:p>
+            <a:fld id="{BB5E49A5-4136-284D-997B-48E1D791AD67}" type="slidenum">
+              <a:rPr lang="en-US" smtClean="0"/>
+              <a:t>‹#›</a:t>
+            </a:fld>
+            <a:endParaRPr lang="en-US"/>
+          </a:p>
+        </p:txBody>
+      </p:sp>
+    </p:spTree>
+    <p:extLst>
+      <p:ext uri="{BB962C8B-B14F-4D97-AF65-F5344CB8AC3E}">
+        <p14:creationId xmlns:p14="http://schemas.microsoft.com/office/powerpoint/2010/main" val="2623252185"/>
+      </p:ext>
+    </p:extLst>
+  </p:cSld>
+  <p:clrMap bg1="lt1" tx1="dk1" bg2="lt2" tx2="dk2" accent1="accent1" accent2="accent2" accent3="accent3" accent4="accent4" accent5="accent5" accent6="accent6" hlink="hlink" folHlink="folHlink"/>
+  <p:notesStyle>
+    <a:lvl1pPr marL="0" algn="l" defTabSz="457200" rtl="0" eaLnBrk="1" latinLnBrk="0" hangingPunct="1">
+      <a:defRPr sz="1200" kern="1200">
+        <a:solidFill>
+          <a:schemeClr val="tx1"/>
+        </a:solidFill>
+        <a:latin typeface="+mn-lt"/>
+        <a:ea typeface="+mn-ea"/>
+        <a:cs typeface="+mn-cs"/>
+      </a:defRPr>
+    </a:lvl1pPr>
+    <a:lvl2pPr marL="457200" algn="l" defTabSz="457200" rtl="0" eaLnBrk="1" latinLnBrk="0" hangingPunct="1">
+      <a:defRPr sz="1200" kern="1200">
+        <a:solidFill>
+          <a:schemeClr val="tx1"/>
+        </a:solidFill>
+        <a:latin typeface="+mn-lt"/>
+        <a:ea typeface="+mn-ea"/>
+        <a:cs typeface="+mn-cs"/>
+      </a:defRPr>
+    </a:lvl2pPr>
+    <a:lvl3pPr marL="914400" algn="l" defTabSz="457200" rtl="0" eaLnBrk="1" latinLnBrk="0" hangingPunct="1">
+      <a:defRPr sz="1200" kern="1200">
+        <a:solidFill>
+          <a:schemeClr val="tx1"/>
+        </a:solidFill>
+        <a:latin typeface="+mn-lt"/>
+        <a:ea typeface="+mn-ea"/>
+        <a:cs typeface="+mn-cs"/>
+      </a:defRPr>
+    </a:lvl3pPr>
+    <a:lvl4pPr marL="1371600" algn="l" defTabSz="457200" rtl="0" eaLnBrk="1" latinLnBrk="0" hangingPunct="1">
+      <a:defRPr sz="1200" kern="1200">
+        <a:solidFill>
+          <a:schemeClr val="tx1"/>
+        </a:solidFill>
+        <a:latin typeface="+mn-lt"/>
+        <a:ea typeface="+mn-ea"/>
+        <a:cs typeface="+mn-cs"/>
+      </a:defRPr>
+    </a:lvl4pPr>
+    <a:lvl5pPr marL="1828800" algn="l" defTabSz="457200" rtl="0" eaLnBrk="1" latinLnBrk="0" hangingPunct="1">
+      <a:defRPr sz="1200" kern="1200">
+        <a:solidFill>
+          <a:schemeClr val="tx1"/>
+        </a:solidFill>
+        <a:latin typeface="+mn-lt"/>
+        <a:ea typeface="+mn-ea"/>
+        <a:cs typeface="+mn-cs"/>
+      </a:defRPr>
+    </a:lvl5pPr>
+    <a:lvl6pPr marL="2286000" algn="l" defTabSz="457200" rtl="0" eaLnBrk="1" latinLnBrk="0" hangingPunct="1">
+      <a:defRPr sz="1200" kern="1200">
+        <a:solidFill>
+          <a:schemeClr val="tx1"/>
+        </a:solidFill>
+        <a:latin typeface="+mn-lt"/>
+        <a:ea typeface="+mn-ea"/>
+        <a:cs typeface="+mn-cs"/>
+      </a:defRPr>
+    </a:lvl6pPr>
+    <a:lvl7pPr marL="2743200" algn="l" defTabSz="457200" rtl="0" eaLnBrk="1" latinLnBrk="0" hangingPunct="1">
+      <a:defRPr sz="1200" kern="1200">
+        <a:solidFill>
+          <a:schemeClr val="tx1"/>
+        </a:solidFill>
+        <a:latin typeface="+mn-lt"/>
+        <a:ea typeface="+mn-ea"/>
+        <a:cs typeface="+mn-cs"/>
+      </a:defRPr>
+    </a:lvl7pPr>
+    <a:lvl8pPr marL="3200400" algn="l" defTabSz="457200" rtl="0" eaLnBrk="1" latinLnBrk="0" hangingPunct="1">
+      <a:defRPr sz="1200" kern="1200">
+        <a:solidFill>
+          <a:schemeClr val="tx1"/>
+        </a:solidFill>
+        <a:latin typeface="+mn-lt"/>
+        <a:ea typeface="+mn-ea"/>
+        <a:cs typeface="+mn-cs"/>
+      </a:defRPr>
+    </a:lvl8pPr>
+    <a:lvl9pPr marL="3657600" algn="l" defTabSz="457200" rtl="0" eaLnBrk="1" latinLnBrk="0" hangingPunct="1">
+      <a:defRPr sz="1200" kern="1200">
+        <a:solidFill>
+          <a:schemeClr val="tx1"/>
+        </a:solidFill>
+        <a:latin typeface="+mn-lt"/>
+        <a:ea typeface="+mn-ea"/>
+        <a:cs typeface="+mn-cs"/>
+      </a:defRPr>
+    </a:lvl9pPr>
+  </p:notesStyle>
+</p:notesMaster>
+</file>
+
+<file path=ppt/notesSlides/notesSlide1.xml><?xml version="1.0" encoding="utf-8"?>
+<p:notes xmlns:a="http://schemas.openxmlformats.org/drawingml/2006/main" xmlns:p="http://schemas.openxmlformats.org/presentationml/2006/main" xmlns:r="http://schemas.openxmlformats.org/officeDocument/2006/relationships">
+  <p:cSld>
+    <p:spTree>
+      <p:nvGrpSpPr>
+        <p:cNvPr id="1" name=""/>
+        <p:cNvGrpSpPr/>
+        <p:nvPr/>
+      </p:nvGrpSpPr>
+      <p:grpSpPr>
+        <a:xfrm>
+          <a:off x="0" y="0"/>
+          <a:ext cx="0" cy="0"/>
+          <a:chOff x="0" y="0"/>
+          <a:chExt cx="0" cy="0"/>
+        </a:xfrm>
+      </p:grpSpPr>
+      <p:sp>
+        <p:nvSpPr>
+          <p:cNvPr id="2" name="Slide Image Placeholder 1"/>
+          <p:cNvSpPr>
+            <a:spLocks noGrp="1"/>
+          </p:cNvSpPr>
+          <p:nvPr>
+            <p:ph type="sldImg" idx="2"/>
+          </p:nvPr>
+        </p:nvSpPr>
+        <p:spPr/>
+      </p:sp>
+      <p:sp>
+        <p:nvSpPr>
+          <p:cNvPr id="3" name="Notes Placeholder 2"/>
+          <p:cNvSpPr>
+            <a:spLocks noGrp="1"/>
+          </p:cNvSpPr>
+          <p:nvPr>
+            <p:ph type="body" idx="3" sz="quarter"/>
+          </p:nvPr>
+        </p:nvSpPr>
+        <p:spPr/>
+        <p:txBody>
+          <a:bodyPr/>
+          <a:lstStyle/>
+          <a:p>
+            <a:r>
+              <a:t>The map for the whole Topic — set the arc, don't teach content yet. This is AT3 Part B skills.</a:t>
+            </a:r>
+          </a:p>
+          <a:p>
+            <a:r>
+              <a:t>• Frame the two moves: in Topic 12 they DESIGNED the HA upgrade; today they IMPLEMENT it on the</a:t>
+            </a:r>
+          </a:p>
+          <a:p>
+            <a:r>
+              <a:t>  running baseline, then SIMULATE failures/resizes to PROVE it's fault tolerant.</a:t>
+            </a:r>
+          </a:p>
+          <a:p>
+            <a:r>
+              <a:t>• Read the pipeline out: build → demonstrate connectivity → simulate → compare to design →</a:t>
+            </a:r>
+          </a:p>
+          <a:p>
+            <a:r>
+              <a:t>  improve → document. Each phase maps to a section today (C1/C2/C3).</a:t>
+            </a:r>
+          </a:p>
+          <a:p>
+            <a:r>
+              <a:t>• Stress the mode split (last bullet): for the BUILD they watch the recorded demo then do it;</a:t>
+            </a:r>
+          </a:p>
+          <a:p>
+            <a:r>
+              <a:t>  the SIMULATIONS they drive themselves — no recorded "break it" demo exists.</a:t>
+            </a:r>
+          </a:p>
+          <a:p>
+            <a:r>
+              <a:t>Misconception to pre-empt: "designing it is the hard part; building is just clicking." No — the</a:t>
+            </a:r>
+          </a:p>
+          <a:p>
+            <a:r>
+              <a:t>proof is the point: an HA design isn't HA until a simulated failure shows it stays up.</a:t>
+            </a:r>
+          </a:p>
+          <a:p>
+            <a:r>
+              <a:t>Question to pose: "You designed for two AZs — how would you actually PROVE one AZ can fail and</a:t>
+            </a:r>
+          </a:p>
+          <a:p>
+            <a:r>
+              <a:t>Ledgerline keeps serving?" (surfaces the simulate-to-prove logic).</a:t>
+            </a:r>
+          </a:p>
+          <a:p>
+            <a:r>
+              <a:t>UoC/AT3 tie: this Topic develops the skills assessed in AT3 Part B (the implementation window +</a:t>
+            </a:r>
+          </a:p>
+          <a:p>
+            <a:r>
+              <a:t>the failure/resize simulations) — ICTCLD502 element 4 (+ 5.1).</a:t>
+            </a:r>
+          </a:p>
+        </p:txBody>
+      </p:sp>
+      <p:sp>
+        <p:nvSpPr>
+          <p:cNvPr id="4" name="Slide Number Placeholder 3"/>
+          <p:cNvSpPr>
+            <a:spLocks noGrp="1"/>
+          </p:cNvSpPr>
+          <p:nvPr>
+            <p:ph type="sldNum" idx="5" sz="quarter"/>
+          </p:nvPr>
+        </p:nvSpPr>
+        <p:spPr/>
+      </p:sp>
+    </p:spTree>
+  </p:cSld>
+  <p:clrMapOvr>
+    <a:masterClrMapping/>
+  </p:clrMapOvr>
+</p:notes>
+</file>
+
+<file path=ppt/notesSlides/notesSlide10.xml><?xml version="1.0" encoding="utf-8"?>
+<p:notes xmlns:a="http://schemas.openxmlformats.org/drawingml/2006/main" xmlns:p="http://schemas.openxmlformats.org/presentationml/2006/main" xmlns:r="http://schemas.openxmlformats.org/officeDocument/2006/relationships">
+  <p:cSld>
+    <p:spTree>
+      <p:nvGrpSpPr>
+        <p:cNvPr id="1" name=""/>
+        <p:cNvGrpSpPr/>
+        <p:nvPr/>
+      </p:nvGrpSpPr>
+      <p:grpSpPr>
+        <a:xfrm>
+          <a:off x="0" y="0"/>
+          <a:ext cx="0" cy="0"/>
+          <a:chOff x="0" y="0"/>
+          <a:chExt cx="0" cy="0"/>
+        </a:xfrm>
+      </p:grpSpPr>
+      <p:sp>
+        <p:nvSpPr>
+          <p:cNvPr id="2" name="Slide Image Placeholder 1"/>
+          <p:cNvSpPr>
+            <a:spLocks noGrp="1"/>
+          </p:cNvSpPr>
+          <p:nvPr>
+            <p:ph type="sldImg" idx="2"/>
+          </p:nvPr>
+        </p:nvSpPr>
+        <p:spPr/>
+      </p:sp>
+      <p:sp>
+        <p:nvSpPr>
+          <p:cNvPr id="3" name="Notes Placeholder 2"/>
+          <p:cNvSpPr>
+            <a:spLocks noGrp="1"/>
+          </p:cNvSpPr>
+          <p:nvPr>
+            <p:ph type="body" idx="3" sz="quarter"/>
+          </p:nvPr>
+        </p:nvSpPr>
+        <p:spPr/>
+        <p:txBody>
+          <a:bodyPr/>
+          <a:lstStyle/>
+          <a:p>
+            <a:r>
+              <a:t>The second half of C2 — resizing and load/stress, and their availability cost.</a:t>
+            </a:r>
+          </a:p>
+          <a:p>
+            <a:r>
+              <a:t>• Load testing — does it hold under the EXPECTED workload (e.g. Ledgerline's month-end peak)?</a:t>
+            </a:r>
+          </a:p>
+          <a:p>
+            <a:r>
+              <a:t>• Stress testing — where's the breaking point, and does it fail GRACEFULLY (queued/busy messages,</a:t>
+            </a:r>
+          </a:p>
+          <a:p>
+            <a:r>
+              <a:t>  data kept safe) rather than falling over?</a:t>
+            </a:r>
+          </a:p>
+          <a:p>
+            <a:r>
+              <a:t>• Accent-bold: resize a component and MEASURE the availability impact — vertical resizes often take</a:t>
+            </a:r>
+          </a:p>
+          <a:p>
+            <a:r>
+              <a:t>  a brief outage, and that trade-off must be recorded.</a:t>
+            </a:r>
+          </a:p>
+          <a:p>
+            <a:r>
+              <a:t>Misconception to pre-empt: "scaling up is free and instant." A vertical resize (bigger instance /</a:t>
+            </a:r>
+          </a:p>
+          <a:p>
+            <a:r>
+              <a:t>DB class) usually needs a restart or failover — a short availability hit; horizontal (ASG) avoids</a:t>
+            </a:r>
+          </a:p>
+          <a:p>
+            <a:r>
+              <a:t>it. Knowing which is which is the point.</a:t>
+            </a:r>
+          </a:p>
+          <a:p>
+            <a:r>
+              <a:t>Question to pose: "Month-end doubles the load — do you scale UP the instance or OUT with the ASG,</a:t>
+            </a:r>
+          </a:p>
+          <a:p>
+            <a:r>
+              <a:t>and what does each cost you in availability?" (out = no outage; up = a brief one).</a:t>
+            </a:r>
+          </a:p>
+          <a:p>
+            <a:r>
+              <a:t>UoC/AT3 tie: ICTCLD502 PC 4.5 (simulate resizing, measure availability impact) + ICTCLD401 PC 3.2</a:t>
+            </a:r>
+          </a:p>
+          <a:p>
+            <a:r>
+              <a:t>(test automatic scaling and fix errors, applied under load/resize) + KE 5 (testing/debugging).</a:t>
+            </a:r>
+          </a:p>
+        </p:txBody>
+      </p:sp>
+      <p:sp>
+        <p:nvSpPr>
+          <p:cNvPr id="4" name="Slide Number Placeholder 3"/>
+          <p:cNvSpPr>
+            <a:spLocks noGrp="1"/>
+          </p:cNvSpPr>
+          <p:nvPr>
+            <p:ph type="sldNum" idx="5" sz="quarter"/>
+          </p:nvPr>
+        </p:nvSpPr>
+        <p:spPr/>
+      </p:sp>
+    </p:spTree>
+  </p:cSld>
+  <p:clrMapOvr>
+    <a:masterClrMapping/>
+  </p:clrMapOvr>
+</p:notes>
+</file>
+
+<file path=ppt/notesSlides/notesSlide11.xml><?xml version="1.0" encoding="utf-8"?>
+<p:notes xmlns:a="http://schemas.openxmlformats.org/drawingml/2006/main" xmlns:p="http://schemas.openxmlformats.org/presentationml/2006/main" xmlns:r="http://schemas.openxmlformats.org/officeDocument/2006/relationships">
+  <p:cSld>
+    <p:spTree>
+      <p:nvGrpSpPr>
+        <p:cNvPr id="1" name=""/>
+        <p:cNvGrpSpPr/>
+        <p:nvPr/>
+      </p:nvGrpSpPr>
+      <p:grpSpPr>
+        <a:xfrm>
+          <a:off x="0" y="0"/>
+          <a:ext cx="0" cy="0"/>
+          <a:chOff x="0" y="0"/>
+          <a:chExt cx="0" cy="0"/>
+        </a:xfrm>
+      </p:grpSpPr>
+      <p:sp>
+        <p:nvSpPr>
+          <p:cNvPr id="2" name="Slide Image Placeholder 1"/>
+          <p:cNvSpPr>
+            <a:spLocks noGrp="1"/>
+          </p:cNvSpPr>
+          <p:nvPr>
+            <p:ph type="sldImg" idx="2"/>
+          </p:nvPr>
+        </p:nvSpPr>
+        <p:spPr/>
+      </p:sp>
+      <p:sp>
+        <p:nvSpPr>
+          <p:cNvPr id="3" name="Notes Placeholder 2"/>
+          <p:cNvSpPr>
+            <a:spLocks noGrp="1"/>
+          </p:cNvSpPr>
+          <p:nvPr>
+            <p:ph type="body" idx="3" sz="quarter"/>
+          </p:nvPr>
+        </p:nvSpPr>
+        <p:spPr/>
+        <p:txBody>
+          <a:bodyPr/>
+          <a:lstStyle/>
+          <a:p>
+            <a:r>
+              <a:t>Facilitation (C2 practice) — students run their own simulation plan against their hardened baseline.</a:t>
+            </a:r>
+          </a:p>
+          <a:p>
+            <a:r>
+              <a:t>Tell students, in these words: "With your monitoring on, work through your simulation plan. Break</a:t>
+            </a:r>
+          </a:p>
+          <a:p>
+            <a:r>
+              <a:t>the system on purpose, watch what happens, and record the availability impact of each with</a:t>
+            </a:r>
+          </a:p>
+          <a:p>
+            <a:r>
+              <a:t>evidence."</a:t>
+            </a:r>
+          </a:p>
+          <a:p>
+            <a:r>
+              <a:t>Steps (put on the board):</a:t>
+            </a:r>
+          </a:p>
+          <a:p>
+            <a:r>
+              <a:t>1. Fail an instance / an AZ — confirm the service stays up (fault tolerant).</a:t>
+            </a:r>
+          </a:p>
+          <a:p>
+            <a:r>
+              <a:t>2. Trigger a database failover, then fail back to the primary.</a:t>
+            </a:r>
+          </a:p>
+          <a:p>
+            <a:r>
+              <a:t>3. Resize a component under load and measure the availability impact.</a:t>
+            </a:r>
+          </a:p>
+          <a:p>
+            <a:r>
+              <a:t>Must produce: for each simulation, the measured availability impact (uptime/errors/latency before,</a:t>
+            </a:r>
+          </a:p>
+          <a:p>
+            <a:r>
+              <a:t>during, after) with screenshots/metrics as evidence.</a:t>
+            </a:r>
+          </a:p>
+          <a:p>
+            <a:r>
+              <a:t>Timing: ~30 min. Where they get stuck: forgetting to start monitoring BEFORE the failure (no</a:t>
+            </a:r>
+          </a:p>
+          <a:p>
+            <a:r>
+              <a:t>baseline to compare), and panicking when a resize causes a brief outage — that's expected, tell them</a:t>
+            </a:r>
+          </a:p>
+          <a:p>
+            <a:r>
+              <a:t>to record it, not fix it.</a:t>
+            </a:r>
+          </a:p>
+          <a:p>
+            <a:r>
+              <a:t>Share-back: take one measured result and ask "did the design hold?" — bridges into C3.</a:t>
+            </a:r>
+          </a:p>
+          <a:p>
+            <a:r>
+              <a:t>No-leakage note: simulations run on the Accounting baseline (practice); AT3 assesses the same on the</a:t>
+            </a:r>
+          </a:p>
+          <a:p>
+            <a:r>
+              <a:t>supplied LMS system — comparable, not identical.</a:t>
+            </a:r>
+          </a:p>
+        </p:txBody>
+      </p:sp>
+      <p:sp>
+        <p:nvSpPr>
+          <p:cNvPr id="4" name="Slide Number Placeholder 3"/>
+          <p:cNvSpPr>
+            <a:spLocks noGrp="1"/>
+          </p:cNvSpPr>
+          <p:nvPr>
+            <p:ph type="sldNum" idx="5" sz="quarter"/>
+          </p:nvPr>
+        </p:nvSpPr>
+        <p:spPr/>
+      </p:sp>
+    </p:spTree>
+  </p:cSld>
+  <p:clrMapOvr>
+    <a:masterClrMapping/>
+  </p:clrMapOvr>
+</p:notes>
+</file>
+
+<file path=ppt/notesSlides/notesSlide12.xml><?xml version="1.0" encoding="utf-8"?>
+<p:notes xmlns:a="http://schemas.openxmlformats.org/drawingml/2006/main" xmlns:p="http://schemas.openxmlformats.org/presentationml/2006/main" xmlns:r="http://schemas.openxmlformats.org/officeDocument/2006/relationships">
+  <p:cSld>
+    <p:spTree>
+      <p:nvGrpSpPr>
+        <p:cNvPr id="1" name=""/>
+        <p:cNvGrpSpPr/>
+        <p:nvPr/>
+      </p:nvGrpSpPr>
+      <p:grpSpPr>
+        <a:xfrm>
+          <a:off x="0" y="0"/>
+          <a:ext cx="0" cy="0"/>
+          <a:chOff x="0" y="0"/>
+          <a:chExt cx="0" cy="0"/>
+        </a:xfrm>
+      </p:grpSpPr>
+      <p:sp>
+        <p:nvSpPr>
+          <p:cNvPr id="2" name="Slide Image Placeholder 1"/>
+          <p:cNvSpPr>
+            <a:spLocks noGrp="1"/>
+          </p:cNvSpPr>
+          <p:nvPr>
+            <p:ph type="sldImg" idx="2"/>
+          </p:nvPr>
+        </p:nvSpPr>
+        <p:spPr/>
+      </p:sp>
+      <p:sp>
+        <p:nvSpPr>
+          <p:cNvPr id="3" name="Notes Placeholder 2"/>
+          <p:cNvSpPr>
+            <a:spLocks noGrp="1"/>
+          </p:cNvSpPr>
+          <p:nvPr>
+            <p:ph type="body" idx="3" sz="quarter"/>
+          </p:nvPr>
+        </p:nvSpPr>
+        <p:spPr/>
+        <p:txBody>
+          <a:bodyPr/>
+          <a:lstStyle/>
+          <a:p>
+            <a:r>
+              <a:t>Open C3 — turn the raw simulation results back against what the design PROMISED.</a:t>
+            </a:r>
+          </a:p>
+          <a:p>
+            <a:r>
+              <a:t>• Walk it: measure what the simulations showed against your documented recovery objectives (the</a:t>
+            </a:r>
+          </a:p>
+          <a:p>
+            <a:r>
+              <a:t>  RPO/RTO and SPOF fixes from Topic 12).</a:t>
+            </a:r>
+          </a:p>
+          <a:p>
+            <a:r>
+              <a:t>• Accent-bold: did the build meet its RPO/RTO? Did each single point of failure's fix actually hold</a:t>
+            </a:r>
+          </a:p>
+          <a:p>
+            <a:r>
+              <a:t>  under a real (simulated) failure?</a:t>
+            </a:r>
+          </a:p>
+          <a:p>
+            <a:r>
+              <a:t>• Last bullet: note any GAP between the design's intent and the simulated reality — that gap is what</a:t>
+            </a:r>
+          </a:p>
+          <a:p>
+            <a:r>
+              <a:t>  C3 acts on next.</a:t>
+            </a:r>
+          </a:p>
+          <a:p>
+            <a:r>
+              <a:t>Misconception to pre-empt: "the simulations passed, so we're done." Passing isn't the deliverable —</a:t>
+            </a:r>
+          </a:p>
+          <a:p>
+            <a:r>
+              <a:t>comparing measured behaviour to the stated objectives is; a build can survive yet miss its RTO.</a:t>
+            </a:r>
+          </a:p>
+          <a:p>
+            <a:r>
+              <a:t>Question to pose: "Your design promised recovery in under a minute — what did the simulation</a:t>
+            </a:r>
+          </a:p>
+          <a:p>
+            <a:r>
+              <a:t>actually measure, and did it meet the promise?" (forces objective-vs-reality comparison).</a:t>
+            </a:r>
+          </a:p>
+          <a:p>
+            <a:r>
+              <a:t>UoC/AT3 tie: ICTCLD502 PC 4.6 (compare and document simulation findings according to the documented</a:t>
+            </a:r>
+          </a:p>
+          <a:p>
+            <a:r>
+              <a:t>design) — the compare half of AT3 Part B's closing work.</a:t>
+            </a:r>
+          </a:p>
+        </p:txBody>
+      </p:sp>
+      <p:sp>
+        <p:nvSpPr>
+          <p:cNvPr id="4" name="Slide Number Placeholder 3"/>
+          <p:cNvSpPr>
+            <a:spLocks noGrp="1"/>
+          </p:cNvSpPr>
+          <p:nvPr>
+            <p:ph type="sldNum" idx="5" sz="quarter"/>
+          </p:nvPr>
+        </p:nvSpPr>
+        <p:spPr/>
+      </p:sp>
+    </p:spTree>
+  </p:cSld>
+  <p:clrMapOvr>
+    <a:masterClrMapping/>
+  </p:clrMapOvr>
+</p:notes>
+</file>
+
+<file path=ppt/notesSlides/notesSlide13.xml><?xml version="1.0" encoding="utf-8"?>
+<p:notes xmlns:a="http://schemas.openxmlformats.org/drawingml/2006/main" xmlns:p="http://schemas.openxmlformats.org/presentationml/2006/main" xmlns:r="http://schemas.openxmlformats.org/officeDocument/2006/relationships">
+  <p:cSld>
+    <p:spTree>
+      <p:nvGrpSpPr>
+        <p:cNvPr id="1" name=""/>
+        <p:cNvGrpSpPr/>
+        <p:nvPr/>
+      </p:nvGrpSpPr>
+      <p:grpSpPr>
+        <a:xfrm>
+          <a:off x="0" y="0"/>
+          <a:ext cx="0" cy="0"/>
+          <a:chOff x="0" y="0"/>
+          <a:chExt cx="0" cy="0"/>
+        </a:xfrm>
+      </p:grpSpPr>
+      <p:sp>
+        <p:nvSpPr>
+          <p:cNvPr id="2" name="Slide Image Placeholder 1"/>
+          <p:cNvSpPr>
+            <a:spLocks noGrp="1"/>
+          </p:cNvSpPr>
+          <p:nvPr>
+            <p:ph type="sldImg" idx="2"/>
+          </p:nvPr>
+        </p:nvSpPr>
+        <p:spPr/>
+      </p:sp>
+      <p:sp>
+        <p:nvSpPr>
+          <p:cNvPr id="3" name="Notes Placeholder 2"/>
+          <p:cNvSpPr>
+            <a:spLocks noGrp="1"/>
+          </p:cNvSpPr>
+          <p:nvPr>
+            <p:ph type="body" idx="3" sz="quarter"/>
+          </p:nvPr>
+        </p:nvSpPr>
+        <p:spPr/>
+        <p:txBody>
+          <a:bodyPr/>
+          <a:lstStyle/>
+          <a:p>
+            <a:r>
+              <a:t>The improve step of C3 — what to do when a simulation exposes a gap.</a:t>
+            </a:r>
+          </a:p>
+          <a:p>
+            <a:r>
+              <a:t>• The trigger: a simulation shows a prolonged outage or poor availability → adjust the design; don't</a:t>
+            </a:r>
+          </a:p>
+          <a:p>
+            <a:r>
+              <a:t>  leave a known weakness in.</a:t>
+            </a:r>
+          </a:p>
+          <a:p>
+            <a:r>
+              <a:t>• Walk the levers (sub-bullet): more redundancy · Multi-AZ · managed services with built-in HA ·</a:t>
+            </a:r>
+          </a:p>
+          <a:p>
+            <a:r>
+              <a:t>  monitoring with auto-triggered recovery.</a:t>
+            </a:r>
+          </a:p>
+          <a:p>
+            <a:r>
+              <a:t>• Accent-bold: make the change, then RE-TEST to confirm the improvement — an untested fix is just</a:t>
+            </a:r>
+          </a:p>
+          <a:p>
+            <a:r>
+              <a:t>  another claim (callback to "why simulate?").</a:t>
+            </a:r>
+          </a:p>
+          <a:p>
+            <a:r>
+              <a:t>Misconception to pre-empt: "note the gap in the report and move on." No — where a simulation reveals</a:t>
+            </a:r>
+          </a:p>
+          <a:p>
+            <a:r>
+              <a:t>a real weakness you adjust and re-simulate; the improvement only counts once re-tested.</a:t>
+            </a:r>
+          </a:p>
+          <a:p>
+            <a:r>
+              <a:t>Question to pose: "Your single NAT gateway took the private tier down when its AZ failed — what's</a:t>
+            </a:r>
+          </a:p>
+          <a:p>
+            <a:r>
+              <a:t>the fix, and how do you prove it worked this time?" (second NAT per AZ; re-run the AZ failure).</a:t>
+            </a:r>
+          </a:p>
+          <a:p>
+            <a:r>
+              <a:t>UoC/AT3 tie: ICTCLD502 PC 5.1 (adjust and improve availability according to simulations as</a:t>
+            </a:r>
+          </a:p>
+          <a:p>
+            <a:r>
+              <a:t>required).</a:t>
+            </a:r>
+          </a:p>
+        </p:txBody>
+      </p:sp>
+      <p:sp>
+        <p:nvSpPr>
+          <p:cNvPr id="4" name="Slide Number Placeholder 3"/>
+          <p:cNvSpPr>
+            <a:spLocks noGrp="1"/>
+          </p:cNvSpPr>
+          <p:nvPr>
+            <p:ph type="sldNum" idx="5" sz="quarter"/>
+          </p:nvPr>
+        </p:nvSpPr>
+        <p:spPr/>
+      </p:sp>
+    </p:spTree>
+  </p:cSld>
+  <p:clrMapOvr>
+    <a:masterClrMapping/>
+  </p:clrMapOvr>
+</p:notes>
+</file>
+
+<file path=ppt/notesSlides/notesSlide14.xml><?xml version="1.0" encoding="utf-8"?>
+<p:notes xmlns:a="http://schemas.openxmlformats.org/drawingml/2006/main" xmlns:p="http://schemas.openxmlformats.org/presentationml/2006/main" xmlns:r="http://schemas.openxmlformats.org/officeDocument/2006/relationships">
+  <p:cSld>
+    <p:spTree>
+      <p:nvGrpSpPr>
+        <p:cNvPr id="1" name=""/>
+        <p:cNvGrpSpPr/>
+        <p:nvPr/>
+      </p:nvGrpSpPr>
+      <p:grpSpPr>
+        <a:xfrm>
+          <a:off x="0" y="0"/>
+          <a:ext cx="0" cy="0"/>
+          <a:chOff x="0" y="0"/>
+          <a:chExt cx="0" cy="0"/>
+        </a:xfrm>
+      </p:grpSpPr>
+      <p:sp>
+        <p:nvSpPr>
+          <p:cNvPr id="2" name="Slide Image Placeholder 1"/>
+          <p:cNvSpPr>
+            <a:spLocks noGrp="1"/>
+          </p:cNvSpPr>
+          <p:nvPr>
+            <p:ph type="sldImg" idx="2"/>
+          </p:nvPr>
+        </p:nvSpPr>
+        <p:spPr/>
+      </p:sp>
+      <p:sp>
+        <p:nvSpPr>
+          <p:cNvPr id="3" name="Notes Placeholder 2"/>
+          <p:cNvSpPr>
+            <a:spLocks noGrp="1"/>
+          </p:cNvSpPr>
+          <p:nvPr>
+            <p:ph type="body" idx="3" sz="quarter"/>
+          </p:nvPr>
+        </p:nvSpPr>
+        <p:spPr/>
+        <p:txBody>
+          <a:bodyPr/>
+          <a:lstStyle/>
+          <a:p>
+            <a:r>
+              <a:t>Facilitation (C3 practice) — finalise the implementation and produce the documented findings.</a:t>
+            </a:r>
+          </a:p>
+          <a:p>
+            <a:r>
+              <a:t>Tell students, in these words: "Finalise your HA implementation. Compare your simulation findings</a:t>
+            </a:r>
+          </a:p>
+          <a:p>
+            <a:r>
+              <a:t>against your documented design, make any improvements the simulations call for and re-test, then</a:t>
+            </a:r>
+          </a:p>
+          <a:p>
+            <a:r>
+              <a:t>document the findings against the design — this is what feeds your HA Deployment Report."</a:t>
+            </a:r>
+          </a:p>
+          <a:p>
+            <a:r>
+              <a:t>Steps (put on the board):</a:t>
+            </a:r>
+          </a:p>
+          <a:p>
+            <a:r>
+              <a:t>1. Compare your simulation findings against your documented design's recovery objectives.</a:t>
+            </a:r>
+          </a:p>
+          <a:p>
+            <a:r>
+              <a:t>2. Make any improvements the simulations call for, and RE-TEST them.</a:t>
+            </a:r>
+          </a:p>
+          <a:p>
+            <a:r>
+              <a:t>3. Document the findings against the design (what met the objective, what you changed and why).</a:t>
+            </a:r>
+          </a:p>
+          <a:p>
+            <a:r>
+              <a:t>Must produce: a written findings-vs-design comparison plus any re-tested improvements — the raw</a:t>
+            </a:r>
+          </a:p>
+          <a:p>
+            <a:r>
+              <a:t>material for the Topic 14 HA Deployment Report.</a:t>
+            </a:r>
+          </a:p>
+          <a:p>
+            <a:r>
+              <a:t>Timing: ~20 min. Where they get stuck: documenting only what passed and hiding the gaps — remind</a:t>
+            </a:r>
+          </a:p>
+          <a:p>
+            <a:r>
+              <a:t>them the gaps + fixes are the strongest evidence, not a weakness to bury.</a:t>
+            </a:r>
+          </a:p>
+          <a:p>
+            <a:r>
+              <a:t>Share-back: ask one student for a gap they found and the improvement they made.</a:t>
+            </a:r>
+          </a:p>
+          <a:p>
+            <a:r>
+              <a:t>No-leakage note: this finalises the Accounting-baseline practice; AT3 assesses the same on the</a:t>
+            </a:r>
+          </a:p>
+          <a:p>
+            <a:r>
+              <a:t>supplied LMS system — comparable, not identical. Closure (the report, feedback, sign-off) is Topic 14.</a:t>
+            </a:r>
+          </a:p>
+        </p:txBody>
+      </p:sp>
+      <p:sp>
+        <p:nvSpPr>
+          <p:cNvPr id="4" name="Slide Number Placeholder 3"/>
+          <p:cNvSpPr>
+            <a:spLocks noGrp="1"/>
+          </p:cNvSpPr>
+          <p:nvPr>
+            <p:ph type="sldNum" idx="5" sz="quarter"/>
+          </p:nvPr>
+        </p:nvSpPr>
+        <p:spPr/>
+      </p:sp>
+    </p:spTree>
+  </p:cSld>
+  <p:clrMapOvr>
+    <a:masterClrMapping/>
+  </p:clrMapOvr>
+</p:notes>
+</file>
+
+<file path=ppt/notesSlides/notesSlide2.xml><?xml version="1.0" encoding="utf-8"?>
+<p:notes xmlns:a="http://schemas.openxmlformats.org/drawingml/2006/main" xmlns:p="http://schemas.openxmlformats.org/presentationml/2006/main" xmlns:r="http://schemas.openxmlformats.org/officeDocument/2006/relationships">
+  <p:cSld>
+    <p:spTree>
+      <p:nvGrpSpPr>
+        <p:cNvPr id="1" name=""/>
+        <p:cNvGrpSpPr/>
+        <p:nvPr/>
+      </p:nvGrpSpPr>
+      <p:grpSpPr>
+        <a:xfrm>
+          <a:off x="0" y="0"/>
+          <a:ext cx="0" cy="0"/>
+          <a:chOff x="0" y="0"/>
+          <a:chExt cx="0" cy="0"/>
+        </a:xfrm>
+      </p:grpSpPr>
+      <p:sp>
+        <p:nvSpPr>
+          <p:cNvPr id="2" name="Slide Image Placeholder 1"/>
+          <p:cNvSpPr>
+            <a:spLocks noGrp="1"/>
+          </p:cNvSpPr>
+          <p:nvPr>
+            <p:ph type="sldImg" idx="2"/>
+          </p:nvPr>
+        </p:nvSpPr>
+        <p:spPr/>
+      </p:sp>
+      <p:sp>
+        <p:nvSpPr>
+          <p:cNvPr id="3" name="Notes Placeholder 2"/>
+          <p:cNvSpPr>
+            <a:spLocks noGrp="1"/>
+          </p:cNvSpPr>
+          <p:nvPr>
+            <p:ph type="body" idx="3" sz="quarter"/>
+          </p:nvPr>
+        </p:nvSpPr>
+        <p:spPr/>
+        <p:txBody>
+          <a:bodyPr/>
+          <a:lstStyle/>
+          <a:p>
+            <a:r>
+              <a:t>Open C1 — the three ways to roll out a change, so they can place in-place HA hardening correctly.</a:t>
+            </a:r>
+          </a:p>
+          <a:p>
+            <a:r>
+              <a:t>• Walk the three: big-bang/cutover (switch all at once — fastest, highest risk); incremental</a:t>
+            </a:r>
+          </a:p>
+          <a:p>
+            <a:r>
+              <a:t>  (phase it in — easier to adapt/troubleshoot, slower); parallel (run old + new together — safest</a:t>
+            </a:r>
+          </a:p>
+          <a:p>
+            <a:r>
+              <a:t>  fall-back, highest cost).</a:t>
+            </a:r>
+          </a:p>
+          <a:p>
+            <a:r>
+              <a:t>• Land the accent-bold line: in-place HA hardening IS incremental — you add redundancy WITHOUT</a:t>
+            </a:r>
+          </a:p>
+          <a:p>
+            <a:r>
+              <a:t>  taking the service down. That's why it fits a live accounting system.</a:t>
+            </a:r>
+          </a:p>
+          <a:p>
+            <a:r>
+              <a:t>Misconception to pre-empt: "adding HA means a maintenance outage / rebuild from scratch." No — you</a:t>
+            </a:r>
+          </a:p>
+          <a:p>
+            <a:r>
+              <a:t>harden in place, service stays up; that's the whole appeal of the incremental approach here.</a:t>
+            </a:r>
+          </a:p>
+          <a:p>
+            <a:r>
+              <a:t>Question to pose: "Ledgerline is used every business day — which approach lets you add a second AZ</a:t>
+            </a:r>
+          </a:p>
+          <a:p>
+            <a:r>
+              <a:t>without an outage, and why not big-bang?" (incremental; big-bang risks the live service).</a:t>
+            </a:r>
+          </a:p>
+          <a:p>
+            <a:r>
+              <a:t>UoC/AT3 tie: ICTCLD502 PC 4.1 (implement the architecture design) — the how-you-roll-it-out choice</a:t>
+            </a:r>
+          </a:p>
+          <a:p>
+            <a:r>
+              <a:t>that AT3 Part B's implementation window assumes.</a:t>
+            </a:r>
+          </a:p>
+        </p:txBody>
+      </p:sp>
+      <p:sp>
+        <p:nvSpPr>
+          <p:cNvPr id="4" name="Slide Number Placeholder 3"/>
+          <p:cNvSpPr>
+            <a:spLocks noGrp="1"/>
+          </p:cNvSpPr>
+          <p:nvPr>
+            <p:ph type="sldNum" idx="5" sz="quarter"/>
+          </p:nvPr>
+        </p:nvSpPr>
+        <p:spPr/>
+      </p:sp>
+    </p:spTree>
+  </p:cSld>
+  <p:clrMapOvr>
+    <a:masterClrMapping/>
+  </p:clrMapOvr>
+</p:notes>
+</file>
+
+<file path=ppt/notesSlides/notesSlide3.xml><?xml version="1.0" encoding="utf-8"?>
+<p:notes xmlns:a="http://schemas.openxmlformats.org/drawingml/2006/main" xmlns:p="http://schemas.openxmlformats.org/presentationml/2006/main" xmlns:r="http://schemas.openxmlformats.org/officeDocument/2006/relationships">
+  <p:cSld>
+    <p:spTree>
+      <p:nvGrpSpPr>
+        <p:cNvPr id="1" name=""/>
+        <p:cNvGrpSpPr/>
+        <p:nvPr/>
+      </p:nvGrpSpPr>
+      <p:grpSpPr>
+        <a:xfrm>
+          <a:off x="0" y="0"/>
+          <a:ext cx="0" cy="0"/>
+          <a:chOff x="0" y="0"/>
+          <a:chExt cx="0" cy="0"/>
+        </a:xfrm>
+      </p:grpSpPr>
+      <p:sp>
+        <p:nvSpPr>
+          <p:cNvPr id="2" name="Slide Image Placeholder 1"/>
+          <p:cNvSpPr>
+            <a:spLocks noGrp="1"/>
+          </p:cNvSpPr>
+          <p:nvPr>
+            <p:ph type="sldImg" idx="2"/>
+          </p:nvPr>
+        </p:nvSpPr>
+        <p:spPr/>
+      </p:sp>
+      <p:sp>
+        <p:nvSpPr>
+          <p:cNvPr id="3" name="Notes Placeholder 2"/>
+          <p:cNvSpPr>
+            <a:spLocks noGrp="1"/>
+          </p:cNvSpPr>
+          <p:nvPr>
+            <p:ph type="body" idx="3" sz="quarter"/>
+          </p:nvPr>
+        </p:nvSpPr>
+        <p:spPr/>
+        <p:txBody>
+          <a:bodyPr/>
+          <a:lstStyle/>
+          <a:p>
+            <a:r>
+              <a:t>Short but load-bearing — the quality bar for the implementation, not just "make it work."</a:t>
+            </a:r>
+          </a:p>
+          <a:p>
+            <a:r>
+              <a:t>• Deploy with scripts (infrastructure as code) — repeatable, documented, fewer manual errors than</a:t>
+            </a:r>
+          </a:p>
+          <a:p>
+            <a:r>
+              <a:t>  clicking. Callback to their AT2 build habits.</a:t>
+            </a:r>
+          </a:p>
+          <a:p>
+            <a:r>
+              <a:t>• Right-size with the Auto Scaling group rather than guessing capacity — the ASG sets the size to</a:t>
+            </a:r>
+          </a:p>
+          <a:p>
+            <a:r>
+              <a:t>  demand, so you don't over- or under-provision.</a:t>
+            </a:r>
+          </a:p>
+          <a:p>
+            <a:r>
+              <a:t>• Automate security + monitoring (accent-bold): IAM, CloudWatch, alarms — bake it in as you build,</a:t>
+            </a:r>
+          </a:p>
+          <a:p>
+            <a:r>
+              <a:t>  not bolted on after.</a:t>
+            </a:r>
+          </a:p>
+          <a:p>
+            <a:r>
+              <a:t>Misconception to pre-empt: "a working build is a good build." A build can function yet be fragile,</a:t>
+            </a:r>
+          </a:p>
+          <a:p>
+            <a:r>
+              <a:t>undocumented and un-monitored — you can't prove availability you never instrumented.</a:t>
+            </a:r>
+          </a:p>
+          <a:p>
+            <a:r>
+              <a:t>Question to pose: "If you had to rebuild this HA layer next week, what makes IaC better than</a:t>
+            </a:r>
+          </a:p>
+          <a:p>
+            <a:r>
+              <a:t>repeating the clicks?" (repeatable, documented, fewer errors).</a:t>
+            </a:r>
+          </a:p>
+          <a:p>
+            <a:r>
+              <a:t>UoC/AT3 tie: ICTCLD502 PE 2 (deploy automated scaling) + PE 4 (use console/SDK/CLI) — the build</a:t>
+            </a:r>
+          </a:p>
+          <a:p>
+            <a:r>
+              <a:t>quality AT3 Part B is evidenced against.</a:t>
+            </a:r>
+          </a:p>
+        </p:txBody>
+      </p:sp>
+      <p:sp>
+        <p:nvSpPr>
+          <p:cNvPr id="4" name="Slide Number Placeholder 3"/>
+          <p:cNvSpPr>
+            <a:spLocks noGrp="1"/>
+          </p:cNvSpPr>
+          <p:nvPr>
+            <p:ph type="sldNum" idx="5" sz="quarter"/>
+          </p:nvPr>
+        </p:nvSpPr>
+        <p:spPr/>
+      </p:sp>
+    </p:spTree>
+  </p:cSld>
+  <p:clrMapOvr>
+    <a:masterClrMapping/>
+  </p:clrMapOvr>
+</p:notes>
+</file>
+
+<file path=ppt/notesSlides/notesSlide4.xml><?xml version="1.0" encoding="utf-8"?>
+<p:notes xmlns:a="http://schemas.openxmlformats.org/drawingml/2006/main" xmlns:p="http://schemas.openxmlformats.org/presentationml/2006/main" xmlns:r="http://schemas.openxmlformats.org/officeDocument/2006/relationships">
+  <p:cSld>
+    <p:spTree>
+      <p:nvGrpSpPr>
+        <p:cNvPr id="1" name=""/>
+        <p:cNvGrpSpPr/>
+        <p:nvPr/>
+      </p:nvGrpSpPr>
+      <p:grpSpPr>
+        <a:xfrm>
+          <a:off x="0" y="0"/>
+          <a:ext cx="0" cy="0"/>
+          <a:chOff x="0" y="0"/>
+          <a:chExt cx="0" cy="0"/>
+        </a:xfrm>
+      </p:grpSpPr>
+      <p:sp>
+        <p:nvSpPr>
+          <p:cNvPr id="2" name="Slide Image Placeholder 1"/>
+          <p:cNvSpPr>
+            <a:spLocks noGrp="1"/>
+          </p:cNvSpPr>
+          <p:nvPr>
+            <p:ph type="sldImg" idx="2"/>
+          </p:nvPr>
+        </p:nvSpPr>
+        <p:spPr/>
+      </p:sp>
+      <p:sp>
+        <p:nvSpPr>
+          <p:cNvPr id="3" name="Notes Placeholder 2"/>
+          <p:cNvSpPr>
+            <a:spLocks noGrp="1"/>
+          </p:cNvSpPr>
+          <p:nvPr>
+            <p:ph type="body" idx="3" sz="quarter"/>
+          </p:nvPr>
+        </p:nvSpPr>
+        <p:spPr/>
+        <p:txBody>
+          <a:bodyPr/>
+          <a:lstStyle/>
+          <a:p>
+            <a:r>
+              <a:t>The evidence step of C1 — teach that a build isn't done until you've PROVEN each tier talks to the</a:t>
+            </a:r>
+          </a:p>
+          <a:p>
+            <a:r>
+              <a:t>right thing and only the right thing.</a:t>
+            </a:r>
+          </a:p>
+          <a:p>
+            <a:r>
+              <a:t>• Walk the sub-bullet: client → application; application → database; and the database reachable ONLY</a:t>
+            </a:r>
+          </a:p>
+          <a:p>
+            <a:r>
+              <a:t>  from the app tier — connectivity AND isolation, both matter.</a:t>
+            </a:r>
+          </a:p>
+          <a:p>
+            <a:r>
+              <a:t>• Land the accent-bold line: confirm failover works AND that you can fail back to the primary — a</a:t>
+            </a:r>
+          </a:p>
+          <a:p>
+            <a:r>
+              <a:t>  failover you can't reverse isn't finished.</a:t>
+            </a:r>
+          </a:p>
+          <a:p>
+            <a:r>
+              <a:t>• Last bullet is the teaching point: this is the evidence the build is CORRECT, not merely present.</a:t>
+            </a:r>
+          </a:p>
+          <a:p>
+            <a:r>
+              <a:t>Misconception to pre-empt: "if the app loads, connectivity is fine." No — you must show the DB is</a:t>
+            </a:r>
+          </a:p>
+          <a:p>
+            <a:r>
+              <a:t>NOT reachable from the internet, and that failover/fail-back both work; "it loads" proves neither.</a:t>
+            </a:r>
+          </a:p>
+          <a:p>
+            <a:r>
+              <a:t>Question to pose: "How would you show an assessor the database can't be reached except from the app</a:t>
+            </a:r>
+          </a:p>
+          <a:p>
+            <a:r>
+              <a:t>tier?" (test from the app tier vs from outside; show the SG/route).</a:t>
+            </a:r>
+          </a:p>
+          <a:p>
+            <a:r>
+              <a:t>UoC/AT3 tie: ICTCLD502 PC 4.2 (demonstrate connectivity between resources at all tiers) — captured</a:t>
+            </a:r>
+          </a:p>
+          <a:p>
+            <a:r>
+              <a:t>as AT3 Part B evidence.</a:t>
+            </a:r>
+          </a:p>
+        </p:txBody>
+      </p:sp>
+      <p:sp>
+        <p:nvSpPr>
+          <p:cNvPr id="4" name="Slide Number Placeholder 3"/>
+          <p:cNvSpPr>
+            <a:spLocks noGrp="1"/>
+          </p:cNvSpPr>
+          <p:nvPr>
+            <p:ph type="sldNum" idx="5" sz="quarter"/>
+          </p:nvPr>
+        </p:nvSpPr>
+        <p:spPr/>
+      </p:sp>
+    </p:spTree>
+  </p:cSld>
+  <p:clrMapOvr>
+    <a:masterClrMapping/>
+  </p:clrMapOvr>
+</p:notes>
+</file>
+
+<file path=ppt/notesSlides/notesSlide5.xml><?xml version="1.0" encoding="utf-8"?>
+<p:notes xmlns:a="http://schemas.openxmlformats.org/drawingml/2006/main" xmlns:p="http://schemas.openxmlformats.org/presentationml/2006/main" xmlns:r="http://schemas.openxmlformats.org/officeDocument/2006/relationships">
+  <p:cSld>
+    <p:spTree>
+      <p:nvGrpSpPr>
+        <p:cNvPr id="1" name=""/>
+        <p:cNvGrpSpPr/>
+        <p:nvPr/>
+      </p:nvGrpSpPr>
+      <p:grpSpPr>
+        <a:xfrm>
+          <a:off x="0" y="0"/>
+          <a:ext cx="0" cy="0"/>
+          <a:chOff x="0" y="0"/>
+          <a:chExt cx="0" cy="0"/>
+        </a:xfrm>
+      </p:grpSpPr>
+      <p:sp>
+        <p:nvSpPr>
+          <p:cNvPr id="2" name="Slide Image Placeholder 1"/>
+          <p:cNvSpPr>
+            <a:spLocks noGrp="1"/>
+          </p:cNvSpPr>
+          <p:nvPr>
+            <p:ph type="sldImg" idx="2"/>
+          </p:nvPr>
+        </p:nvSpPr>
+        <p:spPr/>
+      </p:sp>
+      <p:sp>
+        <p:nvSpPr>
+          <p:cNvPr id="3" name="Notes Placeholder 2"/>
+          <p:cNvSpPr>
+            <a:spLocks noGrp="1"/>
+          </p:cNvSpPr>
+          <p:nvPr>
+            <p:ph type="body" idx="3" sz="quarter"/>
+          </p:nvPr>
+        </p:nvSpPr>
+        <p:spPr/>
+        <p:txBody>
+          <a:bodyPr/>
+          <a:lstStyle/>
+          <a:p>
+            <a:r>
+              <a:t>DEMONSTRATION slide (C1). This is the "demonstrate" step of teach → demonstrate → practice for the</a:t>
+            </a:r>
+          </a:p>
+          <a:p>
+            <a:r>
+              <a:t>HA build — screen the recorded demo, then relate every step to OUR Accounting baseline.</a:t>
+            </a:r>
+          </a:p>
+          <a:p/>
+          <a:p>
+            <a:r>
+              <a:t>WHERE TO FIND THE RECORDED DEMO: AWS Academy Cloud Architecting (ACA) → Module 10 → slide 44,</a:t>
+            </a:r>
+          </a:p>
+          <a:p>
+            <a:r>
+              <a:t>"Demo: Creating a Highly Available Application", inside the ACA M10 instructor deck</a:t>
+            </a:r>
+          </a:p>
+          <a:p>
+            <a:r>
+              <a:t>(original-materials/AWS-Instructor Presentations/…). Instructor-facing — screen it in class, do not</a:t>
+            </a:r>
+          </a:p>
+          <a:p>
+            <a:r>
+              <a:t>distribute to students. Preview it before class and cue it to this slide.</a:t>
+            </a:r>
+          </a:p>
+          <a:p/>
+          <a:p>
+            <a:r>
+              <a:t>WHAT TO DEMONSTRATE (follow the recorded demo, then map to our build):</a:t>
+            </a:r>
+          </a:p>
+          <a:p>
+            <a:r>
+              <a:t>1. Create an Auto Scaling group spread across TWO Availability Zones, behind a load balancer.</a:t>
+            </a:r>
+          </a:p>
+          <a:p>
+            <a:r>
+              <a:t>2. Add a Multi-AZ database with an automatic-failover standby.</a:t>
+            </a:r>
+          </a:p>
+          <a:p>
+            <a:r>
+              <a:t>3. Confirm the load balancer routes only to HEALTHY targets across both AZs.</a:t>
+            </a:r>
+          </a:p>
+          <a:p/>
+          <a:p>
+            <a:r>
+              <a:t>WHAT TO EMPHASISE:</a:t>
+            </a:r>
+          </a:p>
+          <a:p>
+            <a:r>
+              <a:t>• The redundancy is across AZs — two AZs is what survives a data-centre failure (callback Topic 11).</a:t>
+            </a:r>
+          </a:p>
+          <a:p>
+            <a:r>
+              <a:t>• Multi-AZ RDS = automatic failover to a standby; students confuse this with a read replica — it's HA.</a:t>
+            </a:r>
+          </a:p>
+          <a:p>
+            <a:r>
+              <a:t>• Health checks: the ALB only sends traffic to healthy targets — that's what makes failover invisible.</a:t>
+            </a:r>
+          </a:p>
+          <a:p>
+            <a:r>
+              <a:t>• Narrate evidence capture — they screenshot as they build for AT3; model it here.</a:t>
+            </a:r>
+          </a:p>
+          <a:p/>
+          <a:p>
+            <a:r>
+              <a:t>PREP: clean Learner Lab open (deploy us-east-1), their Topic 12 HA design handy, demo queued.</a:t>
+            </a:r>
+          </a:p>
+          <a:p>
+            <a:r>
+              <a:t>~8–10 min to screen + narrate before the activity.</a:t>
+            </a:r>
+          </a:p>
+        </p:txBody>
+      </p:sp>
+      <p:sp>
+        <p:nvSpPr>
+          <p:cNvPr id="4" name="Slide Number Placeholder 3"/>
+          <p:cNvSpPr>
+            <a:spLocks noGrp="1"/>
+          </p:cNvSpPr>
+          <p:nvPr>
+            <p:ph type="sldNum" idx="5" sz="quarter"/>
+          </p:nvPr>
+        </p:nvSpPr>
+        <p:spPr/>
+      </p:sp>
+    </p:spTree>
+  </p:cSld>
+  <p:clrMapOvr>
+    <a:masterClrMapping/>
+  </p:clrMapOvr>
+</p:notes>
+</file>
+
+<file path=ppt/notesSlides/notesSlide6.xml><?xml version="1.0" encoding="utf-8"?>
+<p:notes xmlns:a="http://schemas.openxmlformats.org/drawingml/2006/main" xmlns:p="http://schemas.openxmlformats.org/presentationml/2006/main" xmlns:r="http://schemas.openxmlformats.org/officeDocument/2006/relationships">
+  <p:cSld>
+    <p:spTree>
+      <p:nvGrpSpPr>
+        <p:cNvPr id="1" name=""/>
+        <p:cNvGrpSpPr/>
+        <p:nvPr/>
+      </p:nvGrpSpPr>
+      <p:grpSpPr>
+        <a:xfrm>
+          <a:off x="0" y="0"/>
+          <a:ext cx="0" cy="0"/>
+          <a:chOff x="0" y="0"/>
+          <a:chExt cx="0" cy="0"/>
+        </a:xfrm>
+      </p:grpSpPr>
+      <p:sp>
+        <p:nvSpPr>
+          <p:cNvPr id="2" name="Slide Image Placeholder 1"/>
+          <p:cNvSpPr>
+            <a:spLocks noGrp="1"/>
+          </p:cNvSpPr>
+          <p:nvPr>
+            <p:ph type="sldImg" idx="2"/>
+          </p:nvPr>
+        </p:nvSpPr>
+        <p:spPr/>
+      </p:sp>
+      <p:sp>
+        <p:nvSpPr>
+          <p:cNvPr id="3" name="Notes Placeholder 2"/>
+          <p:cNvSpPr>
+            <a:spLocks noGrp="1"/>
+          </p:cNvSpPr>
+          <p:nvPr>
+            <p:ph type="body" idx="3" sz="quarter"/>
+          </p:nvPr>
+        </p:nvSpPr>
+        <p:spPr/>
+        <p:txBody>
+          <a:bodyPr/>
+          <a:lstStyle/>
+          <a:p>
+            <a:r>
+              <a:t>Facilitation (C1 practice) — students implement THEIR OWN Topic 12 design on the running baseline.</a:t>
+            </a:r>
+          </a:p>
+          <a:p>
+            <a:r>
+              <a:t>Tell students, in these words: "Open the lab and your Topic 12 HA design. On the running Accounting</a:t>
+            </a:r>
+          </a:p>
+          <a:p>
+            <a:r>
+              <a:t>baseline, implement your hardening exactly as your design specifies — then prove connectivity at</a:t>
+            </a:r>
+          </a:p>
+          <a:p>
+            <a:r>
+              <a:t>every tier and capture the evidence as you go."</a:t>
+            </a:r>
+          </a:p>
+          <a:p>
+            <a:r>
+              <a:t>Steps (put on the board):</a:t>
+            </a:r>
+          </a:p>
+          <a:p>
+            <a:r>
+              <a:t>1. Add the second AZ + mirrored subnets; extend the ASG and ALB across both AZs.</a:t>
+            </a:r>
+          </a:p>
+          <a:p>
+            <a:r>
+              <a:t>2. Convert the database to Multi-AZ; add the second NAT gateway.</a:t>
+            </a:r>
+          </a:p>
+          <a:p>
+            <a:r>
+              <a:t>3. Demonstrate connectivity at all tiers (client→app, app→db, DB isolated), and failover/fail-back.</a:t>
+            </a:r>
+          </a:p>
+          <a:p>
+            <a:r>
+              <a:t>4. Capture the named evidence screenshots as you build each piece.</a:t>
+            </a:r>
+          </a:p>
+          <a:p>
+            <a:r>
+              <a:t>Must produce: the hardened baseline running across two AZs, plus connectivity/failover evidence.</a:t>
+            </a:r>
+          </a:p>
+          <a:p>
+            <a:r>
+              <a:t>Timing: ~30 min. Where they get stuck: forgetting the SECOND NAT gateway (breaks HA for the private</a:t>
+            </a:r>
+          </a:p>
+          <a:p>
+            <a:r>
+              <a:t>subnet), and impatience with Multi-AZ conversion (it takes minutes) — circulate and reassure.</a:t>
+            </a:r>
+          </a:p>
+          <a:p>
+            <a:r>
+              <a:t>Share-back: ask one student to show failover working, then failing back.</a:t>
+            </a:r>
+          </a:p>
+          <a:p>
+            <a:r>
+              <a:t>No-leakage note: this practice uses the Accounting/Ledgerline baseline; AT3 assesses the same skill</a:t>
+            </a:r>
+          </a:p>
+          <a:p>
+            <a:r>
+              <a:t>on a DIFFERENT supplied system (the LMS) — comparable, not identical.</a:t>
+            </a:r>
+          </a:p>
+        </p:txBody>
+      </p:sp>
+      <p:sp>
+        <p:nvSpPr>
+          <p:cNvPr id="4" name="Slide Number Placeholder 3"/>
+          <p:cNvSpPr>
+            <a:spLocks noGrp="1"/>
+          </p:cNvSpPr>
+          <p:nvPr>
+            <p:ph type="sldNum" idx="5" sz="quarter"/>
+          </p:nvPr>
+        </p:nvSpPr>
+        <p:spPr/>
+      </p:sp>
+    </p:spTree>
+  </p:cSld>
+  <p:clrMapOvr>
+    <a:masterClrMapping/>
+  </p:clrMapOvr>
+</p:notes>
+</file>
+
+<file path=ppt/notesSlides/notesSlide7.xml><?xml version="1.0" encoding="utf-8"?>
+<p:notes xmlns:a="http://schemas.openxmlformats.org/drawingml/2006/main" xmlns:p="http://schemas.openxmlformats.org/presentationml/2006/main" xmlns:r="http://schemas.openxmlformats.org/officeDocument/2006/relationships">
+  <p:cSld>
+    <p:spTree>
+      <p:nvGrpSpPr>
+        <p:cNvPr id="1" name=""/>
+        <p:cNvGrpSpPr/>
+        <p:nvPr/>
+      </p:nvGrpSpPr>
+      <p:grpSpPr>
+        <a:xfrm>
+          <a:off x="0" y="0"/>
+          <a:ext cx="0" cy="0"/>
+          <a:chOff x="0" y="0"/>
+          <a:chExt cx="0" cy="0"/>
+        </a:xfrm>
+      </p:grpSpPr>
+      <p:sp>
+        <p:nvSpPr>
+          <p:cNvPr id="2" name="Slide Image Placeholder 1"/>
+          <p:cNvSpPr>
+            <a:spLocks noGrp="1"/>
+          </p:cNvSpPr>
+          <p:nvPr>
+            <p:ph type="sldImg" idx="2"/>
+          </p:nvPr>
+        </p:nvSpPr>
+        <p:spPr/>
+      </p:sp>
+      <p:sp>
+        <p:nvSpPr>
+          <p:cNvPr id="3" name="Notes Placeholder 2"/>
+          <p:cNvSpPr>
+            <a:spLocks noGrp="1"/>
+          </p:cNvSpPr>
+          <p:nvPr>
+            <p:ph type="body" idx="3" sz="quarter"/>
+          </p:nvPr>
+        </p:nvSpPr>
+        <p:spPr/>
+        <p:txBody>
+          <a:bodyPr/>
+          <a:lstStyle/>
+          <a:p>
+            <a:r>
+              <a:t>Open C2 — establish WHY you deliberately break a working system. The mindset shift of the section.</a:t>
+            </a:r>
+          </a:p>
+          <a:p>
+            <a:r>
+              <a:t>• The one-liner (say it first): an untested backup plan isn't a plan.</a:t>
+            </a:r>
+          </a:p>
+          <a:p>
+            <a:r>
+              <a:t>• Use the accent-bold Delta 2016 story: failed equipment exposed a backup that had NEVER been tested</a:t>
+            </a:r>
+          </a:p>
+          <a:p>
+            <a:r>
+              <a:t>  — about US$100 million. A real, memorable cost of assuming HA works.</a:t>
+            </a:r>
+          </a:p>
+          <a:p>
+            <a:r>
+              <a:t>• Land the point: you simulate failures to CONFIRM every part of the HA design actually works —</a:t>
+            </a:r>
+          </a:p>
+          <a:p>
+            <a:r>
+              <a:t>  before a real failure does the testing for you.</a:t>
+            </a:r>
+          </a:p>
+          <a:p>
+            <a:r>
+              <a:t>Misconception to pre-empt: "we built redundancy, so it's fault tolerant." Redundancy on paper isn't</a:t>
+            </a:r>
+          </a:p>
+          <a:p>
+            <a:r>
+              <a:t>proof — until a failure is simulated and the service stays up, HA is a claim, not a fact.</a:t>
+            </a:r>
+          </a:p>
+          <a:p>
+            <a:r>
+              <a:t>Question to pose: "Would you tell YAT's board 'it'll fail over fine' without ever having failed it</a:t>
+            </a:r>
+          </a:p>
+          <a:p>
+            <a:r>
+              <a:t>over?" (draws out that proof, not confidence, is the deliverable).</a:t>
+            </a:r>
+          </a:p>
+          <a:p>
+            <a:r>
+              <a:t>UoC/AT3 tie: sets up ICTCLD502 PC 4.3–4.4 and PE 3 (simulate failures, demonstrate fault tolerance)</a:t>
+            </a:r>
+          </a:p>
+          <a:p>
+            <a:r>
+              <a:t>— the core of AT3 Part B's simulation window.</a:t>
+            </a:r>
+          </a:p>
+        </p:txBody>
+      </p:sp>
+      <p:sp>
+        <p:nvSpPr>
+          <p:cNvPr id="4" name="Slide Number Placeholder 3"/>
+          <p:cNvSpPr>
+            <a:spLocks noGrp="1"/>
+          </p:cNvSpPr>
+          <p:nvPr>
+            <p:ph type="sldNum" idx="5" sz="quarter"/>
+          </p:nvPr>
+        </p:nvSpPr>
+        <p:spPr/>
+      </p:sp>
+    </p:spTree>
+  </p:cSld>
+  <p:clrMapOvr>
+    <a:masterClrMapping/>
+  </p:clrMapOvr>
+</p:notes>
+</file>
+
+<file path=ppt/notesSlides/notesSlide8.xml><?xml version="1.0" encoding="utf-8"?>
+<p:notes xmlns:a="http://schemas.openxmlformats.org/drawingml/2006/main" xmlns:p="http://schemas.openxmlformats.org/presentationml/2006/main" xmlns:r="http://schemas.openxmlformats.org/officeDocument/2006/relationships">
+  <p:cSld>
+    <p:spTree>
+      <p:nvGrpSpPr>
+        <p:cNvPr id="1" name=""/>
+        <p:cNvGrpSpPr/>
+        <p:nvPr/>
+      </p:nvGrpSpPr>
+      <p:grpSpPr>
+        <a:xfrm>
+          <a:off x="0" y="0"/>
+          <a:ext cx="0" cy="0"/>
+          <a:chOff x="0" y="0"/>
+          <a:chExt cx="0" cy="0"/>
+        </a:xfrm>
+      </p:grpSpPr>
+      <p:sp>
+        <p:nvSpPr>
+          <p:cNvPr id="2" name="Slide Image Placeholder 1"/>
+          <p:cNvSpPr>
+            <a:spLocks noGrp="1"/>
+          </p:cNvSpPr>
+          <p:nvPr>
+            <p:ph type="sldImg" idx="2"/>
+          </p:nvPr>
+        </p:nvSpPr>
+        <p:spPr/>
+      </p:sp>
+      <p:sp>
+        <p:nvSpPr>
+          <p:cNvPr id="3" name="Notes Placeholder 2"/>
+          <p:cNvSpPr>
+            <a:spLocks noGrp="1"/>
+          </p:cNvSpPr>
+          <p:nvPr>
+            <p:ph type="body" idx="3" sz="quarter"/>
+          </p:nvPr>
+        </p:nvSpPr>
+        <p:spPr/>
+        <p:txBody>
+          <a:bodyPr/>
+          <a:lstStyle/>
+          <a:p>
+            <a:r>
+              <a:t>The measurement discipline for C2 — you can't prove availability you didn't measure.</a:t>
+            </a:r>
+          </a:p>
+          <a:p>
+            <a:r>
+              <a:t>• Walk it: watch uptime, errors and latency THROUGHOUT the simulation — not just a before/after</a:t>
+            </a:r>
+          </a:p>
+          <a:p>
+            <a:r>
+              <a:t>  glance.</a:t>
+            </a:r>
+          </a:p>
+          <a:p>
+            <a:r>
+              <a:t>• Name the tools: CloudWatch metrics + alarms, and the AWS Health Dashboard (callback to their AT2</a:t>
+            </a:r>
+          </a:p>
+          <a:p>
+            <a:r>
+              <a:t>  monitoring build).</a:t>
+            </a:r>
+          </a:p>
+          <a:p>
+            <a:r>
+              <a:t>• Accent-bold: record the numbers BEFORE, DURING and AFTER each simulated failure — the delta is the</a:t>
+            </a:r>
+          </a:p>
+          <a:p>
+            <a:r>
+              <a:t>  evidence of the availability impact.</a:t>
+            </a:r>
+          </a:p>
+          <a:p>
+            <a:r>
+              <a:t>Misconception to pre-empt: "if it stayed up, that's enough." No — AT3 wants the measured impact</a:t>
+            </a:r>
+          </a:p>
+          <a:p>
+            <a:r>
+              <a:t>(how long, how many errors, what latency); "it seemed fine" isn't evidence.</a:t>
+            </a:r>
+          </a:p>
+          <a:p>
+            <a:r>
+              <a:t>Question to pose: "When you terminate an instance, what exactly do you watch to show users weren't</a:t>
+            </a:r>
+          </a:p>
+          <a:p>
+            <a:r>
+              <a:t>affected?" (target health, error rate, latency across the failover).</a:t>
+            </a:r>
+          </a:p>
+          <a:p>
+            <a:r>
+              <a:t>UoC/AT3 tie: ICTCLD502 PC 4.3 + PE 5 (define, monitor and record resource availability) + KE 6/9</a:t>
+            </a:r>
+          </a:p>
+          <a:p>
+            <a:r>
+              <a:t>(measuring availability impact; performance metrics).</a:t>
+            </a:r>
+          </a:p>
+        </p:txBody>
+      </p:sp>
+      <p:sp>
+        <p:nvSpPr>
+          <p:cNvPr id="4" name="Slide Number Placeholder 3"/>
+          <p:cNvSpPr>
+            <a:spLocks noGrp="1"/>
+          </p:cNvSpPr>
+          <p:nvPr>
+            <p:ph type="sldNum" idx="5" sz="quarter"/>
+          </p:nvPr>
+        </p:nvSpPr>
+        <p:spPr/>
+      </p:sp>
+    </p:spTree>
+  </p:cSld>
+  <p:clrMapOvr>
+    <a:masterClrMapping/>
+  </p:clrMapOvr>
+</p:notes>
+</file>
+
+<file path=ppt/notesSlides/notesSlide9.xml><?xml version="1.0" encoding="utf-8"?>
+<p:notes xmlns:a="http://schemas.openxmlformats.org/drawingml/2006/main" xmlns:p="http://schemas.openxmlformats.org/presentationml/2006/main" xmlns:r="http://schemas.openxmlformats.org/officeDocument/2006/relationships">
+  <p:cSld>
+    <p:spTree>
+      <p:nvGrpSpPr>
+        <p:cNvPr id="1" name=""/>
+        <p:cNvGrpSpPr/>
+        <p:nvPr/>
+      </p:nvGrpSpPr>
+      <p:grpSpPr>
+        <a:xfrm>
+          <a:off x="0" y="0"/>
+          <a:ext cx="0" cy="0"/>
+          <a:chOff x="0" y="0"/>
+          <a:chExt cx="0" cy="0"/>
+        </a:xfrm>
+      </p:grpSpPr>
+      <p:sp>
+        <p:nvSpPr>
+          <p:cNvPr id="2" name="Slide Image Placeholder 1"/>
+          <p:cNvSpPr>
+            <a:spLocks noGrp="1"/>
+          </p:cNvSpPr>
+          <p:nvPr>
+            <p:ph type="sldImg" idx="2"/>
+          </p:nvPr>
+        </p:nvSpPr>
+        <p:spPr/>
+      </p:sp>
+      <p:sp>
+        <p:nvSpPr>
+          <p:cNvPr id="3" name="Notes Placeholder 2"/>
+          <p:cNvSpPr>
+            <a:spLocks noGrp="1"/>
+          </p:cNvSpPr>
+          <p:nvPr>
+            <p:ph type="body" idx="3" sz="quarter"/>
+          </p:nvPr>
+        </p:nvSpPr>
+        <p:spPr/>
+        <p:txBody>
+          <a:bodyPr/>
+          <a:lstStyle/>
+          <a:p>
+            <a:r>
+              <a:t>The heart of C2 — teach the failure injections and what "fault tolerant" looks like when it works.</a:t>
+            </a:r>
+          </a:p>
+          <a:p>
+            <a:r>
+              <a:t>• Disable assets — terminate an instance, or take down an AZ's resources; watch the ASG/Multi-AZ</a:t>
+            </a:r>
+          </a:p>
+          <a:p>
+            <a:r>
+              <a:t>  replace or fail over.</a:t>
+            </a:r>
+          </a:p>
+          <a:p>
+            <a:r>
+              <a:t>• Network disruption — block traffic to a subnet, simulating a partition.</a:t>
+            </a:r>
+          </a:p>
+          <a:p>
+            <a:r>
+              <a:t>• Accent-bold: confirm the system fails over to the redundant assets and KEEPS SERVING — that is</a:t>
+            </a:r>
+          </a:p>
+          <a:p>
+            <a:r>
+              <a:t>  fault tolerance PROVEN, the exact thing AT3 wants evidenced.</a:t>
+            </a:r>
+          </a:p>
+          <a:p>
+            <a:r>
+              <a:t>Misconception to pre-empt: "simulate = just imagine/describe the failure." No — they actually inject</a:t>
+            </a:r>
+          </a:p>
+          <a:p>
+            <a:r>
+              <a:t>the failure in the lab (terminate, block) and observe the real behaviour; a written thought</a:t>
+            </a:r>
+          </a:p>
+          <a:p>
+            <a:r>
+              <a:t>experiment isn't a simulation.</a:t>
+            </a:r>
+          </a:p>
+          <a:p>
+            <a:r>
+              <a:t>Question to pose: "You kill the instance in AZ-A — walk me through what SHOULD happen, and how you'd</a:t>
+            </a:r>
+          </a:p>
+          <a:p>
+            <a:r>
+              <a:t>see it did?" (ALB drops the unhealthy target, ASG launches a replacement, service continues).</a:t>
+            </a:r>
+          </a:p>
+          <a:p>
+            <a:r>
+              <a:t>UoC/AT3 tie: ICTCLD502 PC 4.4 + PE 1/PE 3 (simulate component failures, confirm fault tolerant,</a:t>
+            </a:r>
+          </a:p>
+          <a:p>
+            <a:r>
+              <a:t>resilient to networking/compute/storage/database/data-centre failures).</a:t>
+            </a:r>
+          </a:p>
+        </p:txBody>
+      </p:sp>
+      <p:sp>
+        <p:nvSpPr>
+          <p:cNvPr id="4" name="Slide Number Placeholder 3"/>
+          <p:cNvSpPr>
+            <a:spLocks noGrp="1"/>
+          </p:cNvSpPr>
+          <p:nvPr>
+            <p:ph type="sldNum" idx="5" sz="quarter"/>
+          </p:nvPr>
+        </p:nvSpPr>
+        <p:spPr/>
+      </p:sp>
+    </p:spTree>
+  </p:cSld>
+  <p:clrMapOvr>
+    <a:masterClrMapping/>
+  </p:clrMapOvr>
+</p:notes>
 </file>
 
 <file path=ppt/slideLayouts/slideLayout1.xml><?xml version="1.0" encoding="utf-8"?>
@@ -13473,4 +15692,324 @@
   </a:objectDefaults>
   <a:extraClrSchemeLst/>
 </a:theme>
+</file>
+
+<file path=ppt/theme/theme2.xml><?xml version="1.0" encoding="utf-8"?>
+<a:theme xmlns:a="http://schemas.openxmlformats.org/drawingml/2006/main" name="Office Theme">
+  <a:themeElements>
+    <a:clrScheme name="Office">
+      <a:dk1>
+        <a:sysClr val="windowText" lastClr="000000"/>
+      </a:dk1>
+      <a:lt1>
+        <a:sysClr val="window" lastClr="FFFFFF"/>
+      </a:lt1>
+      <a:dk2>
+        <a:srgbClr val="1F497D"/>
+      </a:dk2>
+      <a:lt2>
+        <a:srgbClr val="EEECE1"/>
+      </a:lt2>
+      <a:accent1>
+        <a:srgbClr val="4F81BD"/>
+      </a:accent1>
+      <a:accent2>
+        <a:srgbClr val="C0504D"/>
+      </a:accent2>
+      <a:accent3>
+        <a:srgbClr val="9BBB59"/>
+      </a:accent3>
+      <a:accent4>
+        <a:srgbClr val="8064A2"/>
+      </a:accent4>
+      <a:accent5>
+        <a:srgbClr val="4BACC6"/>
+      </a:accent5>
+      <a:accent6>
+        <a:srgbClr val="F79646"/>
+      </a:accent6>
+      <a:hlink>
+        <a:srgbClr val="0000FF"/>
+      </a:hlink>
+      <a:folHlink>
+        <a:srgbClr val="800080"/>
+      </a:folHlink>
+    </a:clrScheme>
+    <a:fontScheme name="Office">
+      <a:majorFont>
+        <a:latin typeface="Calibri"/>
+        <a:ea typeface=""/>
+        <a:cs typeface=""/>
+        <a:font script="Jpan" typeface="ＭＳ Ｐゴシック"/>
+        <a:font script="Hang" typeface="맑은 고딕"/>
+        <a:font script="Hans" typeface="宋体"/>
+        <a:font script="Hant" typeface="新細明體"/>
+        <a:font script="Arab" typeface="Times New Roman"/>
+        <a:font script="Hebr" typeface="Times New Roman"/>
+        <a:font script="Thai" typeface="Angsana New"/>
+        <a:font script="Ethi" typeface="Nyala"/>
+        <a:font script="Beng" typeface="Vrinda"/>
+        <a:font script="Gujr" typeface="Shruti"/>
+        <a:font script="Khmr" typeface="MoolBoran"/>
+        <a:font script="Knda" typeface="Tunga"/>
+        <a:font script="Guru" typeface="Raavi"/>
+        <a:font script="Cans" typeface="Euphemia"/>
+        <a:font script="Cher" typeface="Plantagenet Cherokee"/>
+        <a:font script="Yiii" typeface="Microsoft Yi Baiti"/>
+        <a:font script="Tibt" typeface="Microsoft Himalaya"/>
+        <a:font script="Thaa" typeface="MV Boli"/>
+        <a:font script="Deva" typeface="Mangal"/>
+        <a:font script="Telu" typeface="Gautami"/>
+        <a:font script="Taml" typeface="Latha"/>
+        <a:font script="Syrc" typeface="Estrangelo Edessa"/>
+        <a:font script="Orya" typeface="Kalinga"/>
+        <a:font script="Mlym" typeface="Kartika"/>
+        <a:font script="Laoo" typeface="DokChampa"/>
+        <a:font script="Sinh" typeface="Iskoola Pota"/>
+        <a:font script="Mong" typeface="Mongolian Baiti"/>
+        <a:font script="Viet" typeface="Times New Roman"/>
+        <a:font script="Uigh" typeface="Microsoft Uighur"/>
+        <a:font script="Geor" typeface="Sylfaen"/>
+      </a:majorFont>
+      <a:minorFont>
+        <a:latin typeface="Calibri"/>
+        <a:ea typeface=""/>
+        <a:cs typeface=""/>
+        <a:font script="Jpan" typeface="ＭＳ Ｐゴシック"/>
+        <a:font script="Hang" typeface="맑은 고딕"/>
+        <a:font script="Hans" typeface="宋体"/>
+        <a:font script="Hant" typeface="新細明體"/>
+        <a:font script="Arab" typeface="Arial"/>
+        <a:font script="Hebr" typeface="Arial"/>
+        <a:font script="Thai" typeface="Cordia New"/>
+        <a:font script="Ethi" typeface="Nyala"/>
+        <a:font script="Beng" typeface="Vrinda"/>
+        <a:font script="Gujr" typeface="Shruti"/>
+        <a:font script="Khmr" typeface="DaunPenh"/>
+        <a:font script="Knda" typeface="Tunga"/>
+        <a:font script="Guru" typeface="Raavi"/>
+        <a:font script="Cans" typeface="Euphemia"/>
+        <a:font script="Cher" typeface="Plantagenet Cherokee"/>
+        <a:font script="Yiii" typeface="Microsoft Yi Baiti"/>
+        <a:font script="Tibt" typeface="Microsoft Himalaya"/>
+        <a:font script="Thaa" typeface="MV Boli"/>
+        <a:font script="Deva" typeface="Mangal"/>
+        <a:font script="Telu" typeface="Gautami"/>
+        <a:font script="Taml" typeface="Latha"/>
+        <a:font script="Syrc" typeface="Estrangelo Edessa"/>
+        <a:font script="Orya" typeface="Kalinga"/>
+        <a:font script="Mlym" typeface="Kartika"/>
+        <a:font script="Laoo" typeface="DokChampa"/>
+        <a:font script="Sinh" typeface="Iskoola Pota"/>
+        <a:font script="Mong" typeface="Mongolian Baiti"/>
+        <a:font script="Viet" typeface="Arial"/>
+        <a:font script="Uigh" typeface="Microsoft Uighur"/>
+        <a:font script="Geor" typeface="Sylfaen"/>
+      </a:minorFont>
+    </a:fontScheme>
+    <a:fmtScheme name="Office">
+      <a:fillStyleLst>
+        <a:solidFill>
+          <a:schemeClr val="phClr"/>
+        </a:solidFill>
+        <a:gradFill rotWithShape="1">
+          <a:gsLst>
+            <a:gs pos="0">
+              <a:schemeClr val="phClr">
+                <a:tint val="50000"/>
+                <a:satMod val="300000"/>
+              </a:schemeClr>
+            </a:gs>
+            <a:gs pos="35000">
+              <a:schemeClr val="phClr">
+                <a:tint val="37000"/>
+                <a:satMod val="300000"/>
+              </a:schemeClr>
+            </a:gs>
+            <a:gs pos="100000">
+              <a:schemeClr val="phClr">
+                <a:tint val="15000"/>
+                <a:satMod val="350000"/>
+              </a:schemeClr>
+            </a:gs>
+          </a:gsLst>
+          <a:lin ang="16200000" scaled="1"/>
+        </a:gradFill>
+        <a:gradFill rotWithShape="1">
+          <a:gsLst>
+            <a:gs pos="0">
+              <a:schemeClr val="phClr">
+                <a:tint val="100000"/>
+                <a:shade val="100000"/>
+                <a:satMod val="130000"/>
+              </a:schemeClr>
+            </a:gs>
+            <a:gs pos="100000">
+              <a:schemeClr val="phClr">
+                <a:tint val="50000"/>
+                <a:shade val="100000"/>
+                <a:satMod val="350000"/>
+              </a:schemeClr>
+            </a:gs>
+          </a:gsLst>
+          <a:lin ang="16200000" scaled="0"/>
+        </a:gradFill>
+      </a:fillStyleLst>
+      <a:lnStyleLst>
+        <a:ln w="9525" cap="flat" cmpd="sng" algn="ctr">
+          <a:solidFill>
+            <a:schemeClr val="phClr">
+              <a:shade val="95000"/>
+              <a:satMod val="105000"/>
+            </a:schemeClr>
+          </a:solidFill>
+          <a:prstDash val="solid"/>
+        </a:ln>
+        <a:ln w="25400" cap="flat" cmpd="sng" algn="ctr">
+          <a:solidFill>
+            <a:schemeClr val="phClr"/>
+          </a:solidFill>
+          <a:prstDash val="solid"/>
+        </a:ln>
+        <a:ln w="38100" cap="flat" cmpd="sng" algn="ctr">
+          <a:solidFill>
+            <a:schemeClr val="phClr"/>
+          </a:solidFill>
+          <a:prstDash val="solid"/>
+        </a:ln>
+      </a:lnStyleLst>
+      <a:effectStyleLst>
+        <a:effectStyle>
+          <a:effectLst>
+            <a:outerShdw blurRad="40000" dist="20000" dir="5400000" rotWithShape="0">
+              <a:srgbClr val="000000">
+                <a:alpha val="38000"/>
+              </a:srgbClr>
+            </a:outerShdw>
+          </a:effectLst>
+        </a:effectStyle>
+        <a:effectStyle>
+          <a:effectLst>
+            <a:outerShdw blurRad="40000" dist="23000" dir="5400000" rotWithShape="0">
+              <a:srgbClr val="000000">
+                <a:alpha val="35000"/>
+              </a:srgbClr>
+            </a:outerShdw>
+          </a:effectLst>
+        </a:effectStyle>
+        <a:effectStyle>
+          <a:effectLst>
+            <a:outerShdw blurRad="40000" dist="23000" dir="5400000" rotWithShape="0">
+              <a:srgbClr val="000000">
+                <a:alpha val="35000"/>
+              </a:srgbClr>
+            </a:outerShdw>
+          </a:effectLst>
+          <a:scene3d>
+            <a:camera prst="orthographicFront">
+              <a:rot lat="0" lon="0" rev="0"/>
+            </a:camera>
+            <a:lightRig rig="threePt" dir="t">
+              <a:rot lat="0" lon="0" rev="1200000"/>
+            </a:lightRig>
+          </a:scene3d>
+          <a:sp3d>
+            <a:bevelT w="63500" h="25400"/>
+          </a:sp3d>
+        </a:effectStyle>
+      </a:effectStyleLst>
+      <a:bgFillStyleLst>
+        <a:solidFill>
+          <a:schemeClr val="phClr"/>
+        </a:solidFill>
+        <a:gradFill rotWithShape="1">
+          <a:gsLst>
+            <a:gs pos="0">
+              <a:schemeClr val="phClr">
+                <a:tint val="40000"/>
+                <a:satMod val="350000"/>
+              </a:schemeClr>
+            </a:gs>
+            <a:gs pos="40000">
+              <a:schemeClr val="phClr">
+                <a:tint val="45000"/>
+                <a:shade val="99000"/>
+                <a:satMod val="350000"/>
+              </a:schemeClr>
+            </a:gs>
+            <a:gs pos="100000">
+              <a:schemeClr val="phClr">
+                <a:shade val="20000"/>
+                <a:satMod val="255000"/>
+              </a:schemeClr>
+            </a:gs>
+          </a:gsLst>
+          <a:path path="circle">
+            <a:fillToRect l="50000" t="-80000" r="50000" b="180000"/>
+          </a:path>
+        </a:gradFill>
+        <a:gradFill rotWithShape="1">
+          <a:gsLst>
+            <a:gs pos="0">
+              <a:schemeClr val="phClr">
+                <a:tint val="80000"/>
+                <a:satMod val="300000"/>
+              </a:schemeClr>
+            </a:gs>
+            <a:gs pos="100000">
+              <a:schemeClr val="phClr">
+                <a:shade val="30000"/>
+                <a:satMod val="200000"/>
+              </a:schemeClr>
+            </a:gs>
+          </a:gsLst>
+          <a:path path="circle">
+            <a:fillToRect l="50000" t="50000" r="50000" b="50000"/>
+          </a:path>
+        </a:gradFill>
+      </a:bgFillStyleLst>
+    </a:fmtScheme>
+  </a:themeElements>
+  <a:objectDefaults>
+    <a:spDef>
+      <a:spPr/>
+      <a:bodyPr/>
+      <a:lstStyle/>
+      <a:style>
+        <a:lnRef idx="1">
+          <a:schemeClr val="accent1"/>
+        </a:lnRef>
+        <a:fillRef idx="3">
+          <a:schemeClr val="accent1"/>
+        </a:fillRef>
+        <a:effectRef idx="2">
+          <a:schemeClr val="accent1"/>
+        </a:effectRef>
+        <a:fontRef idx="minor">
+          <a:schemeClr val="lt1"/>
+        </a:fontRef>
+      </a:style>
+    </a:spDef>
+    <a:lnDef>
+      <a:spPr/>
+      <a:bodyPr/>
+      <a:lstStyle/>
+      <a:style>
+        <a:lnRef idx="2">
+          <a:schemeClr val="accent1"/>
+        </a:lnRef>
+        <a:fillRef idx="0">
+          <a:schemeClr val="accent1"/>
+        </a:fillRef>
+        <a:effectRef idx="1">
+          <a:schemeClr val="accent1"/>
+        </a:effectRef>
+        <a:fontRef idx="minor">
+          <a:schemeClr val="tx1"/>
+        </a:fontRef>
+      </a:style>
+    </a:lnDef>
+  </a:objectDefaults>
+  <a:extraClrSchemeLst/>
+</a:theme>
 </file>
--- a/S1-CL1-Cloud-Design-Build/delivery/topic_13/Topic_13_Slides.pptx
+++ b/S1-CL1-Cloud-Design-Build/delivery/topic_13/Topic_13_Slides.pptx
@@ -534,7 +534,7 @@
           </a:p>
           <a:p>
             <a:r>
-              <a:t>  running baseline, then SIMULATE failures/resizes to PROVE it's fault tolerant.</a:t>
+              <a:t>running baseline, then SIMULATE failures/resizes to PROVE it's fault tolerant.</a:t>
             </a:r>
           </a:p>
           <a:p>
@@ -544,7 +544,7 @@
           </a:p>
           <a:p>
             <a:r>
-              <a:t>  improve → document. Each phase maps to a section today (C1/C2/C3).</a:t>
+              <a:t>improve → document. Each phase maps to a section today (C1/C2/C3).</a:t>
             </a:r>
           </a:p>
           <a:p>
@@ -554,7 +554,7 @@
           </a:p>
           <a:p>
             <a:r>
-              <a:t>  the SIMULATIONS they drive themselves — no recorded "break it" demo exists.</a:t>
+              <a:t>the SIMULATIONS they drive themselves — no recorded "break it" demo exists.</a:t>
             </a:r>
           </a:p>
           <a:p>
@@ -669,7 +669,7 @@
           </a:p>
           <a:p>
             <a:r>
-              <a:t>  data kept safe) rather than falling over?</a:t>
+              <a:t>data kept safe) rather than falling over?</a:t>
             </a:r>
           </a:p>
           <a:p>
@@ -679,7 +679,7 @@
           </a:p>
           <a:p>
             <a:r>
-              <a:t>  a brief outage, and that trade-off must be recorded.</a:t>
+              <a:t>a brief outage, and that trade-off must be recorded.</a:t>
             </a:r>
           </a:p>
           <a:p>
@@ -939,7 +939,7 @@
           </a:p>
           <a:p>
             <a:r>
-              <a:t>  RPO/RTO and SPOF fixes from Topic 12).</a:t>
+              <a:t>RPO/RTO and SPOF fixes from Topic 12).</a:t>
             </a:r>
           </a:p>
           <a:p>
@@ -949,7 +949,7 @@
           </a:p>
           <a:p>
             <a:r>
-              <a:t>  under a real (simulated) failure?</a:t>
+              <a:t>under a real (simulated) failure?</a:t>
             </a:r>
           </a:p>
           <a:p>
@@ -959,7 +959,7 @@
           </a:p>
           <a:p>
             <a:r>
-              <a:t>  C3 acts on next.</a:t>
+              <a:t>C3 acts on next.</a:t>
             </a:r>
           </a:p>
           <a:p>
@@ -1069,7 +1069,7 @@
           </a:p>
           <a:p>
             <a:r>
-              <a:t>  leave a known weakness in.</a:t>
+              <a:t>leave a known weakness in.</a:t>
             </a:r>
           </a:p>
           <a:p>
@@ -1079,7 +1079,7 @@
           </a:p>
           <a:p>
             <a:r>
-              <a:t>  monitoring with auto-triggered recovery.</a:t>
+              <a:t>monitoring with auto-triggered recovery.</a:t>
             </a:r>
           </a:p>
           <a:p>
@@ -1089,7 +1089,7 @@
           </a:p>
           <a:p>
             <a:r>
-              <a:t>  another claim (callback to "why simulate?").</a:t>
+              <a:t>another claim (callback to "why simulate?").</a:t>
             </a:r>
           </a:p>
           <a:p>
@@ -1339,12 +1339,12 @@
           </a:p>
           <a:p>
             <a:r>
-              <a:t>  (phase it in — easier to adapt/troubleshoot, slower); parallel (run old + new together — safest</a:t>
-            </a:r>
-          </a:p>
-          <a:p>
-            <a:r>
-              <a:t>  fall-back, highest cost).</a:t>
+              <a:t>(phase it in — easier to adapt/troubleshoot, slower); parallel (run old + new together — safest</a:t>
+            </a:r>
+          </a:p>
+          <a:p>
+            <a:r>
+              <a:t>fall-back, highest cost).</a:t>
             </a:r>
           </a:p>
           <a:p>
@@ -1354,7 +1354,7 @@
           </a:p>
           <a:p>
             <a:r>
-              <a:t>  taking the service down. That's why it fits a live accounting system.</a:t>
+              <a:t>taking the service down. That's why it fits a live accounting system.</a:t>
             </a:r>
           </a:p>
           <a:p>
@@ -1464,7 +1464,7 @@
           </a:p>
           <a:p>
             <a:r>
-              <a:t>  clicking. Callback to their AT2 build habits.</a:t>
+              <a:t>clicking. Callback to their AT2 build habits.</a:t>
             </a:r>
           </a:p>
           <a:p>
@@ -1474,7 +1474,7 @@
           </a:p>
           <a:p>
             <a:r>
-              <a:t>  demand, so you don't over- or under-provision.</a:t>
+              <a:t>demand, so you don't over- or under-provision.</a:t>
             </a:r>
           </a:p>
           <a:p>
@@ -1484,7 +1484,7 @@
           </a:p>
           <a:p>
             <a:r>
-              <a:t>  not bolted on after.</a:t>
+              <a:t>not bolted on after.</a:t>
             </a:r>
           </a:p>
           <a:p>
@@ -1599,7 +1599,7 @@
           </a:p>
           <a:p>
             <a:r>
-              <a:t>  from the app tier — connectivity AND isolation, both matter.</a:t>
+              <a:t>from the app tier — connectivity AND isolation, both matter.</a:t>
             </a:r>
           </a:p>
           <a:p>
@@ -1609,7 +1609,7 @@
           </a:p>
           <a:p>
             <a:r>
-              <a:t>  failover you can't reverse isn't finished.</a:t>
+              <a:t>failover you can't reverse isn't finished.</a:t>
             </a:r>
           </a:p>
           <a:p>
@@ -2023,7 +2023,7 @@
           </a:p>
           <a:p>
             <a:r>
-              <a:t>  — about US$100 million. A real, memorable cost of assuming HA works.</a:t>
+              <a:t>— about US$100 million. A real, memorable cost of assuming HA works.</a:t>
             </a:r>
           </a:p>
           <a:p>
@@ -2033,7 +2033,7 @@
           </a:p>
           <a:p>
             <a:r>
-              <a:t>  before a real failure does the testing for you.</a:t>
+              <a:t>before a real failure does the testing for you.</a:t>
             </a:r>
           </a:p>
           <a:p>
@@ -2143,7 +2143,7 @@
           </a:p>
           <a:p>
             <a:r>
-              <a:t>  glance.</a:t>
+              <a:t>glance.</a:t>
             </a:r>
           </a:p>
           <a:p>
@@ -2153,7 +2153,7 @@
           </a:p>
           <a:p>
             <a:r>
-              <a:t>  monitoring build).</a:t>
+              <a:t>monitoring build).</a:t>
             </a:r>
           </a:p>
           <a:p>
@@ -2163,7 +2163,7 @@
           </a:p>
           <a:p>
             <a:r>
-              <a:t>  evidence of the availability impact.</a:t>
+              <a:t>evidence of the availability impact.</a:t>
             </a:r>
           </a:p>
           <a:p>
@@ -2273,7 +2273,7 @@
           </a:p>
           <a:p>
             <a:r>
-              <a:t>  replace or fail over.</a:t>
+              <a:t>replace or fail over.</a:t>
             </a:r>
           </a:p>
           <a:p>
@@ -2288,7 +2288,7 @@
           </a:p>
           <a:p>
             <a:r>
-              <a:t>  fault tolerance PROVEN, the exact thing AT3 wants evidenced.</a:t>
+              <a:t>fault tolerance PROVEN, the exact thing AT3 wants evidenced.</a:t>
             </a:r>
           </a:p>
           <a:p>
@@ -5969,16 +5969,16 @@
             <a:r>
               <a:rPr sz="2400" b="1" i="0">
                 <a:solidFill>
-                  <a:srgbClr val="27B5CE"/>
+                  <a:srgbClr val="EDAB0C"/>
                 </a:solidFill>
                 <a:latin typeface="Roboto"/>
               </a:rPr>
               <a:t>■  </a:t>
             </a:r>
             <a:r>
-              <a:rPr sz="2400" b="1" i="0">
-                <a:solidFill>
-                  <a:srgbClr val="27B5CE"/>
+              <a:rPr sz="2400" b="0" i="0">
+                <a:solidFill>
+                  <a:srgbClr val="2A2929"/>
                 </a:solidFill>
                 <a:latin typeface="Roboto"/>
               </a:rPr>
@@ -6358,16 +6358,16 @@
             <a:r>
               <a:rPr sz="2400" b="1" i="0">
                 <a:solidFill>
-                  <a:srgbClr val="27B5CE"/>
+                  <a:srgbClr val="EDAB0C"/>
                 </a:solidFill>
                 <a:latin typeface="Roboto"/>
               </a:rPr>
               <a:t>■  </a:t>
             </a:r>
             <a:r>
-              <a:rPr sz="2400" b="1" i="0">
-                <a:solidFill>
-                  <a:srgbClr val="27B5CE"/>
+              <a:rPr sz="2400" b="0" i="0">
+                <a:solidFill>
+                  <a:srgbClr val="2A2929"/>
                 </a:solidFill>
                 <a:latin typeface="Roboto"/>
               </a:rPr>
@@ -6716,16 +6716,16 @@
             <a:r>
               <a:rPr sz="2400" b="1" i="0">
                 <a:solidFill>
-                  <a:srgbClr val="27B5CE"/>
+                  <a:srgbClr val="EDAB0C"/>
                 </a:solidFill>
                 <a:latin typeface="Roboto"/>
               </a:rPr>
               <a:t>■  </a:t>
             </a:r>
             <a:r>
-              <a:rPr sz="2400" b="1" i="0">
-                <a:solidFill>
-                  <a:srgbClr val="27B5CE"/>
+              <a:rPr sz="2400" b="0" i="0">
+                <a:solidFill>
+                  <a:srgbClr val="2A2929"/>
                 </a:solidFill>
                 <a:latin typeface="Roboto"/>
               </a:rPr>
@@ -7074,16 +7074,16 @@
             <a:r>
               <a:rPr sz="2400" b="1" i="0">
                 <a:solidFill>
-                  <a:srgbClr val="27B5CE"/>
+                  <a:srgbClr val="EDAB0C"/>
                 </a:solidFill>
                 <a:latin typeface="Roboto"/>
               </a:rPr>
               <a:t>■  </a:t>
             </a:r>
             <a:r>
-              <a:rPr sz="2400" b="1" i="0">
-                <a:solidFill>
-                  <a:srgbClr val="27B5CE"/>
+              <a:rPr sz="2400" b="0" i="0">
+                <a:solidFill>
+                  <a:srgbClr val="2A2929"/>
                 </a:solidFill>
                 <a:latin typeface="Roboto"/>
               </a:rPr>
@@ -7414,7 +7414,7 @@
               <a:t>■  </a:t>
             </a:r>
             <a:r>
-              <a:rPr sz="1700" b="1" i="0">
+              <a:rPr sz="1700" b="0" i="0">
                 <a:solidFill>
                   <a:srgbClr val="2A2929"/>
                 </a:solidFill>
@@ -7531,16 +7531,16 @@
             <a:r>
               <a:rPr sz="1700" b="1" i="0">
                 <a:solidFill>
-                  <a:srgbClr val="27B5CE"/>
+                  <a:srgbClr val="EDAB0C"/>
                 </a:solidFill>
                 <a:latin typeface="Roboto"/>
               </a:rPr>
               <a:t>■  </a:t>
             </a:r>
             <a:r>
-              <a:rPr sz="1700" b="1" i="0">
-                <a:solidFill>
-                  <a:srgbClr val="27B5CE"/>
+              <a:rPr sz="1700" b="0" i="0">
+                <a:solidFill>
+                  <a:srgbClr val="2A2929"/>
                 </a:solidFill>
                 <a:latin typeface="Roboto"/>
               </a:rPr>
@@ -8988,16 +8988,16 @@
             <a:r>
               <a:rPr sz="2400" b="1" i="0">
                 <a:solidFill>
-                  <a:srgbClr val="205F61"/>
+                  <a:srgbClr val="EDAB0C"/>
                 </a:solidFill>
                 <a:latin typeface="Roboto"/>
               </a:rPr>
               <a:t>■  </a:t>
             </a:r>
             <a:r>
-              <a:rPr sz="2400" b="1" i="0">
-                <a:solidFill>
-                  <a:srgbClr val="205F61"/>
+              <a:rPr sz="2400" b="0" i="0">
+                <a:solidFill>
+                  <a:srgbClr val="2A2929"/>
                 </a:solidFill>
                 <a:latin typeface="Roboto"/>
               </a:rPr>
@@ -9377,16 +9377,16 @@
             <a:r>
               <a:rPr sz="2400" b="1" i="0">
                 <a:solidFill>
-                  <a:srgbClr val="205F61"/>
+                  <a:srgbClr val="EDAB0C"/>
                 </a:solidFill>
                 <a:latin typeface="Roboto"/>
               </a:rPr>
               <a:t>■  </a:t>
             </a:r>
             <a:r>
-              <a:rPr sz="2400" b="1" i="0">
-                <a:solidFill>
-                  <a:srgbClr val="205F61"/>
+              <a:rPr sz="2400" b="0" i="0">
+                <a:solidFill>
+                  <a:srgbClr val="2A2929"/>
                 </a:solidFill>
                 <a:latin typeface="Roboto"/>
               </a:rPr>
@@ -9704,16 +9704,16 @@
             <a:r>
               <a:rPr sz="2400" b="1" i="0">
                 <a:solidFill>
-                  <a:srgbClr val="92268F"/>
+                  <a:srgbClr val="EDAB0C"/>
                 </a:solidFill>
                 <a:latin typeface="Roboto"/>
               </a:rPr>
               <a:t>■  </a:t>
             </a:r>
             <a:r>
-              <a:rPr sz="2400" b="1" i="0">
-                <a:solidFill>
-                  <a:srgbClr val="92268F"/>
+              <a:rPr sz="2400" b="0" i="0">
+                <a:solidFill>
+                  <a:srgbClr val="2A2929"/>
                 </a:solidFill>
                 <a:latin typeface="Roboto"/>
               </a:rPr>
@@ -10106,7 +10106,7 @@
               <a:t>■  </a:t>
             </a:r>
             <a:r>
-              <a:rPr sz="1700" b="1" i="0">
+              <a:rPr sz="1700" b="0" i="0">
                 <a:solidFill>
                   <a:srgbClr val="2A2929"/>
                 </a:solidFill>
@@ -10192,16 +10192,16 @@
             <a:r>
               <a:rPr sz="1700" b="1" i="0">
                 <a:solidFill>
-                  <a:srgbClr val="205F61"/>
+                  <a:srgbClr val="EDAB0C"/>
                 </a:solidFill>
                 <a:latin typeface="Roboto"/>
               </a:rPr>
               <a:t>■  </a:t>
             </a:r>
             <a:r>
-              <a:rPr sz="1700" b="1" i="0">
-                <a:solidFill>
-                  <a:srgbClr val="205F61"/>
+              <a:rPr sz="1700" b="0" i="0">
+                <a:solidFill>
+                  <a:srgbClr val="2A2929"/>
                 </a:solidFill>
                 <a:latin typeface="Roboto"/>
               </a:rPr>
@@ -11237,7 +11237,7 @@
             <a:r>
               <a:rPr sz="1800" b="1" i="0">
                 <a:solidFill>
-                  <a:srgbClr val="EDAB0C"/>
+                  <a:srgbClr val="205F61"/>
                 </a:solidFill>
                 <a:latin typeface="Roboto"/>
               </a:rPr>
@@ -11261,7 +11261,7 @@
             <a:avLst/>
           </a:prstGeom>
           <a:solidFill>
-            <a:srgbClr val="EDAB0C"/>
+            <a:srgbClr val="205F61"/>
           </a:solidFill>
           <a:ln>
             <a:noFill/>
@@ -11351,7 +11351,7 @@
             <a:avLst/>
           </a:prstGeom>
           <a:solidFill>
-            <a:srgbClr val="EDAB0C"/>
+            <a:srgbClr val="205F61"/>
           </a:solidFill>
           <a:ln>
             <a:noFill/>
@@ -11480,7 +11480,7 @@
             <a:avLst/>
           </a:prstGeom>
           <a:solidFill>
-            <a:srgbClr val="EDAB0C"/>
+            <a:srgbClr val="205F61"/>
           </a:solidFill>
           <a:ln>
             <a:noFill/>
@@ -11609,7 +11609,7 @@
             <a:avLst/>
           </a:prstGeom>
           <a:solidFill>
-            <a:srgbClr val="EDAB0C"/>
+            <a:srgbClr val="205F61"/>
           </a:solidFill>
           <a:ln>
             <a:noFill/>
@@ -11738,7 +11738,7 @@
             <a:avLst/>
           </a:prstGeom>
           <a:solidFill>
-            <a:srgbClr val="EDAB0C"/>
+            <a:srgbClr val="205F61"/>
           </a:solidFill>
           <a:ln>
             <a:noFill/>
@@ -11867,7 +11867,7 @@
             <a:avLst/>
           </a:prstGeom>
           <a:solidFill>
-            <a:srgbClr val="EDAB0C"/>
+            <a:srgbClr val="205F61"/>
           </a:solidFill>
           <a:ln>
             <a:noFill/>
@@ -11950,7 +11950,7 @@
             <a:avLst/>
           </a:prstGeom>
           <a:solidFill>
-            <a:srgbClr val="EDAB0C"/>
+            <a:srgbClr val="205F61"/>
           </a:solidFill>
           <a:ln>
             <a:noFill/>
@@ -12740,16 +12740,16 @@
             <a:r>
               <a:rPr sz="2400" b="1" i="0">
                 <a:solidFill>
-                  <a:srgbClr val="92268F"/>
+                  <a:srgbClr val="EDAB0C"/>
                 </a:solidFill>
                 <a:latin typeface="Roboto"/>
               </a:rPr>
               <a:t>■  </a:t>
             </a:r>
             <a:r>
-              <a:rPr sz="2400" b="1" i="0">
-                <a:solidFill>
-                  <a:srgbClr val="92268F"/>
+              <a:rPr sz="2400" b="0" i="0">
+                <a:solidFill>
+                  <a:srgbClr val="2A2929"/>
                 </a:solidFill>
                 <a:latin typeface="Roboto"/>
               </a:rPr>
@@ -13098,16 +13098,16 @@
             <a:r>
               <a:rPr sz="2400" b="1" i="0">
                 <a:solidFill>
-                  <a:srgbClr val="92268F"/>
+                  <a:srgbClr val="EDAB0C"/>
                 </a:solidFill>
                 <a:latin typeface="Roboto"/>
               </a:rPr>
               <a:t>■  </a:t>
             </a:r>
             <a:r>
-              <a:rPr sz="2400" b="1" i="0">
-                <a:solidFill>
-                  <a:srgbClr val="92268F"/>
+              <a:rPr sz="2400" b="0" i="0">
+                <a:solidFill>
+                  <a:srgbClr val="2A2929"/>
                 </a:solidFill>
                 <a:latin typeface="Roboto"/>
               </a:rPr>
@@ -13456,16 +13456,16 @@
             <a:r>
               <a:rPr sz="2400" b="1" i="0">
                 <a:solidFill>
-                  <a:srgbClr val="92268F"/>
+                  <a:srgbClr val="EDAB0C"/>
                 </a:solidFill>
                 <a:latin typeface="Roboto"/>
               </a:rPr>
               <a:t>■  </a:t>
             </a:r>
             <a:r>
-              <a:rPr sz="2400" b="1" i="0">
-                <a:solidFill>
-                  <a:srgbClr val="92268F"/>
+              <a:rPr sz="2400" b="0" i="0">
+                <a:solidFill>
+                  <a:srgbClr val="2A2929"/>
                 </a:solidFill>
                 <a:latin typeface="Roboto"/>
               </a:rPr>
@@ -14302,7 +14302,7 @@
               <a:t>■  </a:t>
             </a:r>
             <a:r>
-              <a:rPr sz="1700" b="1" i="0">
+              <a:rPr sz="1700" b="0" i="0">
                 <a:solidFill>
                   <a:srgbClr val="2A2929"/>
                 </a:solidFill>
@@ -14388,16 +14388,16 @@
             <a:r>
               <a:rPr sz="1700" b="1" i="0">
                 <a:solidFill>
-                  <a:srgbClr val="92268F"/>
+                  <a:srgbClr val="EDAB0C"/>
                 </a:solidFill>
                 <a:latin typeface="Roboto"/>
               </a:rPr>
               <a:t>■  </a:t>
             </a:r>
             <a:r>
-              <a:rPr sz="1700" b="1" i="0">
-                <a:solidFill>
-                  <a:srgbClr val="92268F"/>
+              <a:rPr sz="1700" b="0" i="0">
+                <a:solidFill>
+                  <a:srgbClr val="2A2929"/>
                 </a:solidFill>
                 <a:latin typeface="Roboto"/>
               </a:rPr>
